--- a/REPERTÓRIO/Repertório Rota do Chopp.pptx
+++ b/REPERTÓRIO/Repertório Rota do Chopp.pptx
@@ -5,7 +5,7 @@
     <p:sldMasterId id="2147483804" r:id="rId1"/>
   </p:sldMasterIdLst>
   <p:handoutMasterIdLst>
-    <p:handoutMasterId r:id="rId88"/>
+    <p:handoutMasterId r:id="rId65"/>
   </p:handoutMasterIdLst>
   <p:sldIdLst>
     <p:sldId id="392" r:id="rId2"/>
@@ -71,39 +71,6 @@
     <p:sldId id="442" r:id="rId62"/>
     <p:sldId id="443" r:id="rId63"/>
     <p:sldId id="444" r:id="rId64"/>
-    <p:sldId id="462" r:id="rId65"/>
-    <p:sldId id="445" r:id="rId66"/>
-    <p:sldId id="463" r:id="rId67"/>
-    <p:sldId id="446" r:id="rId68"/>
-    <p:sldId id="464" r:id="rId69"/>
-    <p:sldId id="447" r:id="rId70"/>
-    <p:sldId id="448" r:id="rId71"/>
-    <p:sldId id="449" r:id="rId72"/>
-    <p:sldId id="465" r:id="rId73"/>
-    <p:sldId id="450" r:id="rId74"/>
-    <p:sldId id="451" r:id="rId75"/>
-    <p:sldId id="452" r:id="rId76"/>
-    <p:sldId id="468" r:id="rId77"/>
-    <p:sldId id="453" r:id="rId78"/>
-    <p:sldId id="455" r:id="rId79"/>
-    <p:sldId id="456" r:id="rId80"/>
-    <p:sldId id="466" r:id="rId81"/>
-    <p:sldId id="467" r:id="rId82"/>
-    <p:sldId id="457" r:id="rId83"/>
-    <p:sldId id="458" r:id="rId84"/>
-    <p:sldId id="459" r:id="rId85"/>
-    <p:sldId id="460" r:id="rId86"/>
-    <p:sldId id="461" r:id="rId87"/>
-    <p:sldId id="469" r:id="rId95"/>
-    <p:sldId id="470" r:id="rId96"/>
-    <p:sldId id="471" r:id="rId97"/>
-    <p:sldId id="472" r:id="rId98"/>
-    <p:sldId id="473" r:id="rId99"/>
-    <p:sldId id="474" r:id="rId100"/>
-    <p:sldId id="475" r:id="rId101"/>
-    <p:sldId id="476" r:id="rId102"/>
-    <p:sldId id="477" r:id="rId103"/>
-    <p:sldId id="478" r:id="rId104"/>
   </p:sldIdLst>
   <p:sldSz cx="12192000" cy="6858000"/>
   <p:notesSz cx="6858000" cy="9144000"/>
@@ -235,380 +202,244 @@
 </p:presentation>
 </file>
 
-<file path=ppt/revisionInfo.xml><?xml version="1.0" encoding="utf-8"?>
-<p1510:revInfo xmlns:a="http://schemas.openxmlformats.org/drawingml/2006/main" xmlns:r="http://schemas.openxmlformats.org/officeDocument/2006/relationships" xmlns:p1510="http://schemas.microsoft.com/office/powerpoint/2015/10/main">
-  <p1510:revLst>
-    <p1510:client id="{F58C385E-3FEF-409B-904D-A96E811567F6}" v="1" dt="2026-05-30T16:24:45.650"/>
-  </p1510:revLst>
-</p1510:revInfo>
-</file>
-
 <file path=ppt/changesInfos/changesInfo1.xml><?xml version="1.0" encoding="utf-8"?>
 <pc:chgInfo xmlns:a="http://schemas.openxmlformats.org/drawingml/2006/main" xmlns:r="http://schemas.openxmlformats.org/officeDocument/2006/relationships" xmlns:ac="http://schemas.microsoft.com/office/drawing/2013/main/command" xmlns:pc="http://schemas.microsoft.com/office/powerpoint/2013/main/command">
   <pc:docChgLst>
     <pc:chgData name="Arthur Hack" userId="5b508c48246ea487" providerId="LiveId" clId="{789F42DD-A146-4A0A-A577-B549034765F6}"/>
     <pc:docChg chg="undo custSel addSld delSld modSld sldOrd">
-      <pc:chgData name="Arthur Hack" userId="5b508c48246ea487" providerId="LiveId" clId="{789F42DD-A146-4A0A-A577-B549034765F6}" dt="2026-05-30T16:30:15.260" v="2293" actId="2696"/>
+      <pc:chgData name="Arthur Hack" userId="5b508c48246ea487" providerId="LiveId" clId="{789F42DD-A146-4A0A-A577-B549034765F6}" dt="2026-10-07T22:23:59.426" v="2326" actId="2696"/>
       <pc:docMkLst>
         <pc:docMk/>
       </pc:docMkLst>
-      <pc:sldChg chg="modSp add mod ord">
-        <pc:chgData name="Arthur Hack" userId="5b508c48246ea487" providerId="LiveId" clId="{789F42DD-A146-4A0A-A577-B549034765F6}" dt="2026-05-30T16:24:47.393" v="2064" actId="20577"/>
+      <pc:sldChg chg="modSp add del mod ord">
+        <pc:chgData name="Arthur Hack" userId="5b508c48246ea487" providerId="LiveId" clId="{789F42DD-A146-4A0A-A577-B549034765F6}" dt="2026-10-07T22:23:59.425" v="2325" actId="2696"/>
         <pc:sldMkLst>
           <pc:docMk/>
           <pc:sldMk cId="1070335523" sldId="445"/>
         </pc:sldMkLst>
-        <pc:spChg chg="mod">
-          <ac:chgData name="Arthur Hack" userId="5b508c48246ea487" providerId="LiveId" clId="{789F42DD-A146-4A0A-A577-B549034765F6}" dt="2026-05-30T16:24:47.393" v="2064" actId="20577"/>
-          <ac:spMkLst>
-            <pc:docMk/>
-            <pc:sldMk cId="1070335523" sldId="445"/>
-            <ac:spMk id="3" creationId="{554091D0-D195-F876-EF51-4B0F6242B76D}"/>
-          </ac:spMkLst>
-        </pc:spChg>
       </pc:sldChg>
-      <pc:sldChg chg="modSp add mod">
-        <pc:chgData name="Arthur Hack" userId="5b508c48246ea487" providerId="LiveId" clId="{789F42DD-A146-4A0A-A577-B549034765F6}" dt="2026-05-30T16:25:09.091" v="2084" actId="20577"/>
+      <pc:sldChg chg="modSp add del mod">
+        <pc:chgData name="Arthur Hack" userId="5b508c48246ea487" providerId="LiveId" clId="{789F42DD-A146-4A0A-A577-B549034765F6}" dt="2026-10-07T22:23:59.420" v="2323" actId="2696"/>
         <pc:sldMkLst>
           <pc:docMk/>
           <pc:sldMk cId="4012791308" sldId="446"/>
         </pc:sldMkLst>
-        <pc:spChg chg="mod">
-          <ac:chgData name="Arthur Hack" userId="5b508c48246ea487" providerId="LiveId" clId="{789F42DD-A146-4A0A-A577-B549034765F6}" dt="2026-05-30T16:25:09.091" v="2084" actId="20577"/>
-          <ac:spMkLst>
-            <pc:docMk/>
-            <pc:sldMk cId="4012791308" sldId="446"/>
-            <ac:spMk id="3" creationId="{AB8799B4-3B8B-F365-674E-1AA758B1EB17}"/>
-          </ac:spMkLst>
-        </pc:spChg>
       </pc:sldChg>
-      <pc:sldChg chg="modSp add mod">
-        <pc:chgData name="Arthur Hack" userId="5b508c48246ea487" providerId="LiveId" clId="{789F42DD-A146-4A0A-A577-B549034765F6}" dt="2026-05-30T16:26:05.657" v="2104" actId="20577"/>
+      <pc:sldChg chg="modSp add del mod">
+        <pc:chgData name="Arthur Hack" userId="5b508c48246ea487" providerId="LiveId" clId="{789F42DD-A146-4A0A-A577-B549034765F6}" dt="2026-10-07T22:23:59.418" v="2321" actId="2696"/>
         <pc:sldMkLst>
           <pc:docMk/>
           <pc:sldMk cId="1076216" sldId="447"/>
         </pc:sldMkLst>
-        <pc:spChg chg="mod">
-          <ac:chgData name="Arthur Hack" userId="5b508c48246ea487" providerId="LiveId" clId="{789F42DD-A146-4A0A-A577-B549034765F6}" dt="2026-05-30T16:26:05.657" v="2104" actId="20577"/>
-          <ac:spMkLst>
-            <pc:docMk/>
-            <pc:sldMk cId="1076216" sldId="447"/>
-            <ac:spMk id="3" creationId="{D70FA326-5BDF-6400-83DF-E705E9993E0D}"/>
-          </ac:spMkLst>
-        </pc:spChg>
       </pc:sldChg>
-      <pc:sldChg chg="modSp add mod">
-        <pc:chgData name="Arthur Hack" userId="5b508c48246ea487" providerId="LiveId" clId="{789F42DD-A146-4A0A-A577-B549034765F6}" dt="2026-05-30T16:26:13.397" v="2112" actId="20577"/>
+      <pc:sldChg chg="modSp add del mod">
+        <pc:chgData name="Arthur Hack" userId="5b508c48246ea487" providerId="LiveId" clId="{789F42DD-A146-4A0A-A577-B549034765F6}" dt="2026-10-07T22:23:59.416" v="2320" actId="2696"/>
         <pc:sldMkLst>
           <pc:docMk/>
           <pc:sldMk cId="3786666785" sldId="448"/>
         </pc:sldMkLst>
-        <pc:spChg chg="mod">
-          <ac:chgData name="Arthur Hack" userId="5b508c48246ea487" providerId="LiveId" clId="{789F42DD-A146-4A0A-A577-B549034765F6}" dt="2026-05-30T16:26:13.397" v="2112" actId="20577"/>
-          <ac:spMkLst>
-            <pc:docMk/>
-            <pc:sldMk cId="3786666785" sldId="448"/>
-            <ac:spMk id="3" creationId="{9F4230CB-DDB7-2262-4B58-73E2DB8D298F}"/>
-          </ac:spMkLst>
-        </pc:spChg>
       </pc:sldChg>
-      <pc:sldChg chg="modSp add mod ord">
-        <pc:chgData name="Arthur Hack" userId="5b508c48246ea487" providerId="LiveId" clId="{789F42DD-A146-4A0A-A577-B549034765F6}" dt="2026-05-30T16:26:56.067" v="2138"/>
+      <pc:sldChg chg="modSp add del mod ord">
+        <pc:chgData name="Arthur Hack" userId="5b508c48246ea487" providerId="LiveId" clId="{789F42DD-A146-4A0A-A577-B549034765F6}" dt="2026-10-07T22:23:59.414" v="2319" actId="2696"/>
         <pc:sldMkLst>
           <pc:docMk/>
           <pc:sldMk cId="1306984352" sldId="449"/>
         </pc:sldMkLst>
-        <pc:spChg chg="mod">
-          <ac:chgData name="Arthur Hack" userId="5b508c48246ea487" providerId="LiveId" clId="{789F42DD-A146-4A0A-A577-B549034765F6}" dt="2026-05-30T16:26:27.535" v="2122" actId="20577"/>
-          <ac:spMkLst>
-            <pc:docMk/>
-            <pc:sldMk cId="1306984352" sldId="449"/>
-            <ac:spMk id="3" creationId="{BAD39500-4C53-34FC-FFED-640B4A9AC5A8}"/>
-          </ac:spMkLst>
-        </pc:spChg>
       </pc:sldChg>
-      <pc:sldChg chg="modSp add mod">
-        <pc:chgData name="Arthur Hack" userId="5b508c48246ea487" providerId="LiveId" clId="{789F42DD-A146-4A0A-A577-B549034765F6}" dt="2026-05-30T16:27:11.665" v="2147" actId="20577"/>
+      <pc:sldChg chg="modSp add del mod">
+        <pc:chgData name="Arthur Hack" userId="5b508c48246ea487" providerId="LiveId" clId="{789F42DD-A146-4A0A-A577-B549034765F6}" dt="2026-10-07T22:23:59.411" v="2317" actId="2696"/>
         <pc:sldMkLst>
           <pc:docMk/>
           <pc:sldMk cId="2398726471" sldId="450"/>
         </pc:sldMkLst>
-        <pc:spChg chg="mod">
-          <ac:chgData name="Arthur Hack" userId="5b508c48246ea487" providerId="LiveId" clId="{789F42DD-A146-4A0A-A577-B549034765F6}" dt="2026-05-30T16:27:11.665" v="2147" actId="20577"/>
-          <ac:spMkLst>
-            <pc:docMk/>
-            <pc:sldMk cId="2398726471" sldId="450"/>
-            <ac:spMk id="3" creationId="{5C144AC7-7E7A-A583-23E5-B6F06606FFAB}"/>
-          </ac:spMkLst>
-        </pc:spChg>
       </pc:sldChg>
-      <pc:sldChg chg="modSp add mod">
-        <pc:chgData name="Arthur Hack" userId="5b508c48246ea487" providerId="LiveId" clId="{789F42DD-A146-4A0A-A577-B549034765F6}" dt="2026-05-30T16:27:24.399" v="2156" actId="20577"/>
+      <pc:sldChg chg="modSp add del mod">
+        <pc:chgData name="Arthur Hack" userId="5b508c48246ea487" providerId="LiveId" clId="{789F42DD-A146-4A0A-A577-B549034765F6}" dt="2026-10-07T22:23:59.409" v="2316" actId="2696"/>
         <pc:sldMkLst>
           <pc:docMk/>
           <pc:sldMk cId="3598950300" sldId="451"/>
         </pc:sldMkLst>
-        <pc:spChg chg="mod">
-          <ac:chgData name="Arthur Hack" userId="5b508c48246ea487" providerId="LiveId" clId="{789F42DD-A146-4A0A-A577-B549034765F6}" dt="2026-05-30T16:27:24.399" v="2156" actId="20577"/>
-          <ac:spMkLst>
-            <pc:docMk/>
-            <pc:sldMk cId="3598950300" sldId="451"/>
-            <ac:spMk id="3" creationId="{3BCA5A68-A691-1DFC-B76A-A275278AFBCB}"/>
-          </ac:spMkLst>
-        </pc:spChg>
       </pc:sldChg>
-      <pc:sldChg chg="modSp add mod">
-        <pc:chgData name="Arthur Hack" userId="5b508c48246ea487" providerId="LiveId" clId="{789F42DD-A146-4A0A-A577-B549034765F6}" dt="2026-05-30T16:27:32.740" v="2165" actId="20577"/>
+      <pc:sldChg chg="modSp add del mod">
+        <pc:chgData name="Arthur Hack" userId="5b508c48246ea487" providerId="LiveId" clId="{789F42DD-A146-4A0A-A577-B549034765F6}" dt="2026-10-07T22:23:59.408" v="2315" actId="2696"/>
         <pc:sldMkLst>
           <pc:docMk/>
           <pc:sldMk cId="362358862" sldId="452"/>
         </pc:sldMkLst>
-        <pc:spChg chg="mod">
-          <ac:chgData name="Arthur Hack" userId="5b508c48246ea487" providerId="LiveId" clId="{789F42DD-A146-4A0A-A577-B549034765F6}" dt="2026-05-30T16:27:32.740" v="2165" actId="20577"/>
-          <ac:spMkLst>
-            <pc:docMk/>
-            <pc:sldMk cId="362358862" sldId="452"/>
-            <ac:spMk id="3" creationId="{73AF27D5-B5D7-7717-6A07-F624FC04DF33}"/>
-          </ac:spMkLst>
-        </pc:spChg>
       </pc:sldChg>
-      <pc:sldChg chg="modSp add mod">
-        <pc:chgData name="Arthur Hack" userId="5b508c48246ea487" providerId="LiveId" clId="{789F42DD-A146-4A0A-A577-B549034765F6}" dt="2026-05-30T16:27:49.629" v="2183" actId="20577"/>
+      <pc:sldChg chg="modSp add del mod">
+        <pc:chgData name="Arthur Hack" userId="5b508c48246ea487" providerId="LiveId" clId="{789F42DD-A146-4A0A-A577-B549034765F6}" dt="2026-10-07T22:23:59.403" v="2313" actId="2696"/>
         <pc:sldMkLst>
           <pc:docMk/>
           <pc:sldMk cId="2164039857" sldId="453"/>
         </pc:sldMkLst>
-        <pc:spChg chg="mod">
-          <ac:chgData name="Arthur Hack" userId="5b508c48246ea487" providerId="LiveId" clId="{789F42DD-A146-4A0A-A577-B549034765F6}" dt="2026-05-30T16:27:49.629" v="2183" actId="20577"/>
-          <ac:spMkLst>
-            <pc:docMk/>
-            <pc:sldMk cId="2164039857" sldId="453"/>
-            <ac:spMk id="3" creationId="{6A491B2F-C47D-F267-D199-7649973F762F}"/>
-          </ac:spMkLst>
-        </pc:spChg>
       </pc:sldChg>
-      <pc:sldChg chg="add del">
-        <pc:chgData name="Arthur Hack" userId="5b508c48246ea487" providerId="LiveId" clId="{789F42DD-A146-4A0A-A577-B549034765F6}" dt="2026-05-29T16:47:09.106" v="1733" actId="2696"/>
-        <pc:sldMkLst>
-          <pc:docMk/>
-          <pc:sldMk cId="1570470751" sldId="454"/>
-        </pc:sldMkLst>
-      </pc:sldChg>
-      <pc:sldChg chg="modSp add mod">
-        <pc:chgData name="Arthur Hack" userId="5b508c48246ea487" providerId="LiveId" clId="{789F42DD-A146-4A0A-A577-B549034765F6}" dt="2026-05-30T16:27:58.570" v="2192" actId="20577"/>
+      <pc:sldChg chg="modSp add del mod">
+        <pc:chgData name="Arthur Hack" userId="5b508c48246ea487" providerId="LiveId" clId="{789F42DD-A146-4A0A-A577-B549034765F6}" dt="2026-10-07T22:23:59.401" v="2312" actId="2696"/>
         <pc:sldMkLst>
           <pc:docMk/>
           <pc:sldMk cId="1397947532" sldId="455"/>
         </pc:sldMkLst>
-        <pc:spChg chg="mod">
-          <ac:chgData name="Arthur Hack" userId="5b508c48246ea487" providerId="LiveId" clId="{789F42DD-A146-4A0A-A577-B549034765F6}" dt="2026-05-30T16:27:58.570" v="2192" actId="20577"/>
-          <ac:spMkLst>
-            <pc:docMk/>
-            <pc:sldMk cId="1397947532" sldId="455"/>
-            <ac:spMk id="3" creationId="{1CCD7301-FE06-33D8-B74C-D9421B199C02}"/>
-          </ac:spMkLst>
-        </pc:spChg>
       </pc:sldChg>
-      <pc:sldChg chg="modSp add mod">
-        <pc:chgData name="Arthur Hack" userId="5b508c48246ea487" providerId="LiveId" clId="{789F42DD-A146-4A0A-A577-B549034765F6}" dt="2026-05-30T16:28:06.813" v="2201" actId="20577"/>
+      <pc:sldChg chg="modSp add del mod">
+        <pc:chgData name="Arthur Hack" userId="5b508c48246ea487" providerId="LiveId" clId="{789F42DD-A146-4A0A-A577-B549034765F6}" dt="2026-10-07T22:23:59.399" v="2311" actId="2696"/>
         <pc:sldMkLst>
           <pc:docMk/>
           <pc:sldMk cId="3110158297" sldId="456"/>
         </pc:sldMkLst>
-        <pc:spChg chg="mod">
-          <ac:chgData name="Arthur Hack" userId="5b508c48246ea487" providerId="LiveId" clId="{789F42DD-A146-4A0A-A577-B549034765F6}" dt="2026-05-30T16:28:06.813" v="2201" actId="20577"/>
-          <ac:spMkLst>
-            <pc:docMk/>
-            <pc:sldMk cId="3110158297" sldId="456"/>
-            <ac:spMk id="3" creationId="{2AC924BC-F62C-79CC-E31A-7623E1BCB835}"/>
-          </ac:spMkLst>
-        </pc:spChg>
       </pc:sldChg>
-      <pc:sldChg chg="modSp add mod">
-        <pc:chgData name="Arthur Hack" userId="5b508c48246ea487" providerId="LiveId" clId="{789F42DD-A146-4A0A-A577-B549034765F6}" dt="2026-05-30T16:28:54.951" v="2244" actId="20577"/>
+      <pc:sldChg chg="modSp add del mod">
+        <pc:chgData name="Arthur Hack" userId="5b508c48246ea487" providerId="LiveId" clId="{789F42DD-A146-4A0A-A577-B549034765F6}" dt="2026-10-07T22:23:59.393" v="2308" actId="2696"/>
         <pc:sldMkLst>
           <pc:docMk/>
           <pc:sldMk cId="3606821582" sldId="457"/>
         </pc:sldMkLst>
-        <pc:spChg chg="mod">
-          <ac:chgData name="Arthur Hack" userId="5b508c48246ea487" providerId="LiveId" clId="{789F42DD-A146-4A0A-A577-B549034765F6}" dt="2026-05-30T16:28:54.951" v="2244" actId="20577"/>
-          <ac:spMkLst>
-            <pc:docMk/>
-            <pc:sldMk cId="3606821582" sldId="457"/>
-            <ac:spMk id="3" creationId="{6772618C-C58E-C917-D49B-9C5A94891A9A}"/>
-          </ac:spMkLst>
-        </pc:spChg>
       </pc:sldChg>
-      <pc:sldChg chg="modSp add mod">
-        <pc:chgData name="Arthur Hack" userId="5b508c48246ea487" providerId="LiveId" clId="{789F42DD-A146-4A0A-A577-B549034765F6}" dt="2026-05-30T16:29:02.916" v="2257" actId="20577"/>
+      <pc:sldChg chg="modSp add del mod">
+        <pc:chgData name="Arthur Hack" userId="5b508c48246ea487" providerId="LiveId" clId="{789F42DD-A146-4A0A-A577-B549034765F6}" dt="2026-10-07T22:23:59.391" v="2307" actId="2696"/>
         <pc:sldMkLst>
           <pc:docMk/>
           <pc:sldMk cId="3534636844" sldId="458"/>
         </pc:sldMkLst>
-        <pc:spChg chg="mod">
-          <ac:chgData name="Arthur Hack" userId="5b508c48246ea487" providerId="LiveId" clId="{789F42DD-A146-4A0A-A577-B549034765F6}" dt="2026-05-30T16:29:02.916" v="2257" actId="20577"/>
-          <ac:spMkLst>
-            <pc:docMk/>
-            <pc:sldMk cId="3534636844" sldId="458"/>
-            <ac:spMk id="3" creationId="{4F49180E-CF19-DCBB-8BE5-CEBA7D2879E2}"/>
-          </ac:spMkLst>
-        </pc:spChg>
       </pc:sldChg>
-      <pc:sldChg chg="modSp add mod">
-        <pc:chgData name="Arthur Hack" userId="5b508c48246ea487" providerId="LiveId" clId="{789F42DD-A146-4A0A-A577-B549034765F6}" dt="2026-05-30T16:29:09.974" v="2266" actId="20577"/>
+      <pc:sldChg chg="modSp add del mod">
+        <pc:chgData name="Arthur Hack" userId="5b508c48246ea487" providerId="LiveId" clId="{789F42DD-A146-4A0A-A577-B549034765F6}" dt="2026-10-07T22:23:59.389" v="2306" actId="2696"/>
         <pc:sldMkLst>
           <pc:docMk/>
           <pc:sldMk cId="2701725271" sldId="459"/>
         </pc:sldMkLst>
-        <pc:spChg chg="mod">
-          <ac:chgData name="Arthur Hack" userId="5b508c48246ea487" providerId="LiveId" clId="{789F42DD-A146-4A0A-A577-B549034765F6}" dt="2026-05-30T16:29:09.974" v="2266" actId="20577"/>
-          <ac:spMkLst>
-            <pc:docMk/>
-            <pc:sldMk cId="2701725271" sldId="459"/>
-            <ac:spMk id="3" creationId="{9A828EEE-9FC6-D3EE-F215-9117F8B04108}"/>
-          </ac:spMkLst>
-        </pc:spChg>
       </pc:sldChg>
-      <pc:sldChg chg="modSp add mod">
-        <pc:chgData name="Arthur Hack" userId="5b508c48246ea487" providerId="LiveId" clId="{789F42DD-A146-4A0A-A577-B549034765F6}" dt="2026-05-30T16:29:15.697" v="2275" actId="20577"/>
+      <pc:sldChg chg="modSp add del mod">
+        <pc:chgData name="Arthur Hack" userId="5b508c48246ea487" providerId="LiveId" clId="{789F42DD-A146-4A0A-A577-B549034765F6}" dt="2026-10-07T22:23:59.387" v="2305" actId="2696"/>
         <pc:sldMkLst>
           <pc:docMk/>
           <pc:sldMk cId="2144242260" sldId="460"/>
         </pc:sldMkLst>
-        <pc:spChg chg="mod">
-          <ac:chgData name="Arthur Hack" userId="5b508c48246ea487" providerId="LiveId" clId="{789F42DD-A146-4A0A-A577-B549034765F6}" dt="2026-05-30T16:29:15.697" v="2275" actId="20577"/>
-          <ac:spMkLst>
-            <pc:docMk/>
-            <pc:sldMk cId="2144242260" sldId="460"/>
-            <ac:spMk id="3" creationId="{B512BE16-7D88-7FAD-8E12-6744BEE2C4E8}"/>
-          </ac:spMkLst>
-        </pc:spChg>
       </pc:sldChg>
-      <pc:sldChg chg="modSp add mod">
-        <pc:chgData name="Arthur Hack" userId="5b508c48246ea487" providerId="LiveId" clId="{789F42DD-A146-4A0A-A577-B549034765F6}" dt="2026-05-30T16:29:31.709" v="2286" actId="20577"/>
+      <pc:sldChg chg="modSp add del mod">
+        <pc:chgData name="Arthur Hack" userId="5b508c48246ea487" providerId="LiveId" clId="{789F42DD-A146-4A0A-A577-B549034765F6}" dt="2026-10-07T22:23:59.385" v="2304" actId="2696"/>
         <pc:sldMkLst>
           <pc:docMk/>
           <pc:sldMk cId="744409674" sldId="461"/>
         </pc:sldMkLst>
-        <pc:spChg chg="mod">
-          <ac:chgData name="Arthur Hack" userId="5b508c48246ea487" providerId="LiveId" clId="{789F42DD-A146-4A0A-A577-B549034765F6}" dt="2026-05-30T16:29:31.709" v="2286" actId="20577"/>
-          <ac:spMkLst>
-            <pc:docMk/>
-            <pc:sldMk cId="744409674" sldId="461"/>
-            <ac:spMk id="3" creationId="{7C70BAA2-54A1-BAA9-5EF9-9F93F22AE700}"/>
-          </ac:spMkLst>
-        </pc:spChg>
       </pc:sldChg>
-      <pc:sldChg chg="modSp add mod ord">
-        <pc:chgData name="Arthur Hack" userId="5b508c48246ea487" providerId="LiveId" clId="{789F42DD-A146-4A0A-A577-B549034765F6}" dt="2026-05-30T16:29:56.640" v="2291" actId="20577"/>
+      <pc:sldChg chg="modSp add del mod ord">
+        <pc:chgData name="Arthur Hack" userId="5b508c48246ea487" providerId="LiveId" clId="{789F42DD-A146-4A0A-A577-B549034765F6}" dt="2026-10-07T22:23:59.426" v="2326" actId="2696"/>
         <pc:sldMkLst>
           <pc:docMk/>
           <pc:sldMk cId="4060310530" sldId="462"/>
         </pc:sldMkLst>
-        <pc:spChg chg="mod">
-          <ac:chgData name="Arthur Hack" userId="5b508c48246ea487" providerId="LiveId" clId="{789F42DD-A146-4A0A-A577-B549034765F6}" dt="2026-05-30T16:29:56.640" v="2291" actId="20577"/>
-          <ac:spMkLst>
-            <pc:docMk/>
-            <pc:sldMk cId="4060310530" sldId="462"/>
-            <ac:spMk id="3" creationId="{FBE6D060-6F7A-F4C1-D2E4-0F06598530F1}"/>
-          </ac:spMkLst>
-        </pc:spChg>
       </pc:sldChg>
-      <pc:sldChg chg="modSp add mod ord">
-        <pc:chgData name="Arthur Hack" userId="5b508c48246ea487" providerId="LiveId" clId="{789F42DD-A146-4A0A-A577-B549034765F6}" dt="2026-05-30T16:25:04.270" v="2076" actId="20577"/>
+      <pc:sldChg chg="modSp add del mod ord">
+        <pc:chgData name="Arthur Hack" userId="5b508c48246ea487" providerId="LiveId" clId="{789F42DD-A146-4A0A-A577-B549034765F6}" dt="2026-10-07T22:23:59.422" v="2324" actId="2696"/>
         <pc:sldMkLst>
           <pc:docMk/>
           <pc:sldMk cId="3330486890" sldId="463"/>
         </pc:sldMkLst>
-        <pc:spChg chg="mod">
-          <ac:chgData name="Arthur Hack" userId="5b508c48246ea487" providerId="LiveId" clId="{789F42DD-A146-4A0A-A577-B549034765F6}" dt="2026-05-30T16:25:04.270" v="2076" actId="20577"/>
-          <ac:spMkLst>
-            <pc:docMk/>
-            <pc:sldMk cId="3330486890" sldId="463"/>
-            <ac:spMk id="3" creationId="{39EE4D5B-4F39-DB7A-9AFE-865775B1E0C2}"/>
-          </ac:spMkLst>
-        </pc:spChg>
       </pc:sldChg>
-      <pc:sldChg chg="modSp add mod ord">
-        <pc:chgData name="Arthur Hack" userId="5b508c48246ea487" providerId="LiveId" clId="{789F42DD-A146-4A0A-A577-B549034765F6}" dt="2026-05-30T16:26:01.247" v="2094" actId="20577"/>
+      <pc:sldChg chg="modSp add del mod ord">
+        <pc:chgData name="Arthur Hack" userId="5b508c48246ea487" providerId="LiveId" clId="{789F42DD-A146-4A0A-A577-B549034765F6}" dt="2026-10-07T22:23:59.419" v="2322" actId="2696"/>
         <pc:sldMkLst>
           <pc:docMk/>
           <pc:sldMk cId="493967408" sldId="464"/>
         </pc:sldMkLst>
-        <pc:spChg chg="mod">
-          <ac:chgData name="Arthur Hack" userId="5b508c48246ea487" providerId="LiveId" clId="{789F42DD-A146-4A0A-A577-B549034765F6}" dt="2026-05-30T16:26:01.247" v="2094" actId="20577"/>
-          <ac:spMkLst>
-            <pc:docMk/>
-            <pc:sldMk cId="493967408" sldId="464"/>
-            <ac:spMk id="3" creationId="{6E2BC6E7-FDE6-1691-A86C-C34065B08312}"/>
-          </ac:spMkLst>
-        </pc:spChg>
       </pc:sldChg>
-      <pc:sldChg chg="modSp add mod ord">
-        <pc:chgData name="Arthur Hack" userId="5b508c48246ea487" providerId="LiveId" clId="{789F42DD-A146-4A0A-A577-B549034765F6}" dt="2026-05-30T16:26:52.953" v="2136" actId="20577"/>
+      <pc:sldChg chg="modSp add del mod ord">
+        <pc:chgData name="Arthur Hack" userId="5b508c48246ea487" providerId="LiveId" clId="{789F42DD-A146-4A0A-A577-B549034765F6}" dt="2026-10-07T22:23:59.412" v="2318" actId="2696"/>
         <pc:sldMkLst>
           <pc:docMk/>
           <pc:sldMk cId="361883740" sldId="465"/>
         </pc:sldMkLst>
-        <pc:spChg chg="mod">
-          <ac:chgData name="Arthur Hack" userId="5b508c48246ea487" providerId="LiveId" clId="{789F42DD-A146-4A0A-A577-B549034765F6}" dt="2026-05-30T16:26:52.953" v="2136" actId="20577"/>
-          <ac:spMkLst>
-            <pc:docMk/>
-            <pc:sldMk cId="361883740" sldId="465"/>
-            <ac:spMk id="3" creationId="{4C755BA8-088E-D120-16F8-A2B670A31D6F}"/>
-          </ac:spMkLst>
-        </pc:spChg>
       </pc:sldChg>
-      <pc:sldChg chg="modSp add mod ord">
-        <pc:chgData name="Arthur Hack" userId="5b508c48246ea487" providerId="LiveId" clId="{789F42DD-A146-4A0A-A577-B549034765F6}" dt="2026-05-30T16:29:38.594" v="2287" actId="207"/>
+      <pc:sldChg chg="modSp add del mod ord">
+        <pc:chgData name="Arthur Hack" userId="5b508c48246ea487" providerId="LiveId" clId="{789F42DD-A146-4A0A-A577-B549034765F6}" dt="2026-10-07T22:23:59.397" v="2310" actId="2696"/>
         <pc:sldMkLst>
           <pc:docMk/>
           <pc:sldMk cId="1721671897" sldId="466"/>
         </pc:sldMkLst>
-        <pc:spChg chg="mod">
-          <ac:chgData name="Arthur Hack" userId="5b508c48246ea487" providerId="LiveId" clId="{789F42DD-A146-4A0A-A577-B549034765F6}" dt="2026-05-30T16:29:38.594" v="2287" actId="207"/>
-          <ac:spMkLst>
-            <pc:docMk/>
-            <pc:sldMk cId="1721671897" sldId="466"/>
-            <ac:spMk id="3" creationId="{DE402F7C-E595-D55C-27A2-60AE59A49604}"/>
-          </ac:spMkLst>
-        </pc:spChg>
       </pc:sldChg>
-      <pc:sldChg chg="modSp add mod ord">
-        <pc:chgData name="Arthur Hack" userId="5b508c48246ea487" providerId="LiveId" clId="{789F42DD-A146-4A0A-A577-B549034765F6}" dt="2026-05-30T16:28:39.253" v="2224" actId="20577"/>
+      <pc:sldChg chg="modSp add del mod ord">
+        <pc:chgData name="Arthur Hack" userId="5b508c48246ea487" providerId="LiveId" clId="{789F42DD-A146-4A0A-A577-B549034765F6}" dt="2026-10-07T22:23:59.394" v="2309" actId="2696"/>
         <pc:sldMkLst>
           <pc:docMk/>
           <pc:sldMk cId="893400633" sldId="467"/>
         </pc:sldMkLst>
-        <pc:spChg chg="mod">
-          <ac:chgData name="Arthur Hack" userId="5b508c48246ea487" providerId="LiveId" clId="{789F42DD-A146-4A0A-A577-B549034765F6}" dt="2026-05-30T16:28:39.253" v="2224" actId="20577"/>
-          <ac:spMkLst>
-            <pc:docMk/>
-            <pc:sldMk cId="893400633" sldId="467"/>
-            <ac:spMk id="3" creationId="{3B3A97F9-544A-86ED-A8D4-3908F9C6C0D3}"/>
-          </ac:spMkLst>
-        </pc:spChg>
       </pc:sldChg>
-      <pc:sldChg chg="modSp add mod">
-        <pc:chgData name="Arthur Hack" userId="5b508c48246ea487" providerId="LiveId" clId="{789F42DD-A146-4A0A-A577-B549034765F6}" dt="2026-05-30T16:27:40.780" v="2174" actId="20577"/>
+      <pc:sldChg chg="modSp add del mod">
+        <pc:chgData name="Arthur Hack" userId="5b508c48246ea487" providerId="LiveId" clId="{789F42DD-A146-4A0A-A577-B549034765F6}" dt="2026-10-07T22:23:59.406" v="2314" actId="2696"/>
         <pc:sldMkLst>
           <pc:docMk/>
           <pc:sldMk cId="1320483128" sldId="468"/>
         </pc:sldMkLst>
-        <pc:spChg chg="mod">
-          <ac:chgData name="Arthur Hack" userId="5b508c48246ea487" providerId="LiveId" clId="{789F42DD-A146-4A0A-A577-B549034765F6}" dt="2026-05-30T16:27:40.780" v="2174" actId="20577"/>
-          <ac:spMkLst>
-            <pc:docMk/>
-            <pc:sldMk cId="1320483128" sldId="468"/>
-            <ac:spMk id="3" creationId="{0849DDBB-6AD7-2570-23C0-15112A9CE0D6}"/>
-          </ac:spMkLst>
-        </pc:spChg>
       </pc:sldChg>
-      <pc:sldChg chg="new del">
-        <pc:chgData name="Arthur Hack" userId="5b508c48246ea487" providerId="LiveId" clId="{789F42DD-A146-4A0A-A577-B549034765F6}" dt="2026-05-30T16:30:15.260" v="2293" actId="2696"/>
+      <pc:sldChg chg="del">
+        <pc:chgData name="Arthur Hack" userId="5b508c48246ea487" providerId="LiveId" clId="{789F42DD-A146-4A0A-A577-B549034765F6}" dt="2026-10-07T22:23:59.383" v="2303" actId="2696"/>
         <pc:sldMkLst>
           <pc:docMk/>
-          <pc:sldMk cId="1499417712" sldId="469"/>
+          <pc:sldMk cId="0" sldId="469"/>
+        </pc:sldMkLst>
+      </pc:sldChg>
+      <pc:sldChg chg="del">
+        <pc:chgData name="Arthur Hack" userId="5b508c48246ea487" providerId="LiveId" clId="{789F42DD-A146-4A0A-A577-B549034765F6}" dt="2026-10-07T22:23:59.382" v="2302" actId="2696"/>
+        <pc:sldMkLst>
+          <pc:docMk/>
+          <pc:sldMk cId="0" sldId="470"/>
+        </pc:sldMkLst>
+      </pc:sldChg>
+      <pc:sldChg chg="del">
+        <pc:chgData name="Arthur Hack" userId="5b508c48246ea487" providerId="LiveId" clId="{789F42DD-A146-4A0A-A577-B549034765F6}" dt="2026-10-07T22:23:59.380" v="2301" actId="2696"/>
+        <pc:sldMkLst>
+          <pc:docMk/>
+          <pc:sldMk cId="0" sldId="471"/>
+        </pc:sldMkLst>
+      </pc:sldChg>
+      <pc:sldChg chg="del">
+        <pc:chgData name="Arthur Hack" userId="5b508c48246ea487" providerId="LiveId" clId="{789F42DD-A146-4A0A-A577-B549034765F6}" dt="2026-10-07T22:23:59.378" v="2300" actId="2696"/>
+        <pc:sldMkLst>
+          <pc:docMk/>
+          <pc:sldMk cId="0" sldId="472"/>
+        </pc:sldMkLst>
+      </pc:sldChg>
+      <pc:sldChg chg="del">
+        <pc:chgData name="Arthur Hack" userId="5b508c48246ea487" providerId="LiveId" clId="{789F42DD-A146-4A0A-A577-B549034765F6}" dt="2026-10-07T22:23:59.377" v="2299" actId="2696"/>
+        <pc:sldMkLst>
+          <pc:docMk/>
+          <pc:sldMk cId="0" sldId="473"/>
+        </pc:sldMkLst>
+      </pc:sldChg>
+      <pc:sldChg chg="del">
+        <pc:chgData name="Arthur Hack" userId="5b508c48246ea487" providerId="LiveId" clId="{789F42DD-A146-4A0A-A577-B549034765F6}" dt="2026-10-07T22:23:59.375" v="2298" actId="2696"/>
+        <pc:sldMkLst>
+          <pc:docMk/>
+          <pc:sldMk cId="0" sldId="474"/>
+        </pc:sldMkLst>
+      </pc:sldChg>
+      <pc:sldChg chg="del">
+        <pc:chgData name="Arthur Hack" userId="5b508c48246ea487" providerId="LiveId" clId="{789F42DD-A146-4A0A-A577-B549034765F6}" dt="2026-10-07T22:23:59.373" v="2297" actId="2696"/>
+        <pc:sldMkLst>
+          <pc:docMk/>
+          <pc:sldMk cId="0" sldId="475"/>
+        </pc:sldMkLst>
+      </pc:sldChg>
+      <pc:sldChg chg="del">
+        <pc:chgData name="Arthur Hack" userId="5b508c48246ea487" providerId="LiveId" clId="{789F42DD-A146-4A0A-A577-B549034765F6}" dt="2026-10-07T22:23:59.372" v="2296" actId="2696"/>
+        <pc:sldMkLst>
+          <pc:docMk/>
+          <pc:sldMk cId="0" sldId="476"/>
+        </pc:sldMkLst>
+      </pc:sldChg>
+      <pc:sldChg chg="del">
+        <pc:chgData name="Arthur Hack" userId="5b508c48246ea487" providerId="LiveId" clId="{789F42DD-A146-4A0A-A577-B549034765F6}" dt="2026-10-07T22:23:59.371" v="2295" actId="2696"/>
+        <pc:sldMkLst>
+          <pc:docMk/>
+          <pc:sldMk cId="0" sldId="477"/>
+        </pc:sldMkLst>
+      </pc:sldChg>
+      <pc:sldChg chg="del">
+        <pc:chgData name="Arthur Hack" userId="5b508c48246ea487" providerId="LiveId" clId="{789F42DD-A146-4A0A-A577-B549034765F6}" dt="2026-10-07T22:23:59.369" v="2294" actId="2696"/>
+        <pc:sldMkLst>
+          <pc:docMk/>
+          <pc:sldMk cId="0" sldId="478"/>
         </pc:sldMkLst>
       </pc:sldChg>
     </pc:docChg>
@@ -698,7 +529,7 @@
           <a:p>
             <a:fld id="{9F69E24D-9DBE-4DAB-A481-718B3C423892}" type="datetimeFigureOut">
               <a:rPr lang="pt-BR" smtClean="0"/>
-              <a:t>29/05/2026</a:t>
+              <a:t>07/10/2026</a:t>
             </a:fld>
             <a:endParaRPr lang="pt-BR"/>
           </a:p>
@@ -915,7 +746,7 @@
             <a:fld id="{BB0B304C-6D9A-40FB-A8B9-28880A8BB8D2}" type="datetimeFigureOut">
               <a:rPr lang="pt-BR" smtClean="0"/>
               <a:pPr/>
-              <a:t>29/05/2026</a:t>
+              <a:t>07/10/2026</a:t>
             </a:fld>
             <a:endParaRPr lang="pt-BR"/>
           </a:p>
@@ -1204,7 +1035,7 @@
             <a:fld id="{BB0B304C-6D9A-40FB-A8B9-28880A8BB8D2}" type="datetimeFigureOut">
               <a:rPr lang="pt-BR" smtClean="0"/>
               <a:pPr/>
-              <a:t>29/05/2026</a:t>
+              <a:t>07/10/2026</a:t>
             </a:fld>
             <a:endParaRPr lang="pt-BR"/>
           </a:p>
@@ -1398,7 +1229,7 @@
             <a:fld id="{BB0B304C-6D9A-40FB-A8B9-28880A8BB8D2}" type="datetimeFigureOut">
               <a:rPr lang="pt-BR" smtClean="0"/>
               <a:pPr/>
-              <a:t>29/05/2026</a:t>
+              <a:t>07/10/2026</a:t>
             </a:fld>
             <a:endParaRPr lang="pt-BR"/>
           </a:p>
@@ -1661,7 +1492,7 @@
             <a:fld id="{BB0B304C-6D9A-40FB-A8B9-28880A8BB8D2}" type="datetimeFigureOut">
               <a:rPr lang="pt-BR" smtClean="0"/>
               <a:pPr/>
-              <a:t>29/05/2026</a:t>
+              <a:t>07/10/2026</a:t>
             </a:fld>
             <a:endParaRPr lang="pt-BR"/>
           </a:p>
@@ -2087,7 +1918,7 @@
             <a:fld id="{BB0B304C-6D9A-40FB-A8B9-28880A8BB8D2}" type="datetimeFigureOut">
               <a:rPr lang="pt-BR" smtClean="0"/>
               <a:pPr/>
-              <a:t>29/05/2026</a:t>
+              <a:t>07/10/2026</a:t>
             </a:fld>
             <a:endParaRPr lang="pt-BR"/>
           </a:p>
@@ -2635,7 +2466,7 @@
             <a:fld id="{BB0B304C-6D9A-40FB-A8B9-28880A8BB8D2}" type="datetimeFigureOut">
               <a:rPr lang="pt-BR" smtClean="0"/>
               <a:pPr/>
-              <a:t>29/05/2026</a:t>
+              <a:t>07/10/2026</a:t>
             </a:fld>
             <a:endParaRPr lang="pt-BR"/>
           </a:p>
@@ -3477,7 +3308,7 @@
             <a:fld id="{BB0B304C-6D9A-40FB-A8B9-28880A8BB8D2}" type="datetimeFigureOut">
               <a:rPr lang="pt-BR" smtClean="0"/>
               <a:pPr/>
-              <a:t>29/05/2026</a:t>
+              <a:t>07/10/2026</a:t>
             </a:fld>
             <a:endParaRPr lang="pt-BR"/>
           </a:p>
@@ -3649,7 +3480,7 @@
             <a:fld id="{BB0B304C-6D9A-40FB-A8B9-28880A8BB8D2}" type="datetimeFigureOut">
               <a:rPr lang="pt-BR" smtClean="0"/>
               <a:pPr/>
-              <a:t>29/05/2026</a:t>
+              <a:t>07/10/2026</a:t>
             </a:fld>
             <a:endParaRPr lang="pt-BR"/>
           </a:p>
@@ -3835,7 +3666,7 @@
             <a:fld id="{BB0B304C-6D9A-40FB-A8B9-28880A8BB8D2}" type="datetimeFigureOut">
               <a:rPr lang="pt-BR" smtClean="0"/>
               <a:pPr/>
-              <a:t>29/05/2026</a:t>
+              <a:t>07/10/2026</a:t>
             </a:fld>
             <a:endParaRPr lang="pt-BR"/>
           </a:p>
@@ -4007,7 +3838,7 @@
             <a:fld id="{BB0B304C-6D9A-40FB-A8B9-28880A8BB8D2}" type="datetimeFigureOut">
               <a:rPr lang="pt-BR" smtClean="0"/>
               <a:pPr/>
-              <a:t>29/05/2026</a:t>
+              <a:t>07/10/2026</a:t>
             </a:fld>
             <a:endParaRPr lang="pt-BR"/>
           </a:p>
@@ -4257,7 +4088,7 @@
             <a:fld id="{BB0B304C-6D9A-40FB-A8B9-28880A8BB8D2}" type="datetimeFigureOut">
               <a:rPr lang="pt-BR" smtClean="0"/>
               <a:pPr/>
-              <a:t>29/05/2026</a:t>
+              <a:t>07/10/2026</a:t>
             </a:fld>
             <a:endParaRPr lang="pt-BR"/>
           </a:p>
@@ -4496,7 +4327,7 @@
             <a:fld id="{BB0B304C-6D9A-40FB-A8B9-28880A8BB8D2}" type="datetimeFigureOut">
               <a:rPr lang="pt-BR" smtClean="0"/>
               <a:pPr/>
-              <a:t>29/05/2026</a:t>
+              <a:t>07/10/2026</a:t>
             </a:fld>
             <a:endParaRPr lang="pt-BR"/>
           </a:p>
@@ -4871,7 +4702,7 @@
             <a:fld id="{BB0B304C-6D9A-40FB-A8B9-28880A8BB8D2}" type="datetimeFigureOut">
               <a:rPr lang="pt-BR" smtClean="0"/>
               <a:pPr/>
-              <a:t>29/05/2026</a:t>
+              <a:t>07/10/2026</a:t>
             </a:fld>
             <a:endParaRPr lang="pt-BR"/>
           </a:p>
@@ -4991,7 +4822,7 @@
             <a:fld id="{BB0B304C-6D9A-40FB-A8B9-28880A8BB8D2}" type="datetimeFigureOut">
               <a:rPr lang="pt-BR" smtClean="0"/>
               <a:pPr/>
-              <a:t>29/05/2026</a:t>
+              <a:t>07/10/2026</a:t>
             </a:fld>
             <a:endParaRPr lang="pt-BR"/>
           </a:p>
@@ -5088,7 +4919,7 @@
             <a:fld id="{BB0B304C-6D9A-40FB-A8B9-28880A8BB8D2}" type="datetimeFigureOut">
               <a:rPr lang="pt-BR" smtClean="0"/>
               <a:pPr/>
-              <a:t>29/05/2026</a:t>
+              <a:t>07/10/2026</a:t>
             </a:fld>
             <a:endParaRPr lang="pt-BR"/>
           </a:p>
@@ -5341,7 +5172,7 @@
             <a:fld id="{BB0B304C-6D9A-40FB-A8B9-28880A8BB8D2}" type="datetimeFigureOut">
               <a:rPr lang="pt-BR" smtClean="0"/>
               <a:pPr/>
-              <a:t>29/05/2026</a:t>
+              <a:t>07/10/2026</a:t>
             </a:fld>
             <a:endParaRPr lang="pt-BR"/>
           </a:p>
@@ -5630,7 +5461,7 @@
             <a:fld id="{BB0B304C-6D9A-40FB-A8B9-28880A8BB8D2}" type="datetimeFigureOut">
               <a:rPr lang="pt-BR" smtClean="0"/>
               <a:pPr/>
-              <a:t>29/05/2026</a:t>
+              <a:t>07/10/2026</a:t>
             </a:fld>
             <a:endParaRPr lang="pt-BR"/>
           </a:p>
@@ -5845,7 +5676,7 @@
             <a:fld id="{BB0B304C-6D9A-40FB-A8B9-28880A8BB8D2}" type="datetimeFigureOut">
               <a:rPr lang="pt-BR" smtClean="0"/>
               <a:pPr/>
-              <a:t>29/05/2026</a:t>
+              <a:t>07/10/2026</a:t>
             </a:fld>
             <a:endParaRPr lang="pt-BR"/>
           </a:p>
@@ -14789,1085 +14620,6 @@
 </p:sld>
 </file>
 
-<file path=ppt/slides/slide64.xml><?xml version="1.0" encoding="utf-8"?>
-<p:sld xmlns:a="http://schemas.openxmlformats.org/drawingml/2006/main" xmlns:r="http://schemas.openxmlformats.org/officeDocument/2006/relationships" xmlns:p="http://schemas.openxmlformats.org/presentationml/2006/main">
-  <p:cSld>
-    <p:spTree>
-      <p:nvGrpSpPr>
-        <p:cNvPr id="1" name="">
-          <a:extLst>
-            <a:ext uri="{FF2B5EF4-FFF2-40B4-BE49-F238E27FC236}">
-              <a16:creationId xmlns:a16="http://schemas.microsoft.com/office/drawing/2014/main" id="{FA779B5E-51D5-CC6F-C103-505EE3493684}"/>
-            </a:ext>
-          </a:extLst>
-        </p:cNvPr>
-        <p:cNvGrpSpPr/>
-        <p:nvPr/>
-      </p:nvGrpSpPr>
-      <p:grpSpPr>
-        <a:xfrm>
-          <a:off x="0" y="0"/>
-          <a:ext cx="0" cy="0"/>
-          <a:chOff x="0" y="0"/>
-          <a:chExt cx="0" cy="0"/>
-        </a:xfrm>
-      </p:grpSpPr>
-      <p:sp>
-        <p:nvSpPr>
-          <p:cNvPr id="3" name="Espaço Reservado para Conteúdo 2">
-            <a:extLst>
-              <a:ext uri="{FF2B5EF4-FFF2-40B4-BE49-F238E27FC236}">
-                <a16:creationId xmlns:a16="http://schemas.microsoft.com/office/drawing/2014/main" id="{FBE6D060-6F7A-F4C1-D2E4-0F06598530F1}"/>
-              </a:ext>
-            </a:extLst>
-          </p:cNvPr>
-          <p:cNvSpPr>
-            <a:spLocks noGrp="1"/>
-          </p:cNvSpPr>
-          <p:nvPr>
-            <p:ph idx="1"/>
-          </p:nvPr>
-        </p:nvSpPr>
-        <p:spPr>
-          <a:xfrm>
-            <a:off x="10509" y="-3937"/>
-            <a:ext cx="12181491" cy="6861937"/>
-          </a:xfrm>
-        </p:spPr>
-        <p:txBody>
-          <a:bodyPr>
-            <a:noAutofit/>
-          </a:bodyPr>
-          <a:lstStyle/>
-          <a:p>
-            <a:pPr algn="ctr">
-              <a:lnSpc>
-                <a:spcPct val="100000"/>
-              </a:lnSpc>
-              <a:buNone/>
-            </a:pPr>
-            <a:r>
-              <a:rPr lang="en-US" sz="8800" dirty="0">
-                <a:solidFill>
-                  <a:srgbClr val="FF0000"/>
-                </a:solidFill>
-                <a:cs typeface="Arial" panose="020B0604020202020204" pitchFamily="34" charset="0"/>
-              </a:rPr>
-              <a:t>VS BLOCO 1</a:t>
-            </a:r>
-          </a:p>
-          <a:p>
-            <a:pPr marL="36000" indent="-252000" algn="ctr">
-              <a:lnSpc>
-                <a:spcPct val="100000"/>
-              </a:lnSpc>
-              <a:spcBef>
-                <a:spcPts val="0"/>
-              </a:spcBef>
-              <a:buNone/>
-            </a:pPr>
-            <a:r>
-              <a:rPr lang="en-US" sz="7200" dirty="0" err="1">
-                <a:cs typeface="Arial" panose="020B0604020202020204" pitchFamily="34" charset="0"/>
-              </a:rPr>
-              <a:t>Alambique</a:t>
-            </a:r>
-            <a:r>
-              <a:rPr lang="en-US" sz="7200" dirty="0">
-                <a:cs typeface="Arial" panose="020B0604020202020204" pitchFamily="34" charset="0"/>
-              </a:rPr>
-              <a:t> </a:t>
-            </a:r>
-            <a:r>
-              <a:rPr lang="en-US" sz="7200" dirty="0">
-                <a:solidFill>
-                  <a:srgbClr val="FF0000"/>
-                </a:solidFill>
-                <a:cs typeface="Arial" panose="020B0604020202020204" pitchFamily="34" charset="0"/>
-              </a:rPr>
-              <a:t>Mi</a:t>
-            </a:r>
-          </a:p>
-          <a:p>
-            <a:pPr marL="36000" indent="-252000" algn="ctr">
-              <a:lnSpc>
-                <a:spcPct val="100000"/>
-              </a:lnSpc>
-              <a:spcBef>
-                <a:spcPts val="0"/>
-              </a:spcBef>
-              <a:buNone/>
-            </a:pPr>
-            <a:r>
-              <a:rPr lang="en-US" sz="7200" dirty="0">
-                <a:cs typeface="Arial" panose="020B0604020202020204" pitchFamily="34" charset="0"/>
-              </a:rPr>
-              <a:t>Pode </a:t>
-            </a:r>
-            <a:r>
-              <a:rPr lang="en-US" sz="7200" dirty="0" err="1">
-                <a:cs typeface="Arial" panose="020B0604020202020204" pitchFamily="34" charset="0"/>
-              </a:rPr>
-              <a:t>Passar</a:t>
-            </a:r>
-            <a:r>
-              <a:rPr lang="en-US" sz="7200" dirty="0">
-                <a:cs typeface="Arial" panose="020B0604020202020204" pitchFamily="34" charset="0"/>
-              </a:rPr>
-              <a:t> o Rodo </a:t>
-            </a:r>
-            <a:r>
-              <a:rPr lang="en-US" sz="7200" dirty="0">
-                <a:solidFill>
-                  <a:srgbClr val="FF0000"/>
-                </a:solidFill>
-                <a:cs typeface="Arial" panose="020B0604020202020204" pitchFamily="34" charset="0"/>
-              </a:rPr>
-              <a:t>Sib</a:t>
-            </a:r>
-          </a:p>
-          <a:p>
-            <a:pPr marL="36000" indent="-252000" algn="ctr">
-              <a:lnSpc>
-                <a:spcPct val="100000"/>
-              </a:lnSpc>
-              <a:spcBef>
-                <a:spcPts val="0"/>
-              </a:spcBef>
-              <a:buNone/>
-            </a:pPr>
-            <a:r>
-              <a:rPr lang="en-US" sz="7200" dirty="0" err="1">
-                <a:cs typeface="Arial" panose="020B0604020202020204" pitchFamily="34" charset="0"/>
-              </a:rPr>
-              <a:t>Sofro</a:t>
-            </a:r>
-            <a:r>
-              <a:rPr lang="en-US" sz="7200" dirty="0">
-                <a:cs typeface="Arial" panose="020B0604020202020204" pitchFamily="34" charset="0"/>
-              </a:rPr>
-              <a:t> e Choro </a:t>
-            </a:r>
-            <a:r>
-              <a:rPr lang="en-US" sz="7200" dirty="0" err="1">
-                <a:solidFill>
-                  <a:srgbClr val="FF0000"/>
-                </a:solidFill>
-                <a:cs typeface="Arial" panose="020B0604020202020204" pitchFamily="34" charset="0"/>
-              </a:rPr>
-              <a:t>Ré</a:t>
-            </a:r>
-            <a:endParaRPr lang="pt-BR" sz="7200" dirty="0">
-              <a:solidFill>
-                <a:srgbClr val="FF0000"/>
-              </a:solidFill>
-              <a:cs typeface="Arial" panose="020B0604020202020204" pitchFamily="34" charset="0"/>
-            </a:endParaRPr>
-          </a:p>
-          <a:p>
-            <a:pPr algn="ctr">
-              <a:lnSpc>
-                <a:spcPct val="100000"/>
-              </a:lnSpc>
-              <a:buNone/>
-            </a:pPr>
-            <a:endParaRPr lang="pt-BR" sz="8000" dirty="0">
-              <a:solidFill>
-                <a:srgbClr val="FF0000"/>
-              </a:solidFill>
-              <a:cs typeface="Arial" panose="020B0604020202020204" pitchFamily="34" charset="0"/>
-            </a:endParaRPr>
-          </a:p>
-        </p:txBody>
-      </p:sp>
-    </p:spTree>
-    <p:extLst>
-      <p:ext uri="{BB962C8B-B14F-4D97-AF65-F5344CB8AC3E}">
-        <p14:creationId xmlns:p14="http://schemas.microsoft.com/office/powerpoint/2010/main" val="4060310530"/>
-      </p:ext>
-    </p:extLst>
-  </p:cSld>
-  <p:clrMapOvr>
-    <a:masterClrMapping/>
-  </p:clrMapOvr>
-</p:sld>
-</file>
-
-<file path=ppt/slides/slide65.xml><?xml version="1.0" encoding="utf-8"?>
-<p:sld xmlns:a="http://schemas.openxmlformats.org/drawingml/2006/main" xmlns:r="http://schemas.openxmlformats.org/officeDocument/2006/relationships" xmlns:p="http://schemas.openxmlformats.org/presentationml/2006/main">
-  <p:cSld>
-    <p:spTree>
-      <p:nvGrpSpPr>
-        <p:cNvPr id="1" name="">
-          <a:extLst>
-            <a:ext uri="{FF2B5EF4-FFF2-40B4-BE49-F238E27FC236}">
-              <a16:creationId xmlns:a16="http://schemas.microsoft.com/office/drawing/2014/main" id="{F28AD9F0-B35F-2D15-A508-D4F12D91CD44}"/>
-            </a:ext>
-          </a:extLst>
-        </p:cNvPr>
-        <p:cNvGrpSpPr/>
-        <p:nvPr/>
-      </p:nvGrpSpPr>
-      <p:grpSpPr>
-        <a:xfrm>
-          <a:off x="0" y="0"/>
-          <a:ext cx="0" cy="0"/>
-          <a:chOff x="0" y="0"/>
-          <a:chExt cx="0" cy="0"/>
-        </a:xfrm>
-      </p:grpSpPr>
-      <p:sp>
-        <p:nvSpPr>
-          <p:cNvPr id="3" name="Espaço Reservado para Conteúdo 2">
-            <a:extLst>
-              <a:ext uri="{FF2B5EF4-FFF2-40B4-BE49-F238E27FC236}">
-                <a16:creationId xmlns:a16="http://schemas.microsoft.com/office/drawing/2014/main" id="{554091D0-D195-F876-EF51-4B0F6242B76D}"/>
-              </a:ext>
-            </a:extLst>
-          </p:cNvPr>
-          <p:cNvSpPr>
-            <a:spLocks noGrp="1"/>
-          </p:cNvSpPr>
-          <p:nvPr>
-            <p:ph idx="1"/>
-          </p:nvPr>
-        </p:nvSpPr>
-        <p:spPr>
-          <a:xfrm>
-            <a:off x="10509" y="-3937"/>
-            <a:ext cx="12181491" cy="6861937"/>
-          </a:xfrm>
-        </p:spPr>
-        <p:txBody>
-          <a:bodyPr>
-            <a:noAutofit/>
-          </a:bodyPr>
-          <a:lstStyle/>
-          <a:p>
-            <a:pPr algn="ctr">
-              <a:lnSpc>
-                <a:spcPct val="100000"/>
-              </a:lnSpc>
-              <a:buNone/>
-            </a:pPr>
-            <a:r>
-              <a:rPr lang="en-US" sz="8800" dirty="0">
-                <a:solidFill>
-                  <a:srgbClr val="FF0000"/>
-                </a:solidFill>
-                <a:cs typeface="Arial" panose="020B0604020202020204" pitchFamily="34" charset="0"/>
-              </a:rPr>
-              <a:t>VS BLOCO 2</a:t>
-            </a:r>
-          </a:p>
-          <a:p>
-            <a:pPr marL="36000" indent="-252000" algn="ctr">
-              <a:lnSpc>
-                <a:spcPct val="100000"/>
-              </a:lnSpc>
-              <a:spcBef>
-                <a:spcPts val="0"/>
-              </a:spcBef>
-              <a:buNone/>
-            </a:pPr>
-            <a:r>
-              <a:rPr lang="pt-BR" sz="7200" dirty="0"/>
-              <a:t>Amor </a:t>
-            </a:r>
-            <a:r>
-              <a:rPr lang="pt-BR" sz="7200" dirty="0" err="1"/>
-              <a:t>Carrapixo</a:t>
-            </a:r>
-            <a:r>
-              <a:rPr lang="pt-BR" sz="7200" dirty="0"/>
-              <a:t> </a:t>
-            </a:r>
-            <a:r>
-              <a:rPr lang="pt-BR" sz="7200" dirty="0" err="1">
-                <a:solidFill>
-                  <a:srgbClr val="FF0000"/>
-                </a:solidFill>
-              </a:rPr>
-              <a:t>Mib</a:t>
-            </a:r>
-            <a:br>
-              <a:rPr lang="pt-BR" sz="7200" dirty="0"/>
-            </a:br>
-            <a:r>
-              <a:rPr lang="pt-BR" sz="7200" dirty="0"/>
-              <a:t>Casa Cair </a:t>
-            </a:r>
-            <a:r>
-              <a:rPr lang="pt-BR" sz="7200" dirty="0">
-                <a:solidFill>
-                  <a:srgbClr val="FF0000"/>
-                </a:solidFill>
-              </a:rPr>
-              <a:t>Sol</a:t>
-            </a:r>
-            <a:br>
-              <a:rPr lang="pt-BR" sz="7200" dirty="0"/>
-            </a:br>
-            <a:r>
-              <a:rPr lang="pt-BR" sz="7200" dirty="0"/>
-              <a:t>Sola Da Bota </a:t>
-            </a:r>
-            <a:r>
-              <a:rPr lang="pt-BR" sz="7200" dirty="0">
-                <a:solidFill>
-                  <a:srgbClr val="FF0000"/>
-                </a:solidFill>
-              </a:rPr>
-              <a:t>La</a:t>
-            </a:r>
-            <a:br>
-              <a:rPr lang="pt-BR" sz="7200" dirty="0"/>
-            </a:br>
-            <a:r>
-              <a:rPr lang="pt-BR" sz="7200" dirty="0"/>
-              <a:t>Garagem Da Vizinha </a:t>
-            </a:r>
-            <a:r>
-              <a:rPr lang="pt-BR" sz="7200" dirty="0">
-                <a:solidFill>
-                  <a:srgbClr val="FF0000"/>
-                </a:solidFill>
-              </a:rPr>
-              <a:t>Do</a:t>
-            </a:r>
-            <a:endParaRPr lang="pt-BR" sz="8000" dirty="0">
-              <a:solidFill>
-                <a:srgbClr val="FF0000"/>
-              </a:solidFill>
-              <a:cs typeface="Arial" panose="020B0604020202020204" pitchFamily="34" charset="0"/>
-            </a:endParaRPr>
-          </a:p>
-        </p:txBody>
-      </p:sp>
-    </p:spTree>
-    <p:extLst>
-      <p:ext uri="{BB962C8B-B14F-4D97-AF65-F5344CB8AC3E}">
-        <p14:creationId xmlns:p14="http://schemas.microsoft.com/office/powerpoint/2010/main" val="1070335523"/>
-      </p:ext>
-    </p:extLst>
-  </p:cSld>
-  <p:clrMapOvr>
-    <a:masterClrMapping/>
-  </p:clrMapOvr>
-</p:sld>
-</file>
-
-<file path=ppt/slides/slide66.xml><?xml version="1.0" encoding="utf-8"?>
-<p:sld xmlns:a="http://schemas.openxmlformats.org/drawingml/2006/main" xmlns:r="http://schemas.openxmlformats.org/officeDocument/2006/relationships" xmlns:p="http://schemas.openxmlformats.org/presentationml/2006/main">
-  <p:cSld>
-    <p:spTree>
-      <p:nvGrpSpPr>
-        <p:cNvPr id="1" name="">
-          <a:extLst>
-            <a:ext uri="{FF2B5EF4-FFF2-40B4-BE49-F238E27FC236}">
-              <a16:creationId xmlns:a16="http://schemas.microsoft.com/office/drawing/2014/main" id="{77C7A167-C098-6DE2-837D-3E66E24479F2}"/>
-            </a:ext>
-          </a:extLst>
-        </p:cNvPr>
-        <p:cNvGrpSpPr/>
-        <p:nvPr/>
-      </p:nvGrpSpPr>
-      <p:grpSpPr>
-        <a:xfrm>
-          <a:off x="0" y="0"/>
-          <a:ext cx="0" cy="0"/>
-          <a:chOff x="0" y="0"/>
-          <a:chExt cx="0" cy="0"/>
-        </a:xfrm>
-      </p:grpSpPr>
-      <p:sp>
-        <p:nvSpPr>
-          <p:cNvPr id="3" name="Espaço Reservado para Conteúdo 2">
-            <a:extLst>
-              <a:ext uri="{FF2B5EF4-FFF2-40B4-BE49-F238E27FC236}">
-                <a16:creationId xmlns:a16="http://schemas.microsoft.com/office/drawing/2014/main" id="{39EE4D5B-4F39-DB7A-9AFE-865775B1E0C2}"/>
-              </a:ext>
-            </a:extLst>
-          </p:cNvPr>
-          <p:cNvSpPr>
-            <a:spLocks noGrp="1"/>
-          </p:cNvSpPr>
-          <p:nvPr>
-            <p:ph idx="1"/>
-          </p:nvPr>
-        </p:nvSpPr>
-        <p:spPr>
-          <a:xfrm>
-            <a:off x="10509" y="-3937"/>
-            <a:ext cx="12181491" cy="6861937"/>
-          </a:xfrm>
-        </p:spPr>
-        <p:txBody>
-          <a:bodyPr>
-            <a:noAutofit/>
-          </a:bodyPr>
-          <a:lstStyle/>
-          <a:p>
-            <a:pPr algn="ctr">
-              <a:lnSpc>
-                <a:spcPct val="100000"/>
-              </a:lnSpc>
-              <a:buNone/>
-            </a:pPr>
-            <a:r>
-              <a:rPr lang="en-US" sz="8800" dirty="0">
-                <a:solidFill>
-                  <a:srgbClr val="FF0000"/>
-                </a:solidFill>
-                <a:cs typeface="Arial" panose="020B0604020202020204" pitchFamily="34" charset="0"/>
-              </a:rPr>
-              <a:t>VS BLOCO 3</a:t>
-            </a:r>
-          </a:p>
-          <a:p>
-            <a:pPr marL="36000" indent="-252000" algn="ctr">
-              <a:lnSpc>
-                <a:spcPct val="100000"/>
-              </a:lnSpc>
-              <a:spcBef>
-                <a:spcPts val="0"/>
-              </a:spcBef>
-              <a:buNone/>
-            </a:pPr>
-            <a:r>
-              <a:rPr lang="en-US" sz="7200" dirty="0">
-                <a:cs typeface="Arial" panose="020B0604020202020204" pitchFamily="34" charset="0"/>
-              </a:rPr>
-              <a:t>Barco do Amor </a:t>
-            </a:r>
-            <a:r>
-              <a:rPr lang="en-US" sz="7200" dirty="0">
-                <a:solidFill>
-                  <a:srgbClr val="FF0000"/>
-                </a:solidFill>
-                <a:cs typeface="Arial" panose="020B0604020202020204" pitchFamily="34" charset="0"/>
-              </a:rPr>
-              <a:t>Fa</a:t>
-            </a:r>
-          </a:p>
-          <a:p>
-            <a:pPr marL="36000" indent="-252000" algn="ctr">
-              <a:lnSpc>
-                <a:spcPct val="100000"/>
-              </a:lnSpc>
-              <a:spcBef>
-                <a:spcPts val="0"/>
-              </a:spcBef>
-              <a:buNone/>
-            </a:pPr>
-            <a:r>
-              <a:rPr lang="en-US" sz="7200" dirty="0">
-                <a:cs typeface="Arial" panose="020B0604020202020204" pitchFamily="34" charset="0"/>
-              </a:rPr>
-              <a:t>Sem Amor </a:t>
-            </a:r>
-            <a:r>
-              <a:rPr lang="en-US" sz="7200" dirty="0" err="1">
-                <a:cs typeface="Arial" panose="020B0604020202020204" pitchFamily="34" charset="0"/>
-              </a:rPr>
-              <a:t>Ningém</a:t>
-            </a:r>
-            <a:r>
-              <a:rPr lang="en-US" sz="7200" dirty="0">
-                <a:cs typeface="Arial" panose="020B0604020202020204" pitchFamily="34" charset="0"/>
-              </a:rPr>
-              <a:t> </a:t>
-            </a:r>
-            <a:r>
-              <a:rPr lang="en-US" sz="7200" dirty="0" err="1">
-                <a:cs typeface="Arial" panose="020B0604020202020204" pitchFamily="34" charset="0"/>
-              </a:rPr>
-              <a:t>Vive</a:t>
-            </a:r>
-            <a:r>
-              <a:rPr lang="en-US" sz="7200" dirty="0">
-                <a:cs typeface="Arial" panose="020B0604020202020204" pitchFamily="34" charset="0"/>
-              </a:rPr>
-              <a:t> </a:t>
-            </a:r>
-            <a:r>
-              <a:rPr lang="en-US" sz="7200" dirty="0" err="1">
-                <a:solidFill>
-                  <a:srgbClr val="FF0000"/>
-                </a:solidFill>
-                <a:cs typeface="Arial" panose="020B0604020202020204" pitchFamily="34" charset="0"/>
-              </a:rPr>
-              <a:t>Ré</a:t>
-            </a:r>
-            <a:endParaRPr lang="en-US" sz="7200" dirty="0">
-              <a:solidFill>
-                <a:srgbClr val="FF0000"/>
-              </a:solidFill>
-              <a:cs typeface="Arial" panose="020B0604020202020204" pitchFamily="34" charset="0"/>
-            </a:endParaRPr>
-          </a:p>
-          <a:p>
-            <a:pPr marL="36000" indent="-252000" algn="ctr">
-              <a:lnSpc>
-                <a:spcPct val="100000"/>
-              </a:lnSpc>
-              <a:spcBef>
-                <a:spcPts val="0"/>
-              </a:spcBef>
-              <a:buNone/>
-            </a:pPr>
-            <a:r>
-              <a:rPr lang="en-US" sz="7200" dirty="0" err="1">
-                <a:cs typeface="Arial" panose="020B0604020202020204" pitchFamily="34" charset="0"/>
-              </a:rPr>
-              <a:t>Rosto</a:t>
-            </a:r>
-            <a:r>
-              <a:rPr lang="en-US" sz="7200" dirty="0">
-                <a:cs typeface="Arial" panose="020B0604020202020204" pitchFamily="34" charset="0"/>
-              </a:rPr>
-              <a:t> Desmaquiado </a:t>
-            </a:r>
-            <a:r>
-              <a:rPr lang="en-US" sz="7200" dirty="0">
-                <a:solidFill>
-                  <a:srgbClr val="FF0000"/>
-                </a:solidFill>
-                <a:cs typeface="Arial" panose="020B0604020202020204" pitchFamily="34" charset="0"/>
-              </a:rPr>
-              <a:t>Mi</a:t>
-            </a:r>
-          </a:p>
-          <a:p>
-            <a:pPr marL="36000" indent="-252000" algn="ctr">
-              <a:lnSpc>
-                <a:spcPct val="100000"/>
-              </a:lnSpc>
-              <a:spcBef>
-                <a:spcPts val="0"/>
-              </a:spcBef>
-              <a:buNone/>
-            </a:pPr>
-            <a:r>
-              <a:rPr lang="en-US" sz="7200" dirty="0">
-                <a:cs typeface="Arial" panose="020B0604020202020204" pitchFamily="34" charset="0"/>
-              </a:rPr>
-              <a:t>Vida Cor de Rosa </a:t>
-            </a:r>
-            <a:r>
-              <a:rPr lang="en-US" sz="7200" dirty="0" err="1">
-                <a:solidFill>
-                  <a:srgbClr val="FF0000"/>
-                </a:solidFill>
-                <a:cs typeface="Arial" panose="020B0604020202020204" pitchFamily="34" charset="0"/>
-              </a:rPr>
-              <a:t>Ré</a:t>
-            </a:r>
-            <a:endParaRPr lang="pt-BR" sz="7200" dirty="0">
-              <a:solidFill>
-                <a:srgbClr val="FF0000"/>
-              </a:solidFill>
-              <a:cs typeface="Arial" panose="020B0604020202020204" pitchFamily="34" charset="0"/>
-            </a:endParaRPr>
-          </a:p>
-          <a:p>
-            <a:pPr algn="ctr">
-              <a:lnSpc>
-                <a:spcPct val="100000"/>
-              </a:lnSpc>
-              <a:buNone/>
-            </a:pPr>
-            <a:endParaRPr lang="pt-BR" sz="8000" dirty="0">
-              <a:solidFill>
-                <a:srgbClr val="FF0000"/>
-              </a:solidFill>
-              <a:cs typeface="Arial" panose="020B0604020202020204" pitchFamily="34" charset="0"/>
-            </a:endParaRPr>
-          </a:p>
-        </p:txBody>
-      </p:sp>
-    </p:spTree>
-    <p:extLst>
-      <p:ext uri="{BB962C8B-B14F-4D97-AF65-F5344CB8AC3E}">
-        <p14:creationId xmlns:p14="http://schemas.microsoft.com/office/powerpoint/2010/main" val="3330486890"/>
-      </p:ext>
-    </p:extLst>
-  </p:cSld>
-  <p:clrMapOvr>
-    <a:masterClrMapping/>
-  </p:clrMapOvr>
-</p:sld>
-</file>
-
-<file path=ppt/slides/slide67.xml><?xml version="1.0" encoding="utf-8"?>
-<p:sld xmlns:a="http://schemas.openxmlformats.org/drawingml/2006/main" xmlns:r="http://schemas.openxmlformats.org/officeDocument/2006/relationships" xmlns:p="http://schemas.openxmlformats.org/presentationml/2006/main">
-  <p:cSld>
-    <p:spTree>
-      <p:nvGrpSpPr>
-        <p:cNvPr id="1" name="">
-          <a:extLst>
-            <a:ext uri="{FF2B5EF4-FFF2-40B4-BE49-F238E27FC236}">
-              <a16:creationId xmlns:a16="http://schemas.microsoft.com/office/drawing/2014/main" id="{527368F7-8463-5FDF-B0A7-9FD33561A555}"/>
-            </a:ext>
-          </a:extLst>
-        </p:cNvPr>
-        <p:cNvGrpSpPr/>
-        <p:nvPr/>
-      </p:nvGrpSpPr>
-      <p:grpSpPr>
-        <a:xfrm>
-          <a:off x="0" y="0"/>
-          <a:ext cx="0" cy="0"/>
-          <a:chOff x="0" y="0"/>
-          <a:chExt cx="0" cy="0"/>
-        </a:xfrm>
-      </p:grpSpPr>
-      <p:sp>
-        <p:nvSpPr>
-          <p:cNvPr id="3" name="Espaço Reservado para Conteúdo 2">
-            <a:extLst>
-              <a:ext uri="{FF2B5EF4-FFF2-40B4-BE49-F238E27FC236}">
-                <a16:creationId xmlns:a16="http://schemas.microsoft.com/office/drawing/2014/main" id="{AB8799B4-3B8B-F365-674E-1AA758B1EB17}"/>
-              </a:ext>
-            </a:extLst>
-          </p:cNvPr>
-          <p:cNvSpPr>
-            <a:spLocks noGrp="1"/>
-          </p:cNvSpPr>
-          <p:nvPr>
-            <p:ph idx="1"/>
-          </p:nvPr>
-        </p:nvSpPr>
-        <p:spPr>
-          <a:xfrm>
-            <a:off x="10509" y="-3937"/>
-            <a:ext cx="12181491" cy="6861937"/>
-          </a:xfrm>
-        </p:spPr>
-        <p:txBody>
-          <a:bodyPr>
-            <a:noAutofit/>
-          </a:bodyPr>
-          <a:lstStyle/>
-          <a:p>
-            <a:pPr algn="ctr">
-              <a:lnSpc>
-                <a:spcPct val="100000"/>
-              </a:lnSpc>
-              <a:buNone/>
-            </a:pPr>
-            <a:r>
-              <a:rPr lang="en-US" sz="8800" dirty="0">
-                <a:solidFill>
-                  <a:srgbClr val="FF0000"/>
-                </a:solidFill>
-                <a:cs typeface="Arial" panose="020B0604020202020204" pitchFamily="34" charset="0"/>
-              </a:rPr>
-              <a:t>VS BLOCO 4</a:t>
-            </a:r>
-          </a:p>
-          <a:p>
-            <a:pPr marL="36000" indent="-252000" algn="ctr">
-              <a:lnSpc>
-                <a:spcPct val="100000"/>
-              </a:lnSpc>
-              <a:spcBef>
-                <a:spcPts val="0"/>
-              </a:spcBef>
-              <a:buNone/>
-            </a:pPr>
-            <a:r>
-              <a:rPr lang="pt-BR" sz="7200" dirty="0" err="1"/>
-              <a:t>Barquinnha</a:t>
-            </a:r>
-            <a:r>
-              <a:rPr lang="pt-BR" sz="7200" dirty="0"/>
-              <a:t> De Ouro </a:t>
-            </a:r>
-            <a:r>
-              <a:rPr lang="pt-BR" sz="7200" dirty="0" err="1">
-                <a:solidFill>
-                  <a:srgbClr val="FF0000"/>
-                </a:solidFill>
-              </a:rPr>
-              <a:t>Fa</a:t>
-            </a:r>
-            <a:r>
-              <a:rPr lang="pt-BR" sz="7200" dirty="0">
-                <a:solidFill>
-                  <a:srgbClr val="FF0000"/>
-                </a:solidFill>
-              </a:rPr>
-              <a:t>#</a:t>
-            </a:r>
-            <a:br>
-              <a:rPr lang="pt-BR" sz="7200" dirty="0"/>
-            </a:br>
-            <a:r>
-              <a:rPr lang="pt-BR" sz="7200" dirty="0" err="1"/>
-              <a:t>Voce</a:t>
-            </a:r>
-            <a:r>
-              <a:rPr lang="pt-BR" sz="7200" dirty="0"/>
-              <a:t> </a:t>
-            </a:r>
-            <a:r>
-              <a:rPr lang="pt-BR" sz="7200" dirty="0" err="1"/>
-              <a:t>Nao</a:t>
-            </a:r>
-            <a:r>
-              <a:rPr lang="pt-BR" sz="7200" dirty="0"/>
-              <a:t> Vale Nada </a:t>
-            </a:r>
-            <a:r>
-              <a:rPr lang="pt-BR" sz="7200" dirty="0" err="1">
-                <a:solidFill>
-                  <a:srgbClr val="FF0000"/>
-                </a:solidFill>
-              </a:rPr>
-              <a:t>SIm</a:t>
-            </a:r>
-            <a:br>
-              <a:rPr lang="pt-BR" sz="7200" dirty="0"/>
-            </a:br>
-            <a:r>
-              <a:rPr lang="pt-BR" sz="7200" dirty="0"/>
-              <a:t>Morango Do Nordeste </a:t>
-            </a:r>
-            <a:r>
-              <a:rPr lang="pt-BR" sz="7200" dirty="0">
-                <a:solidFill>
-                  <a:srgbClr val="FF0000"/>
-                </a:solidFill>
-              </a:rPr>
-              <a:t>Do</a:t>
-            </a:r>
-            <a:endParaRPr lang="pt-BR" sz="8000" dirty="0">
-              <a:solidFill>
-                <a:srgbClr val="FF0000"/>
-              </a:solidFill>
-              <a:cs typeface="Arial" panose="020B0604020202020204" pitchFamily="34" charset="0"/>
-            </a:endParaRPr>
-          </a:p>
-        </p:txBody>
-      </p:sp>
-    </p:spTree>
-    <p:extLst>
-      <p:ext uri="{BB962C8B-B14F-4D97-AF65-F5344CB8AC3E}">
-        <p14:creationId xmlns:p14="http://schemas.microsoft.com/office/powerpoint/2010/main" val="4012791308"/>
-      </p:ext>
-    </p:extLst>
-  </p:cSld>
-  <p:clrMapOvr>
-    <a:masterClrMapping/>
-  </p:clrMapOvr>
-</p:sld>
-</file>
-
-<file path=ppt/slides/slide68.xml><?xml version="1.0" encoding="utf-8"?>
-<p:sld xmlns:a="http://schemas.openxmlformats.org/drawingml/2006/main" xmlns:r="http://schemas.openxmlformats.org/officeDocument/2006/relationships" xmlns:p="http://schemas.openxmlformats.org/presentationml/2006/main">
-  <p:cSld>
-    <p:spTree>
-      <p:nvGrpSpPr>
-        <p:cNvPr id="1" name="">
-          <a:extLst>
-            <a:ext uri="{FF2B5EF4-FFF2-40B4-BE49-F238E27FC236}">
-              <a16:creationId xmlns:a16="http://schemas.microsoft.com/office/drawing/2014/main" id="{E6EFA2F3-BC5F-E536-2A6D-037656D1CC22}"/>
-            </a:ext>
-          </a:extLst>
-        </p:cNvPr>
-        <p:cNvGrpSpPr/>
-        <p:nvPr/>
-      </p:nvGrpSpPr>
-      <p:grpSpPr>
-        <a:xfrm>
-          <a:off x="0" y="0"/>
-          <a:ext cx="0" cy="0"/>
-          <a:chOff x="0" y="0"/>
-          <a:chExt cx="0" cy="0"/>
-        </a:xfrm>
-      </p:grpSpPr>
-      <p:sp>
-        <p:nvSpPr>
-          <p:cNvPr id="3" name="Espaço Reservado para Conteúdo 2">
-            <a:extLst>
-              <a:ext uri="{FF2B5EF4-FFF2-40B4-BE49-F238E27FC236}">
-                <a16:creationId xmlns:a16="http://schemas.microsoft.com/office/drawing/2014/main" id="{6E2BC6E7-FDE6-1691-A86C-C34065B08312}"/>
-              </a:ext>
-            </a:extLst>
-          </p:cNvPr>
-          <p:cNvSpPr>
-            <a:spLocks noGrp="1"/>
-          </p:cNvSpPr>
-          <p:nvPr>
-            <p:ph idx="1"/>
-          </p:nvPr>
-        </p:nvSpPr>
-        <p:spPr>
-          <a:xfrm>
-            <a:off x="10509" y="-3937"/>
-            <a:ext cx="12181491" cy="6861937"/>
-          </a:xfrm>
-        </p:spPr>
-        <p:txBody>
-          <a:bodyPr>
-            <a:noAutofit/>
-          </a:bodyPr>
-          <a:lstStyle/>
-          <a:p>
-            <a:pPr algn="ctr">
-              <a:lnSpc>
-                <a:spcPct val="100000"/>
-              </a:lnSpc>
-              <a:buNone/>
-            </a:pPr>
-            <a:r>
-              <a:rPr lang="en-US" sz="8800" dirty="0">
-                <a:solidFill>
-                  <a:srgbClr val="FF0000"/>
-                </a:solidFill>
-                <a:cs typeface="Arial" panose="020B0604020202020204" pitchFamily="34" charset="0"/>
-              </a:rPr>
-              <a:t>VS BLOCO 5</a:t>
-            </a:r>
-          </a:p>
-          <a:p>
-            <a:pPr marL="36000" indent="-252000" algn="ctr">
-              <a:lnSpc>
-                <a:spcPct val="100000"/>
-              </a:lnSpc>
-              <a:spcBef>
-                <a:spcPts val="0"/>
-              </a:spcBef>
-              <a:buNone/>
-            </a:pPr>
-            <a:r>
-              <a:rPr lang="en-US" sz="6000" dirty="0">
-                <a:cs typeface="Arial" panose="020B0604020202020204" pitchFamily="34" charset="0"/>
-              </a:rPr>
-              <a:t>Camisa </a:t>
-            </a:r>
-            <a:r>
-              <a:rPr lang="en-US" sz="6000" dirty="0" err="1">
-                <a:cs typeface="Arial" panose="020B0604020202020204" pitchFamily="34" charset="0"/>
-              </a:rPr>
-              <a:t>Manchada</a:t>
-            </a:r>
-            <a:r>
-              <a:rPr lang="en-US" sz="6000" dirty="0">
-                <a:cs typeface="Arial" panose="020B0604020202020204" pitchFamily="34" charset="0"/>
-              </a:rPr>
-              <a:t> </a:t>
-            </a:r>
-            <a:r>
-              <a:rPr lang="en-US" sz="6000" dirty="0">
-                <a:solidFill>
-                  <a:srgbClr val="FF0000"/>
-                </a:solidFill>
-                <a:cs typeface="Arial" panose="020B0604020202020204" pitchFamily="34" charset="0"/>
-              </a:rPr>
-              <a:t>Mi</a:t>
-            </a:r>
-          </a:p>
-          <a:p>
-            <a:pPr marL="36000" indent="-252000" algn="ctr">
-              <a:lnSpc>
-                <a:spcPct val="100000"/>
-              </a:lnSpc>
-              <a:spcBef>
-                <a:spcPts val="0"/>
-              </a:spcBef>
-              <a:buNone/>
-            </a:pPr>
-            <a:r>
-              <a:rPr lang="en-US" sz="6000" dirty="0">
-                <a:cs typeface="Arial" panose="020B0604020202020204" pitchFamily="34" charset="0"/>
-              </a:rPr>
-              <a:t>Esta Noite Como </a:t>
-            </a:r>
-            <a:r>
-              <a:rPr lang="en-US" sz="6000" dirty="0" err="1">
-                <a:cs typeface="Arial" panose="020B0604020202020204" pitchFamily="34" charset="0"/>
-              </a:rPr>
-              <a:t>Lembrança</a:t>
-            </a:r>
-            <a:r>
-              <a:rPr lang="en-US" sz="6000" dirty="0">
-                <a:cs typeface="Arial" panose="020B0604020202020204" pitchFamily="34" charset="0"/>
-              </a:rPr>
-              <a:t> </a:t>
-            </a:r>
-            <a:r>
-              <a:rPr lang="en-US" sz="6000" dirty="0">
-                <a:solidFill>
-                  <a:srgbClr val="FF0000"/>
-                </a:solidFill>
-                <a:cs typeface="Arial" panose="020B0604020202020204" pitchFamily="34" charset="0"/>
-              </a:rPr>
-              <a:t>Do</a:t>
-            </a:r>
-            <a:endParaRPr lang="pt-BR" sz="6000" dirty="0">
-              <a:solidFill>
-                <a:srgbClr val="FF0000"/>
-              </a:solidFill>
-              <a:cs typeface="Arial" panose="020B0604020202020204" pitchFamily="34" charset="0"/>
-            </a:endParaRPr>
-          </a:p>
-          <a:p>
-            <a:pPr algn="ctr">
-              <a:lnSpc>
-                <a:spcPct val="100000"/>
-              </a:lnSpc>
-              <a:buNone/>
-            </a:pPr>
-            <a:endParaRPr lang="pt-BR" sz="8000" dirty="0">
-              <a:solidFill>
-                <a:srgbClr val="FF0000"/>
-              </a:solidFill>
-              <a:cs typeface="Arial" panose="020B0604020202020204" pitchFamily="34" charset="0"/>
-            </a:endParaRPr>
-          </a:p>
-        </p:txBody>
-      </p:sp>
-    </p:spTree>
-    <p:extLst>
-      <p:ext uri="{BB962C8B-B14F-4D97-AF65-F5344CB8AC3E}">
-        <p14:creationId xmlns:p14="http://schemas.microsoft.com/office/powerpoint/2010/main" val="493967408"/>
-      </p:ext>
-    </p:extLst>
-  </p:cSld>
-  <p:clrMapOvr>
-    <a:masterClrMapping/>
-  </p:clrMapOvr>
-</p:sld>
-</file>
-
-<file path=ppt/slides/slide69.xml><?xml version="1.0" encoding="utf-8"?>
-<p:sld xmlns:a="http://schemas.openxmlformats.org/drawingml/2006/main" xmlns:r="http://schemas.openxmlformats.org/officeDocument/2006/relationships" xmlns:p="http://schemas.openxmlformats.org/presentationml/2006/main">
-  <p:cSld>
-    <p:spTree>
-      <p:nvGrpSpPr>
-        <p:cNvPr id="1" name="">
-          <a:extLst>
-            <a:ext uri="{FF2B5EF4-FFF2-40B4-BE49-F238E27FC236}">
-              <a16:creationId xmlns:a16="http://schemas.microsoft.com/office/drawing/2014/main" id="{4B1F9B04-E36D-CFC9-424B-663C997F3B62}"/>
-            </a:ext>
-          </a:extLst>
-        </p:cNvPr>
-        <p:cNvGrpSpPr/>
-        <p:nvPr/>
-      </p:nvGrpSpPr>
-      <p:grpSpPr>
-        <a:xfrm>
-          <a:off x="0" y="0"/>
-          <a:ext cx="0" cy="0"/>
-          <a:chOff x="0" y="0"/>
-          <a:chExt cx="0" cy="0"/>
-        </a:xfrm>
-      </p:grpSpPr>
-      <p:sp>
-        <p:nvSpPr>
-          <p:cNvPr id="3" name="Espaço Reservado para Conteúdo 2">
-            <a:extLst>
-              <a:ext uri="{FF2B5EF4-FFF2-40B4-BE49-F238E27FC236}">
-                <a16:creationId xmlns:a16="http://schemas.microsoft.com/office/drawing/2014/main" id="{D70FA326-5BDF-6400-83DF-E705E9993E0D}"/>
-              </a:ext>
-            </a:extLst>
-          </p:cNvPr>
-          <p:cNvSpPr>
-            <a:spLocks noGrp="1"/>
-          </p:cNvSpPr>
-          <p:nvPr>
-            <p:ph idx="1"/>
-          </p:nvPr>
-        </p:nvSpPr>
-        <p:spPr>
-          <a:xfrm>
-            <a:off x="10509" y="-3937"/>
-            <a:ext cx="12181491" cy="6861937"/>
-          </a:xfrm>
-        </p:spPr>
-        <p:txBody>
-          <a:bodyPr>
-            <a:noAutofit/>
-          </a:bodyPr>
-          <a:lstStyle/>
-          <a:p>
-            <a:pPr algn="ctr">
-              <a:lnSpc>
-                <a:spcPct val="100000"/>
-              </a:lnSpc>
-              <a:buNone/>
-            </a:pPr>
-            <a:r>
-              <a:rPr lang="en-US" sz="8800" dirty="0">
-                <a:solidFill>
-                  <a:srgbClr val="FF0000"/>
-                </a:solidFill>
-                <a:cs typeface="Arial" panose="020B0604020202020204" pitchFamily="34" charset="0"/>
-              </a:rPr>
-              <a:t>VS BLOCO 6</a:t>
-            </a:r>
-          </a:p>
-          <a:p>
-            <a:pPr marL="36000" indent="-252000" algn="ctr">
-              <a:lnSpc>
-                <a:spcPct val="100000"/>
-              </a:lnSpc>
-              <a:spcBef>
-                <a:spcPts val="0"/>
-              </a:spcBef>
-              <a:buNone/>
-            </a:pPr>
-            <a:r>
-              <a:rPr lang="pt-BR" sz="7200" dirty="0"/>
-              <a:t>Catchaqueira </a:t>
-            </a:r>
-            <a:r>
-              <a:rPr lang="pt-BR" sz="7200" dirty="0">
-                <a:solidFill>
-                  <a:srgbClr val="FF0000"/>
-                </a:solidFill>
-              </a:rPr>
-              <a:t>Sol</a:t>
-            </a:r>
-            <a:br>
-              <a:rPr lang="pt-BR" sz="7200" dirty="0"/>
-            </a:br>
-            <a:r>
-              <a:rPr lang="pt-BR" sz="7200" dirty="0"/>
-              <a:t>Luz Da Minha Vida </a:t>
-            </a:r>
-            <a:r>
-              <a:rPr lang="pt-BR" sz="7200" dirty="0">
-                <a:solidFill>
-                  <a:srgbClr val="FF0000"/>
-                </a:solidFill>
-              </a:rPr>
-              <a:t>Sol</a:t>
-            </a:r>
-            <a:endParaRPr lang="pt-BR" sz="8000" dirty="0">
-              <a:solidFill>
-                <a:srgbClr val="FF0000"/>
-              </a:solidFill>
-              <a:cs typeface="Arial" panose="020B0604020202020204" pitchFamily="34" charset="0"/>
-            </a:endParaRPr>
-          </a:p>
-        </p:txBody>
-      </p:sp>
-    </p:spTree>
-    <p:extLst>
-      <p:ext uri="{BB962C8B-B14F-4D97-AF65-F5344CB8AC3E}">
-        <p14:creationId xmlns:p14="http://schemas.microsoft.com/office/powerpoint/2010/main" val="1076216"/>
-      </p:ext>
-    </p:extLst>
-  </p:cSld>
-  <p:clrMapOvr>
-    <a:masterClrMapping/>
-  </p:clrMapOvr>
-</p:sld>
-</file>
-
 <file path=ppt/slides/slide7.xml><?xml version="1.0" encoding="utf-8"?>
 <p:sld xmlns:a="http://schemas.openxmlformats.org/drawingml/2006/main" xmlns:r="http://schemas.openxmlformats.org/officeDocument/2006/relationships" xmlns:p="http://schemas.openxmlformats.org/presentationml/2006/main">
   <p:cSld>
@@ -16006,1531 +14758,6 @@
     <p:extLst>
       <p:ext uri="{BB962C8B-B14F-4D97-AF65-F5344CB8AC3E}">
         <p14:creationId xmlns:p14="http://schemas.microsoft.com/office/powerpoint/2010/main" val="242730318"/>
-      </p:ext>
-    </p:extLst>
-  </p:cSld>
-  <p:clrMapOvr>
-    <a:masterClrMapping/>
-  </p:clrMapOvr>
-</p:sld>
-</file>
-
-<file path=ppt/slides/slide70.xml><?xml version="1.0" encoding="utf-8"?>
-<p:sld xmlns:a="http://schemas.openxmlformats.org/drawingml/2006/main" xmlns:r="http://schemas.openxmlformats.org/officeDocument/2006/relationships" xmlns:p="http://schemas.openxmlformats.org/presentationml/2006/main">
-  <p:cSld>
-    <p:spTree>
-      <p:nvGrpSpPr>
-        <p:cNvPr id="1" name="">
-          <a:extLst>
-            <a:ext uri="{FF2B5EF4-FFF2-40B4-BE49-F238E27FC236}">
-              <a16:creationId xmlns:a16="http://schemas.microsoft.com/office/drawing/2014/main" id="{F2D14050-DA13-E65F-ADC3-C6C4FE41D805}"/>
-            </a:ext>
-          </a:extLst>
-        </p:cNvPr>
-        <p:cNvGrpSpPr/>
-        <p:nvPr/>
-      </p:nvGrpSpPr>
-      <p:grpSpPr>
-        <a:xfrm>
-          <a:off x="0" y="0"/>
-          <a:ext cx="0" cy="0"/>
-          <a:chOff x="0" y="0"/>
-          <a:chExt cx="0" cy="0"/>
-        </a:xfrm>
-      </p:grpSpPr>
-      <p:sp>
-        <p:nvSpPr>
-          <p:cNvPr id="3" name="Espaço Reservado para Conteúdo 2">
-            <a:extLst>
-              <a:ext uri="{FF2B5EF4-FFF2-40B4-BE49-F238E27FC236}">
-                <a16:creationId xmlns:a16="http://schemas.microsoft.com/office/drawing/2014/main" id="{9F4230CB-DDB7-2262-4B58-73E2DB8D298F}"/>
-              </a:ext>
-            </a:extLst>
-          </p:cNvPr>
-          <p:cNvSpPr>
-            <a:spLocks noGrp="1"/>
-          </p:cNvSpPr>
-          <p:nvPr>
-            <p:ph idx="1"/>
-          </p:nvPr>
-        </p:nvSpPr>
-        <p:spPr>
-          <a:xfrm>
-            <a:off x="10509" y="-3937"/>
-            <a:ext cx="12181491" cy="6861937"/>
-          </a:xfrm>
-        </p:spPr>
-        <p:txBody>
-          <a:bodyPr>
-            <a:noAutofit/>
-          </a:bodyPr>
-          <a:lstStyle/>
-          <a:p>
-            <a:pPr algn="ctr">
-              <a:lnSpc>
-                <a:spcPct val="100000"/>
-              </a:lnSpc>
-              <a:buNone/>
-            </a:pPr>
-            <a:r>
-              <a:rPr lang="en-US" sz="8800" dirty="0">
-                <a:solidFill>
-                  <a:srgbClr val="FF0000"/>
-                </a:solidFill>
-                <a:cs typeface="Arial" panose="020B0604020202020204" pitchFamily="34" charset="0"/>
-              </a:rPr>
-              <a:t>VS BLOCO 7</a:t>
-            </a:r>
-          </a:p>
-          <a:p>
-            <a:pPr marL="36000" indent="-252000" algn="ctr">
-              <a:lnSpc>
-                <a:spcPct val="100000"/>
-              </a:lnSpc>
-              <a:spcBef>
-                <a:spcPts val="0"/>
-              </a:spcBef>
-              <a:buNone/>
-            </a:pPr>
-            <a:r>
-              <a:rPr lang="pt-BR" sz="7200" dirty="0"/>
-              <a:t>Culpa é Sua </a:t>
-            </a:r>
-            <a:r>
-              <a:rPr lang="pt-BR" sz="7200" dirty="0">
-                <a:solidFill>
-                  <a:srgbClr val="FF0000"/>
-                </a:solidFill>
-              </a:rPr>
-              <a:t>Ré</a:t>
-            </a:r>
-            <a:br>
-              <a:rPr lang="pt-BR" sz="7200" dirty="0"/>
-            </a:br>
-            <a:r>
-              <a:rPr lang="pt-BR" sz="7200" dirty="0"/>
-              <a:t>Risca Faca </a:t>
-            </a:r>
-            <a:r>
-              <a:rPr lang="pt-BR" sz="7200" dirty="0">
-                <a:solidFill>
-                  <a:srgbClr val="FF0000"/>
-                </a:solidFill>
-              </a:rPr>
-              <a:t>Sol</a:t>
-            </a:r>
-            <a:br>
-              <a:rPr lang="pt-BR" sz="7200" dirty="0"/>
-            </a:br>
-            <a:r>
-              <a:rPr lang="pt-BR" sz="7200" dirty="0"/>
-              <a:t>Lua e a Noite </a:t>
-            </a:r>
-            <a:r>
-              <a:rPr lang="pt-BR" sz="7200" dirty="0">
-                <a:solidFill>
-                  <a:srgbClr val="FF0000"/>
-                </a:solidFill>
-              </a:rPr>
-              <a:t>Mi</a:t>
-            </a:r>
-            <a:endParaRPr lang="pt-BR" sz="8000" dirty="0">
-              <a:solidFill>
-                <a:srgbClr val="FF0000"/>
-              </a:solidFill>
-              <a:cs typeface="Arial" panose="020B0604020202020204" pitchFamily="34" charset="0"/>
-            </a:endParaRPr>
-          </a:p>
-        </p:txBody>
-      </p:sp>
-    </p:spTree>
-    <p:extLst>
-      <p:ext uri="{BB962C8B-B14F-4D97-AF65-F5344CB8AC3E}">
-        <p14:creationId xmlns:p14="http://schemas.microsoft.com/office/powerpoint/2010/main" val="3786666785"/>
-      </p:ext>
-    </p:extLst>
-  </p:cSld>
-  <p:clrMapOvr>
-    <a:masterClrMapping/>
-  </p:clrMapOvr>
-</p:sld>
-</file>
-
-<file path=ppt/slides/slide71.xml><?xml version="1.0" encoding="utf-8"?>
-<p:sld xmlns:a="http://schemas.openxmlformats.org/drawingml/2006/main" xmlns:r="http://schemas.openxmlformats.org/officeDocument/2006/relationships" xmlns:p="http://schemas.openxmlformats.org/presentationml/2006/main">
-  <p:cSld>
-    <p:spTree>
-      <p:nvGrpSpPr>
-        <p:cNvPr id="1" name="">
-          <a:extLst>
-            <a:ext uri="{FF2B5EF4-FFF2-40B4-BE49-F238E27FC236}">
-              <a16:creationId xmlns:a16="http://schemas.microsoft.com/office/drawing/2014/main" id="{AE74F9CB-FB94-2F44-DD76-EA24F16B3C40}"/>
-            </a:ext>
-          </a:extLst>
-        </p:cNvPr>
-        <p:cNvGrpSpPr/>
-        <p:nvPr/>
-      </p:nvGrpSpPr>
-      <p:grpSpPr>
-        <a:xfrm>
-          <a:off x="0" y="0"/>
-          <a:ext cx="0" cy="0"/>
-          <a:chOff x="0" y="0"/>
-          <a:chExt cx="0" cy="0"/>
-        </a:xfrm>
-      </p:grpSpPr>
-      <p:sp>
-        <p:nvSpPr>
-          <p:cNvPr id="3" name="Espaço Reservado para Conteúdo 2">
-            <a:extLst>
-              <a:ext uri="{FF2B5EF4-FFF2-40B4-BE49-F238E27FC236}">
-                <a16:creationId xmlns:a16="http://schemas.microsoft.com/office/drawing/2014/main" id="{BAD39500-4C53-34FC-FFED-640B4A9AC5A8}"/>
-              </a:ext>
-            </a:extLst>
-          </p:cNvPr>
-          <p:cNvSpPr>
-            <a:spLocks noGrp="1"/>
-          </p:cNvSpPr>
-          <p:nvPr>
-            <p:ph idx="1"/>
-          </p:nvPr>
-        </p:nvSpPr>
-        <p:spPr>
-          <a:xfrm>
-            <a:off x="10509" y="-3937"/>
-            <a:ext cx="12181491" cy="6861937"/>
-          </a:xfrm>
-        </p:spPr>
-        <p:txBody>
-          <a:bodyPr>
-            <a:noAutofit/>
-          </a:bodyPr>
-          <a:lstStyle/>
-          <a:p>
-            <a:pPr algn="ctr">
-              <a:lnSpc>
-                <a:spcPct val="100000"/>
-              </a:lnSpc>
-              <a:buNone/>
-            </a:pPr>
-            <a:r>
-              <a:rPr lang="en-US" sz="8800" dirty="0">
-                <a:solidFill>
-                  <a:srgbClr val="FF0000"/>
-                </a:solidFill>
-                <a:cs typeface="Arial" panose="020B0604020202020204" pitchFamily="34" charset="0"/>
-              </a:rPr>
-              <a:t>VS BLOCO 8</a:t>
-            </a:r>
-          </a:p>
-          <a:p>
-            <a:pPr marL="36000" indent="-252000" algn="ctr">
-              <a:lnSpc>
-                <a:spcPct val="100000"/>
-              </a:lnSpc>
-              <a:spcBef>
-                <a:spcPts val="0"/>
-              </a:spcBef>
-              <a:buNone/>
-            </a:pPr>
-            <a:r>
-              <a:rPr lang="pt-BR" sz="6600" dirty="0"/>
-              <a:t>Do Outro Lado Da Cidade </a:t>
-            </a:r>
-            <a:r>
-              <a:rPr lang="pt-BR" sz="6600" dirty="0">
-                <a:solidFill>
-                  <a:srgbClr val="FF0000"/>
-                </a:solidFill>
-              </a:rPr>
-              <a:t>Fá</a:t>
-            </a:r>
-            <a:br>
-              <a:rPr lang="pt-BR" sz="6600" dirty="0"/>
-            </a:br>
-            <a:r>
-              <a:rPr lang="pt-BR" sz="6600" dirty="0"/>
-              <a:t>Estrada Da Vida </a:t>
-            </a:r>
-            <a:r>
-              <a:rPr lang="pt-BR" sz="6600" dirty="0" err="1">
-                <a:solidFill>
-                  <a:srgbClr val="FF0000"/>
-                </a:solidFill>
-              </a:rPr>
-              <a:t>Sib</a:t>
-            </a:r>
-            <a:endParaRPr lang="pt-BR" sz="6600" dirty="0">
-              <a:solidFill>
-                <a:srgbClr val="FF0000"/>
-              </a:solidFill>
-              <a:cs typeface="Arial" panose="020B0604020202020204" pitchFamily="34" charset="0"/>
-            </a:endParaRPr>
-          </a:p>
-        </p:txBody>
-      </p:sp>
-    </p:spTree>
-    <p:extLst>
-      <p:ext uri="{BB962C8B-B14F-4D97-AF65-F5344CB8AC3E}">
-        <p14:creationId xmlns:p14="http://schemas.microsoft.com/office/powerpoint/2010/main" val="1306984352"/>
-      </p:ext>
-    </p:extLst>
-  </p:cSld>
-  <p:clrMapOvr>
-    <a:masterClrMapping/>
-  </p:clrMapOvr>
-</p:sld>
-</file>
-
-<file path=ppt/slides/slide72.xml><?xml version="1.0" encoding="utf-8"?>
-<p:sld xmlns:a="http://schemas.openxmlformats.org/drawingml/2006/main" xmlns:r="http://schemas.openxmlformats.org/officeDocument/2006/relationships" xmlns:p="http://schemas.openxmlformats.org/presentationml/2006/main">
-  <p:cSld>
-    <p:spTree>
-      <p:nvGrpSpPr>
-        <p:cNvPr id="1" name="">
-          <a:extLst>
-            <a:ext uri="{FF2B5EF4-FFF2-40B4-BE49-F238E27FC236}">
-              <a16:creationId xmlns:a16="http://schemas.microsoft.com/office/drawing/2014/main" id="{FBFE346A-9972-92EB-B0CD-8664C2D9FA32}"/>
-            </a:ext>
-          </a:extLst>
-        </p:cNvPr>
-        <p:cNvGrpSpPr/>
-        <p:nvPr/>
-      </p:nvGrpSpPr>
-      <p:grpSpPr>
-        <a:xfrm>
-          <a:off x="0" y="0"/>
-          <a:ext cx="0" cy="0"/>
-          <a:chOff x="0" y="0"/>
-          <a:chExt cx="0" cy="0"/>
-        </a:xfrm>
-      </p:grpSpPr>
-      <p:sp>
-        <p:nvSpPr>
-          <p:cNvPr id="3" name="Espaço Reservado para Conteúdo 2">
-            <a:extLst>
-              <a:ext uri="{FF2B5EF4-FFF2-40B4-BE49-F238E27FC236}">
-                <a16:creationId xmlns:a16="http://schemas.microsoft.com/office/drawing/2014/main" id="{4C755BA8-088E-D120-16F8-A2B670A31D6F}"/>
-              </a:ext>
-            </a:extLst>
-          </p:cNvPr>
-          <p:cNvSpPr>
-            <a:spLocks noGrp="1"/>
-          </p:cNvSpPr>
-          <p:nvPr>
-            <p:ph idx="1"/>
-          </p:nvPr>
-        </p:nvSpPr>
-        <p:spPr>
-          <a:xfrm>
-            <a:off x="10509" y="-3937"/>
-            <a:ext cx="12181491" cy="6861937"/>
-          </a:xfrm>
-        </p:spPr>
-        <p:txBody>
-          <a:bodyPr>
-            <a:noAutofit/>
-          </a:bodyPr>
-          <a:lstStyle/>
-          <a:p>
-            <a:pPr algn="ctr">
-              <a:lnSpc>
-                <a:spcPct val="100000"/>
-              </a:lnSpc>
-              <a:buNone/>
-            </a:pPr>
-            <a:r>
-              <a:rPr lang="en-US" sz="8800" dirty="0">
-                <a:solidFill>
-                  <a:srgbClr val="FF0000"/>
-                </a:solidFill>
-                <a:cs typeface="Arial" panose="020B0604020202020204" pitchFamily="34" charset="0"/>
-              </a:rPr>
-              <a:t>VS BLOCO 9</a:t>
-            </a:r>
-          </a:p>
-          <a:p>
-            <a:pPr marL="36000" indent="-252000" algn="ctr">
-              <a:lnSpc>
-                <a:spcPct val="100000"/>
-              </a:lnSpc>
-              <a:spcBef>
-                <a:spcPts val="0"/>
-              </a:spcBef>
-              <a:buNone/>
-            </a:pPr>
-            <a:r>
-              <a:rPr lang="en-US" sz="7200" dirty="0">
-                <a:cs typeface="Arial" panose="020B0604020202020204" pitchFamily="34" charset="0"/>
-              </a:rPr>
-              <a:t>Ele </a:t>
-            </a:r>
-            <a:r>
-              <a:rPr lang="en-US" sz="7200" dirty="0" err="1">
-                <a:cs typeface="Arial" panose="020B0604020202020204" pitchFamily="34" charset="0"/>
-              </a:rPr>
-              <a:t>te</a:t>
-            </a:r>
-            <a:r>
-              <a:rPr lang="en-US" sz="7200" dirty="0">
-                <a:cs typeface="Arial" panose="020B0604020202020204" pitchFamily="34" charset="0"/>
-              </a:rPr>
-              <a:t> Trai </a:t>
-            </a:r>
-            <a:r>
-              <a:rPr lang="en-US" sz="7200" dirty="0">
-                <a:solidFill>
-                  <a:srgbClr val="FF0000"/>
-                </a:solidFill>
-                <a:cs typeface="Arial" panose="020B0604020202020204" pitchFamily="34" charset="0"/>
-              </a:rPr>
-              <a:t>Sol</a:t>
-            </a:r>
-          </a:p>
-          <a:p>
-            <a:pPr marL="36000" indent="-252000" algn="ctr">
-              <a:lnSpc>
-                <a:spcPct val="100000"/>
-              </a:lnSpc>
-              <a:spcBef>
-                <a:spcPts val="0"/>
-              </a:spcBef>
-              <a:buNone/>
-            </a:pPr>
-            <a:r>
-              <a:rPr lang="en-US" sz="7200" dirty="0">
-                <a:cs typeface="Arial" panose="020B0604020202020204" pitchFamily="34" charset="0"/>
-              </a:rPr>
-              <a:t>Cama </a:t>
-            </a:r>
-            <a:r>
-              <a:rPr lang="en-US" sz="7200" dirty="0" err="1">
-                <a:cs typeface="Arial" panose="020B0604020202020204" pitchFamily="34" charset="0"/>
-              </a:rPr>
-              <a:t>Vazia</a:t>
-            </a:r>
-            <a:r>
-              <a:rPr lang="en-US" sz="7200" dirty="0">
-                <a:cs typeface="Arial" panose="020B0604020202020204" pitchFamily="34" charset="0"/>
-              </a:rPr>
-              <a:t> </a:t>
-            </a:r>
-            <a:r>
-              <a:rPr lang="en-US" sz="7200" dirty="0">
-                <a:solidFill>
-                  <a:srgbClr val="FF0000"/>
-                </a:solidFill>
-                <a:cs typeface="Arial" panose="020B0604020202020204" pitchFamily="34" charset="0"/>
-              </a:rPr>
-              <a:t>Sol</a:t>
-            </a:r>
-          </a:p>
-          <a:p>
-            <a:pPr marL="36000" indent="-252000" algn="ctr">
-              <a:lnSpc>
-                <a:spcPct val="100000"/>
-              </a:lnSpc>
-              <a:spcBef>
-                <a:spcPts val="0"/>
-              </a:spcBef>
-              <a:buNone/>
-            </a:pPr>
-            <a:r>
-              <a:rPr lang="en-US" sz="7200" dirty="0">
-                <a:cs typeface="Arial" panose="020B0604020202020204" pitchFamily="34" charset="0"/>
-              </a:rPr>
-              <a:t>Meu Ex Amor </a:t>
-            </a:r>
-            <a:r>
-              <a:rPr lang="en-US" sz="7200" dirty="0">
-                <a:solidFill>
-                  <a:srgbClr val="FF0000"/>
-                </a:solidFill>
-                <a:cs typeface="Arial" panose="020B0604020202020204" pitchFamily="34" charset="0"/>
-              </a:rPr>
-              <a:t>Mi</a:t>
-            </a:r>
-            <a:endParaRPr lang="pt-BR" sz="7200" dirty="0">
-              <a:solidFill>
-                <a:srgbClr val="FF0000"/>
-              </a:solidFill>
-              <a:cs typeface="Arial" panose="020B0604020202020204" pitchFamily="34" charset="0"/>
-            </a:endParaRPr>
-          </a:p>
-          <a:p>
-            <a:pPr algn="ctr">
-              <a:lnSpc>
-                <a:spcPct val="100000"/>
-              </a:lnSpc>
-              <a:buNone/>
-            </a:pPr>
-            <a:endParaRPr lang="pt-BR" sz="8000" dirty="0">
-              <a:solidFill>
-                <a:srgbClr val="FF0000"/>
-              </a:solidFill>
-              <a:cs typeface="Arial" panose="020B0604020202020204" pitchFamily="34" charset="0"/>
-            </a:endParaRPr>
-          </a:p>
-        </p:txBody>
-      </p:sp>
-    </p:spTree>
-    <p:extLst>
-      <p:ext uri="{BB962C8B-B14F-4D97-AF65-F5344CB8AC3E}">
-        <p14:creationId xmlns:p14="http://schemas.microsoft.com/office/powerpoint/2010/main" val="361883740"/>
-      </p:ext>
-    </p:extLst>
-  </p:cSld>
-  <p:clrMapOvr>
-    <a:masterClrMapping/>
-  </p:clrMapOvr>
-</p:sld>
-</file>
-
-<file path=ppt/slides/slide73.xml><?xml version="1.0" encoding="utf-8"?>
-<p:sld xmlns:a="http://schemas.openxmlformats.org/drawingml/2006/main" xmlns:r="http://schemas.openxmlformats.org/officeDocument/2006/relationships" xmlns:p="http://schemas.openxmlformats.org/presentationml/2006/main">
-  <p:cSld>
-    <p:spTree>
-      <p:nvGrpSpPr>
-        <p:cNvPr id="1" name="">
-          <a:extLst>
-            <a:ext uri="{FF2B5EF4-FFF2-40B4-BE49-F238E27FC236}">
-              <a16:creationId xmlns:a16="http://schemas.microsoft.com/office/drawing/2014/main" id="{A2C2C64B-6E59-4394-25F6-3DE75D1483B9}"/>
-            </a:ext>
-          </a:extLst>
-        </p:cNvPr>
-        <p:cNvGrpSpPr/>
-        <p:nvPr/>
-      </p:nvGrpSpPr>
-      <p:grpSpPr>
-        <a:xfrm>
-          <a:off x="0" y="0"/>
-          <a:ext cx="0" cy="0"/>
-          <a:chOff x="0" y="0"/>
-          <a:chExt cx="0" cy="0"/>
-        </a:xfrm>
-      </p:grpSpPr>
-      <p:sp>
-        <p:nvSpPr>
-          <p:cNvPr id="3" name="Espaço Reservado para Conteúdo 2">
-            <a:extLst>
-              <a:ext uri="{FF2B5EF4-FFF2-40B4-BE49-F238E27FC236}">
-                <a16:creationId xmlns:a16="http://schemas.microsoft.com/office/drawing/2014/main" id="{5C144AC7-7E7A-A583-23E5-B6F06606FFAB}"/>
-              </a:ext>
-            </a:extLst>
-          </p:cNvPr>
-          <p:cNvSpPr>
-            <a:spLocks noGrp="1"/>
-          </p:cNvSpPr>
-          <p:nvPr>
-            <p:ph idx="1"/>
-          </p:nvPr>
-        </p:nvSpPr>
-        <p:spPr>
-          <a:xfrm>
-            <a:off x="10509" y="-3937"/>
-            <a:ext cx="12181491" cy="6861937"/>
-          </a:xfrm>
-        </p:spPr>
-        <p:txBody>
-          <a:bodyPr>
-            <a:noAutofit/>
-          </a:bodyPr>
-          <a:lstStyle/>
-          <a:p>
-            <a:pPr algn="ctr">
-              <a:lnSpc>
-                <a:spcPct val="100000"/>
-              </a:lnSpc>
-              <a:buNone/>
-            </a:pPr>
-            <a:r>
-              <a:rPr lang="en-US" sz="8800" dirty="0">
-                <a:solidFill>
-                  <a:srgbClr val="FF0000"/>
-                </a:solidFill>
-                <a:cs typeface="Arial" panose="020B0604020202020204" pitchFamily="34" charset="0"/>
-              </a:rPr>
-              <a:t>VS BLOCO 10</a:t>
-            </a:r>
-          </a:p>
-          <a:p>
-            <a:pPr marL="36000" indent="-252000" algn="ctr">
-              <a:lnSpc>
-                <a:spcPct val="100000"/>
-              </a:lnSpc>
-              <a:spcBef>
-                <a:spcPts val="0"/>
-              </a:spcBef>
-              <a:buNone/>
-            </a:pPr>
-            <a:r>
-              <a:rPr lang="pt-BR" sz="7200" dirty="0"/>
-              <a:t>Fim De Semana </a:t>
-            </a:r>
-            <a:r>
-              <a:rPr lang="pt-BR" sz="7200" dirty="0">
-                <a:solidFill>
-                  <a:srgbClr val="FF0000"/>
-                </a:solidFill>
-              </a:rPr>
-              <a:t>La</a:t>
-            </a:r>
-            <a:br>
-              <a:rPr lang="pt-BR" sz="7200" dirty="0"/>
-            </a:br>
-            <a:r>
-              <a:rPr lang="pt-BR" sz="7200" dirty="0"/>
-              <a:t>Gosto Que Me Enrosco </a:t>
-            </a:r>
-            <a:r>
-              <a:rPr lang="pt-BR" sz="7200" dirty="0" err="1">
-                <a:solidFill>
-                  <a:srgbClr val="FF0000"/>
-                </a:solidFill>
-              </a:rPr>
-              <a:t>Mib</a:t>
-            </a:r>
-            <a:br>
-              <a:rPr lang="pt-BR" sz="7200" dirty="0"/>
-            </a:br>
-            <a:r>
-              <a:rPr lang="pt-BR" sz="7200" dirty="0"/>
-              <a:t>Novela Das 8 </a:t>
-            </a:r>
-            <a:r>
-              <a:rPr lang="pt-BR" sz="7200" dirty="0">
-                <a:solidFill>
-                  <a:srgbClr val="FF0000"/>
-                </a:solidFill>
-              </a:rPr>
-              <a:t>Mi</a:t>
-            </a:r>
-            <a:endParaRPr lang="pt-BR" sz="8000" dirty="0">
-              <a:solidFill>
-                <a:srgbClr val="FF0000"/>
-              </a:solidFill>
-              <a:cs typeface="Arial" panose="020B0604020202020204" pitchFamily="34" charset="0"/>
-            </a:endParaRPr>
-          </a:p>
-        </p:txBody>
-      </p:sp>
-    </p:spTree>
-    <p:extLst>
-      <p:ext uri="{BB962C8B-B14F-4D97-AF65-F5344CB8AC3E}">
-        <p14:creationId xmlns:p14="http://schemas.microsoft.com/office/powerpoint/2010/main" val="2398726471"/>
-      </p:ext>
-    </p:extLst>
-  </p:cSld>
-  <p:clrMapOvr>
-    <a:masterClrMapping/>
-  </p:clrMapOvr>
-</p:sld>
-</file>
-
-<file path=ppt/slides/slide74.xml><?xml version="1.0" encoding="utf-8"?>
-<p:sld xmlns:a="http://schemas.openxmlformats.org/drawingml/2006/main" xmlns:r="http://schemas.openxmlformats.org/officeDocument/2006/relationships" xmlns:p="http://schemas.openxmlformats.org/presentationml/2006/main">
-  <p:cSld>
-    <p:spTree>
-      <p:nvGrpSpPr>
-        <p:cNvPr id="1" name="">
-          <a:extLst>
-            <a:ext uri="{FF2B5EF4-FFF2-40B4-BE49-F238E27FC236}">
-              <a16:creationId xmlns:a16="http://schemas.microsoft.com/office/drawing/2014/main" id="{9FCFC151-494E-C422-797A-C258B64325E9}"/>
-            </a:ext>
-          </a:extLst>
-        </p:cNvPr>
-        <p:cNvGrpSpPr/>
-        <p:nvPr/>
-      </p:nvGrpSpPr>
-      <p:grpSpPr>
-        <a:xfrm>
-          <a:off x="0" y="0"/>
-          <a:ext cx="0" cy="0"/>
-          <a:chOff x="0" y="0"/>
-          <a:chExt cx="0" cy="0"/>
-        </a:xfrm>
-      </p:grpSpPr>
-      <p:sp>
-        <p:nvSpPr>
-          <p:cNvPr id="3" name="Espaço Reservado para Conteúdo 2">
-            <a:extLst>
-              <a:ext uri="{FF2B5EF4-FFF2-40B4-BE49-F238E27FC236}">
-                <a16:creationId xmlns:a16="http://schemas.microsoft.com/office/drawing/2014/main" id="{3BCA5A68-A691-1DFC-B76A-A275278AFBCB}"/>
-              </a:ext>
-            </a:extLst>
-          </p:cNvPr>
-          <p:cNvSpPr>
-            <a:spLocks noGrp="1"/>
-          </p:cNvSpPr>
-          <p:nvPr>
-            <p:ph idx="1"/>
-          </p:nvPr>
-        </p:nvSpPr>
-        <p:spPr>
-          <a:xfrm>
-            <a:off x="10509" y="-3937"/>
-            <a:ext cx="12181491" cy="6861937"/>
-          </a:xfrm>
-        </p:spPr>
-        <p:txBody>
-          <a:bodyPr>
-            <a:noAutofit/>
-          </a:bodyPr>
-          <a:lstStyle/>
-          <a:p>
-            <a:pPr algn="ctr">
-              <a:lnSpc>
-                <a:spcPct val="100000"/>
-              </a:lnSpc>
-              <a:buNone/>
-            </a:pPr>
-            <a:r>
-              <a:rPr lang="en-US" sz="8800" dirty="0">
-                <a:solidFill>
-                  <a:srgbClr val="FF0000"/>
-                </a:solidFill>
-                <a:cs typeface="Arial" panose="020B0604020202020204" pitchFamily="34" charset="0"/>
-              </a:rPr>
-              <a:t>VS BLOCO 11</a:t>
-            </a:r>
-          </a:p>
-          <a:p>
-            <a:pPr marL="36000" indent="-252000" algn="ctr">
-              <a:lnSpc>
-                <a:spcPct val="100000"/>
-              </a:lnSpc>
-              <a:spcBef>
-                <a:spcPts val="0"/>
-              </a:spcBef>
-              <a:buNone/>
-            </a:pPr>
-            <a:r>
-              <a:rPr lang="pt-BR" sz="5400" dirty="0"/>
-              <a:t>Garçom </a:t>
-            </a:r>
-            <a:r>
-              <a:rPr lang="pt-BR" sz="5400" dirty="0">
-                <a:solidFill>
-                  <a:srgbClr val="FF0000"/>
-                </a:solidFill>
-              </a:rPr>
-              <a:t>La</a:t>
-            </a:r>
-            <a:br>
-              <a:rPr lang="pt-BR" sz="5400" dirty="0"/>
-            </a:br>
-            <a:r>
-              <a:rPr lang="pt-BR" sz="5400" dirty="0"/>
-              <a:t>Ninguém Segura o Coração </a:t>
-            </a:r>
-            <a:r>
-              <a:rPr lang="pt-BR" sz="5400" dirty="0">
-                <a:solidFill>
-                  <a:srgbClr val="FF0000"/>
-                </a:solidFill>
-              </a:rPr>
-              <a:t>Do</a:t>
-            </a:r>
-            <a:br>
-              <a:rPr lang="pt-BR" sz="5400" dirty="0"/>
-            </a:br>
-            <a:r>
-              <a:rPr lang="pt-BR" sz="5400" dirty="0"/>
-              <a:t>Misturinha </a:t>
-            </a:r>
-            <a:r>
-              <a:rPr lang="pt-BR" sz="5400" dirty="0" err="1">
-                <a:solidFill>
-                  <a:srgbClr val="FF0000"/>
-                </a:solidFill>
-              </a:rPr>
-              <a:t>Fa</a:t>
-            </a:r>
-            <a:br>
-              <a:rPr lang="pt-BR" sz="5400" dirty="0"/>
-            </a:br>
-            <a:r>
-              <a:rPr lang="pt-BR" sz="5400" dirty="0"/>
-              <a:t>Essa Cama Eu Não Vendo </a:t>
-            </a:r>
-            <a:r>
-              <a:rPr lang="pt-BR" sz="5400" dirty="0">
-                <a:solidFill>
-                  <a:srgbClr val="FF0000"/>
-                </a:solidFill>
-              </a:rPr>
-              <a:t>La</a:t>
-            </a:r>
-            <a:br>
-              <a:rPr lang="pt-BR" sz="5400" dirty="0"/>
-            </a:br>
-            <a:r>
-              <a:rPr lang="pt-BR" sz="5400" dirty="0"/>
-              <a:t>Preciso Te Falar </a:t>
-            </a:r>
-            <a:r>
-              <a:rPr lang="pt-BR" sz="5400" dirty="0">
-                <a:solidFill>
-                  <a:srgbClr val="FF0000"/>
-                </a:solidFill>
-              </a:rPr>
-              <a:t>La</a:t>
-            </a:r>
-            <a:br>
-              <a:rPr lang="pt-BR" sz="5400" dirty="0"/>
-            </a:br>
-            <a:r>
-              <a:rPr lang="pt-BR" sz="5400" dirty="0"/>
-              <a:t>Flashback </a:t>
-            </a:r>
-            <a:r>
-              <a:rPr lang="pt-BR" sz="5400" dirty="0">
-                <a:solidFill>
-                  <a:srgbClr val="FF0000"/>
-                </a:solidFill>
-              </a:rPr>
-              <a:t>Mi</a:t>
-            </a:r>
-            <a:endParaRPr lang="pt-BR" sz="5400" dirty="0">
-              <a:solidFill>
-                <a:srgbClr val="FF0000"/>
-              </a:solidFill>
-              <a:cs typeface="Arial" panose="020B0604020202020204" pitchFamily="34" charset="0"/>
-            </a:endParaRPr>
-          </a:p>
-        </p:txBody>
-      </p:sp>
-    </p:spTree>
-    <p:extLst>
-      <p:ext uri="{BB962C8B-B14F-4D97-AF65-F5344CB8AC3E}">
-        <p14:creationId xmlns:p14="http://schemas.microsoft.com/office/powerpoint/2010/main" val="3598950300"/>
-      </p:ext>
-    </p:extLst>
-  </p:cSld>
-  <p:clrMapOvr>
-    <a:masterClrMapping/>
-  </p:clrMapOvr>
-</p:sld>
-</file>
-
-<file path=ppt/slides/slide75.xml><?xml version="1.0" encoding="utf-8"?>
-<p:sld xmlns:a="http://schemas.openxmlformats.org/drawingml/2006/main" xmlns:r="http://schemas.openxmlformats.org/officeDocument/2006/relationships" xmlns:p="http://schemas.openxmlformats.org/presentationml/2006/main">
-  <p:cSld>
-    <p:spTree>
-      <p:nvGrpSpPr>
-        <p:cNvPr id="1" name="">
-          <a:extLst>
-            <a:ext uri="{FF2B5EF4-FFF2-40B4-BE49-F238E27FC236}">
-              <a16:creationId xmlns:a16="http://schemas.microsoft.com/office/drawing/2014/main" id="{FE4AE8CC-C8B1-A600-C100-3EA4EF146FF8}"/>
-            </a:ext>
-          </a:extLst>
-        </p:cNvPr>
-        <p:cNvGrpSpPr/>
-        <p:nvPr/>
-      </p:nvGrpSpPr>
-      <p:grpSpPr>
-        <a:xfrm>
-          <a:off x="0" y="0"/>
-          <a:ext cx="0" cy="0"/>
-          <a:chOff x="0" y="0"/>
-          <a:chExt cx="0" cy="0"/>
-        </a:xfrm>
-      </p:grpSpPr>
-      <p:sp>
-        <p:nvSpPr>
-          <p:cNvPr id="3" name="Espaço Reservado para Conteúdo 2">
-            <a:extLst>
-              <a:ext uri="{FF2B5EF4-FFF2-40B4-BE49-F238E27FC236}">
-                <a16:creationId xmlns:a16="http://schemas.microsoft.com/office/drawing/2014/main" id="{73AF27D5-B5D7-7717-6A07-F624FC04DF33}"/>
-              </a:ext>
-            </a:extLst>
-          </p:cNvPr>
-          <p:cNvSpPr>
-            <a:spLocks noGrp="1"/>
-          </p:cNvSpPr>
-          <p:nvPr>
-            <p:ph idx="1"/>
-          </p:nvPr>
-        </p:nvSpPr>
-        <p:spPr>
-          <a:xfrm>
-            <a:off x="10509" y="-3937"/>
-            <a:ext cx="12181491" cy="6861937"/>
-          </a:xfrm>
-        </p:spPr>
-        <p:txBody>
-          <a:bodyPr>
-            <a:noAutofit/>
-          </a:bodyPr>
-          <a:lstStyle/>
-          <a:p>
-            <a:pPr algn="ctr">
-              <a:lnSpc>
-                <a:spcPct val="100000"/>
-              </a:lnSpc>
-              <a:buNone/>
-            </a:pPr>
-            <a:r>
-              <a:rPr lang="en-US" sz="8800" dirty="0">
-                <a:solidFill>
-                  <a:srgbClr val="FF0000"/>
-                </a:solidFill>
-                <a:cs typeface="Arial" panose="020B0604020202020204" pitchFamily="34" charset="0"/>
-              </a:rPr>
-              <a:t>VS BLOCO 12</a:t>
-            </a:r>
-          </a:p>
-          <a:p>
-            <a:pPr marL="36000" indent="-252000" algn="ctr">
-              <a:lnSpc>
-                <a:spcPct val="100000"/>
-              </a:lnSpc>
-              <a:spcBef>
-                <a:spcPts val="0"/>
-              </a:spcBef>
-              <a:buNone/>
-            </a:pPr>
-            <a:r>
-              <a:rPr lang="pt-BR" sz="7200" dirty="0"/>
-              <a:t>Guardanapo </a:t>
-            </a:r>
-            <a:r>
-              <a:rPr lang="pt-BR" sz="7200" dirty="0" err="1">
-                <a:solidFill>
-                  <a:srgbClr val="FF0000"/>
-                </a:solidFill>
-              </a:rPr>
-              <a:t>Sib</a:t>
-            </a:r>
-            <a:endParaRPr lang="pt-BR" sz="7200" dirty="0">
-              <a:solidFill>
-                <a:srgbClr val="FF0000"/>
-              </a:solidFill>
-            </a:endParaRPr>
-          </a:p>
-          <a:p>
-            <a:pPr marL="36000" indent="-252000" algn="ctr">
-              <a:lnSpc>
-                <a:spcPct val="100000"/>
-              </a:lnSpc>
-              <a:spcBef>
-                <a:spcPts val="0"/>
-              </a:spcBef>
-              <a:buNone/>
-            </a:pPr>
-            <a:r>
-              <a:rPr lang="pt-BR" sz="7200" dirty="0"/>
-              <a:t>Transgênica </a:t>
-            </a:r>
-            <a:r>
-              <a:rPr lang="pt-BR" sz="7200" dirty="0">
-                <a:solidFill>
-                  <a:srgbClr val="FF0000"/>
-                </a:solidFill>
-              </a:rPr>
-              <a:t>La</a:t>
-            </a:r>
-            <a:br>
-              <a:rPr lang="pt-BR" sz="7200" dirty="0"/>
-            </a:br>
-            <a:r>
-              <a:rPr lang="pt-BR" sz="7200" dirty="0"/>
-              <a:t>Caso Marcado </a:t>
-            </a:r>
-            <a:r>
-              <a:rPr lang="pt-BR" sz="7200" dirty="0">
-                <a:solidFill>
-                  <a:srgbClr val="FF0000"/>
-                </a:solidFill>
-              </a:rPr>
-              <a:t>Sol</a:t>
-            </a:r>
-            <a:endParaRPr lang="pt-BR" sz="8000" dirty="0">
-              <a:solidFill>
-                <a:srgbClr val="FF0000"/>
-              </a:solidFill>
-              <a:cs typeface="Arial" panose="020B0604020202020204" pitchFamily="34" charset="0"/>
-            </a:endParaRPr>
-          </a:p>
-        </p:txBody>
-      </p:sp>
-    </p:spTree>
-    <p:extLst>
-      <p:ext uri="{BB962C8B-B14F-4D97-AF65-F5344CB8AC3E}">
-        <p14:creationId xmlns:p14="http://schemas.microsoft.com/office/powerpoint/2010/main" val="362358862"/>
-      </p:ext>
-    </p:extLst>
-  </p:cSld>
-  <p:clrMapOvr>
-    <a:masterClrMapping/>
-  </p:clrMapOvr>
-</p:sld>
-</file>
-
-<file path=ppt/slides/slide76.xml><?xml version="1.0" encoding="utf-8"?>
-<p:sld xmlns:a="http://schemas.openxmlformats.org/drawingml/2006/main" xmlns:r="http://schemas.openxmlformats.org/officeDocument/2006/relationships" xmlns:p="http://schemas.openxmlformats.org/presentationml/2006/main">
-  <p:cSld>
-    <p:spTree>
-      <p:nvGrpSpPr>
-        <p:cNvPr id="1" name="">
-          <a:extLst>
-            <a:ext uri="{FF2B5EF4-FFF2-40B4-BE49-F238E27FC236}">
-              <a16:creationId xmlns:a16="http://schemas.microsoft.com/office/drawing/2014/main" id="{BC448DBC-F736-8F03-7883-EE47471E67B3}"/>
-            </a:ext>
-          </a:extLst>
-        </p:cNvPr>
-        <p:cNvGrpSpPr/>
-        <p:nvPr/>
-      </p:nvGrpSpPr>
-      <p:grpSpPr>
-        <a:xfrm>
-          <a:off x="0" y="0"/>
-          <a:ext cx="0" cy="0"/>
-          <a:chOff x="0" y="0"/>
-          <a:chExt cx="0" cy="0"/>
-        </a:xfrm>
-      </p:grpSpPr>
-      <p:sp>
-        <p:nvSpPr>
-          <p:cNvPr id="3" name="Espaço Reservado para Conteúdo 2">
-            <a:extLst>
-              <a:ext uri="{FF2B5EF4-FFF2-40B4-BE49-F238E27FC236}">
-                <a16:creationId xmlns:a16="http://schemas.microsoft.com/office/drawing/2014/main" id="{0849DDBB-6AD7-2570-23C0-15112A9CE0D6}"/>
-              </a:ext>
-            </a:extLst>
-          </p:cNvPr>
-          <p:cNvSpPr>
-            <a:spLocks noGrp="1"/>
-          </p:cNvSpPr>
-          <p:nvPr>
-            <p:ph idx="1"/>
-          </p:nvPr>
-        </p:nvSpPr>
-        <p:spPr>
-          <a:xfrm>
-            <a:off x="10509" y="-3937"/>
-            <a:ext cx="12181491" cy="6861937"/>
-          </a:xfrm>
-        </p:spPr>
-        <p:txBody>
-          <a:bodyPr>
-            <a:noAutofit/>
-          </a:bodyPr>
-          <a:lstStyle/>
-          <a:p>
-            <a:pPr algn="ctr">
-              <a:lnSpc>
-                <a:spcPct val="100000"/>
-              </a:lnSpc>
-              <a:buNone/>
-            </a:pPr>
-            <a:r>
-              <a:rPr lang="en-US" sz="8800" dirty="0">
-                <a:solidFill>
-                  <a:srgbClr val="FF0000"/>
-                </a:solidFill>
-                <a:cs typeface="Arial" panose="020B0604020202020204" pitchFamily="34" charset="0"/>
-              </a:rPr>
-              <a:t>VS BLOCO 13</a:t>
-            </a:r>
-          </a:p>
-          <a:p>
-            <a:pPr marL="36000" indent="-252000" algn="ctr">
-              <a:lnSpc>
-                <a:spcPct val="100000"/>
-              </a:lnSpc>
-              <a:spcBef>
-                <a:spcPts val="0"/>
-              </a:spcBef>
-              <a:buNone/>
-            </a:pPr>
-            <a:r>
-              <a:rPr lang="pt-BR" sz="7200" dirty="0"/>
-              <a:t>Lágrimas Sobre a Mesa </a:t>
-            </a:r>
-            <a:r>
-              <a:rPr lang="pt-BR" sz="7200" dirty="0">
-                <a:solidFill>
-                  <a:srgbClr val="FF0000"/>
-                </a:solidFill>
-              </a:rPr>
-              <a:t>Re</a:t>
-            </a:r>
-            <a:br>
-              <a:rPr lang="pt-BR" sz="7200" dirty="0"/>
-            </a:br>
-            <a:r>
-              <a:rPr lang="pt-BR" sz="7200" dirty="0"/>
-              <a:t>Página Virada </a:t>
-            </a:r>
-            <a:r>
-              <a:rPr lang="pt-BR" sz="7200" dirty="0">
-                <a:solidFill>
-                  <a:srgbClr val="FF0000"/>
-                </a:solidFill>
-              </a:rPr>
-              <a:t>Sol</a:t>
-            </a:r>
-            <a:br>
-              <a:rPr lang="pt-BR" sz="7200" dirty="0"/>
-            </a:br>
-            <a:r>
-              <a:rPr lang="pt-BR" sz="7200" dirty="0"/>
-              <a:t>Fique </a:t>
-            </a:r>
-            <a:r>
-              <a:rPr lang="pt-BR" sz="7200" dirty="0" err="1">
-                <a:solidFill>
-                  <a:srgbClr val="FF0000"/>
-                </a:solidFill>
-              </a:rPr>
-              <a:t>Sib</a:t>
-            </a:r>
-            <a:endParaRPr lang="pt-BR" sz="8000" dirty="0">
-              <a:solidFill>
-                <a:srgbClr val="FF0000"/>
-              </a:solidFill>
-              <a:cs typeface="Arial" panose="020B0604020202020204" pitchFamily="34" charset="0"/>
-            </a:endParaRPr>
-          </a:p>
-        </p:txBody>
-      </p:sp>
-    </p:spTree>
-    <p:extLst>
-      <p:ext uri="{BB962C8B-B14F-4D97-AF65-F5344CB8AC3E}">
-        <p14:creationId xmlns:p14="http://schemas.microsoft.com/office/powerpoint/2010/main" val="1320483128"/>
-      </p:ext>
-    </p:extLst>
-  </p:cSld>
-  <p:clrMapOvr>
-    <a:masterClrMapping/>
-  </p:clrMapOvr>
-</p:sld>
-</file>
-
-<file path=ppt/slides/slide77.xml><?xml version="1.0" encoding="utf-8"?>
-<p:sld xmlns:a="http://schemas.openxmlformats.org/drawingml/2006/main" xmlns:r="http://schemas.openxmlformats.org/officeDocument/2006/relationships" xmlns:p="http://schemas.openxmlformats.org/presentationml/2006/main">
-  <p:cSld>
-    <p:spTree>
-      <p:nvGrpSpPr>
-        <p:cNvPr id="1" name="">
-          <a:extLst>
-            <a:ext uri="{FF2B5EF4-FFF2-40B4-BE49-F238E27FC236}">
-              <a16:creationId xmlns:a16="http://schemas.microsoft.com/office/drawing/2014/main" id="{B9E3A0C2-0DD0-DEBF-0286-61E1A4D69B1A}"/>
-            </a:ext>
-          </a:extLst>
-        </p:cNvPr>
-        <p:cNvGrpSpPr/>
-        <p:nvPr/>
-      </p:nvGrpSpPr>
-      <p:grpSpPr>
-        <a:xfrm>
-          <a:off x="0" y="0"/>
-          <a:ext cx="0" cy="0"/>
-          <a:chOff x="0" y="0"/>
-          <a:chExt cx="0" cy="0"/>
-        </a:xfrm>
-      </p:grpSpPr>
-      <p:sp>
-        <p:nvSpPr>
-          <p:cNvPr id="3" name="Espaço Reservado para Conteúdo 2">
-            <a:extLst>
-              <a:ext uri="{FF2B5EF4-FFF2-40B4-BE49-F238E27FC236}">
-                <a16:creationId xmlns:a16="http://schemas.microsoft.com/office/drawing/2014/main" id="{6A491B2F-C47D-F267-D199-7649973F762F}"/>
-              </a:ext>
-            </a:extLst>
-          </p:cNvPr>
-          <p:cNvSpPr>
-            <a:spLocks noGrp="1"/>
-          </p:cNvSpPr>
-          <p:nvPr>
-            <p:ph idx="1"/>
-          </p:nvPr>
-        </p:nvSpPr>
-        <p:spPr>
-          <a:xfrm>
-            <a:off x="10509" y="-3937"/>
-            <a:ext cx="12181491" cy="6861937"/>
-          </a:xfrm>
-        </p:spPr>
-        <p:txBody>
-          <a:bodyPr>
-            <a:noAutofit/>
-          </a:bodyPr>
-          <a:lstStyle/>
-          <a:p>
-            <a:pPr algn="ctr">
-              <a:lnSpc>
-                <a:spcPct val="100000"/>
-              </a:lnSpc>
-              <a:buNone/>
-            </a:pPr>
-            <a:r>
-              <a:rPr lang="en-US" sz="8800" dirty="0">
-                <a:solidFill>
-                  <a:srgbClr val="FF0000"/>
-                </a:solidFill>
-                <a:cs typeface="Arial" panose="020B0604020202020204" pitchFamily="34" charset="0"/>
-              </a:rPr>
-              <a:t>VS BLOCO 14</a:t>
-            </a:r>
-          </a:p>
-          <a:p>
-            <a:pPr marL="36000" indent="-252000" algn="ctr">
-              <a:lnSpc>
-                <a:spcPct val="100000"/>
-              </a:lnSpc>
-              <a:spcBef>
-                <a:spcPts val="0"/>
-              </a:spcBef>
-              <a:buNone/>
-            </a:pPr>
-            <a:r>
-              <a:rPr lang="pt-BR" sz="7200" dirty="0"/>
-              <a:t>Maria </a:t>
-            </a:r>
-            <a:r>
-              <a:rPr lang="pt-BR" sz="7200" dirty="0" err="1"/>
-              <a:t>Tcha</a:t>
-            </a:r>
-            <a:r>
-              <a:rPr lang="pt-BR" sz="7200" dirty="0"/>
-              <a:t> </a:t>
-            </a:r>
-            <a:r>
-              <a:rPr lang="pt-BR" sz="7200" dirty="0" err="1"/>
-              <a:t>Tcha</a:t>
-            </a:r>
-            <a:r>
-              <a:rPr lang="pt-BR" sz="7200" dirty="0"/>
-              <a:t> </a:t>
-            </a:r>
-            <a:r>
-              <a:rPr lang="pt-BR" sz="7200" dirty="0" err="1"/>
-              <a:t>Tcha</a:t>
-            </a:r>
-            <a:r>
-              <a:rPr lang="pt-BR" sz="7200" dirty="0"/>
-              <a:t> </a:t>
-            </a:r>
-            <a:r>
-              <a:rPr lang="pt-BR" sz="7200" dirty="0">
-                <a:solidFill>
-                  <a:srgbClr val="FF0000"/>
-                </a:solidFill>
-              </a:rPr>
-              <a:t>Mi</a:t>
-            </a:r>
-            <a:br>
-              <a:rPr lang="pt-BR" sz="7200" dirty="0"/>
-            </a:br>
-            <a:r>
-              <a:rPr lang="pt-BR" sz="7200" dirty="0"/>
-              <a:t>Preciso Te Encontrar </a:t>
-            </a:r>
-            <a:r>
-              <a:rPr lang="pt-BR" sz="7200" dirty="0">
-                <a:solidFill>
-                  <a:srgbClr val="FF0000"/>
-                </a:solidFill>
-              </a:rPr>
-              <a:t>Do</a:t>
-            </a:r>
-            <a:br>
-              <a:rPr lang="pt-BR" sz="7200" dirty="0"/>
-            </a:br>
-            <a:r>
-              <a:rPr lang="pt-BR" sz="7200" dirty="0"/>
-              <a:t>Você Vai Ver </a:t>
-            </a:r>
-            <a:r>
-              <a:rPr lang="pt-BR" sz="7200" dirty="0">
-                <a:solidFill>
-                  <a:srgbClr val="FF0000"/>
-                </a:solidFill>
-              </a:rPr>
-              <a:t>Mi</a:t>
-            </a:r>
-            <a:endParaRPr lang="pt-BR" sz="8000" dirty="0">
-              <a:solidFill>
-                <a:srgbClr val="FF0000"/>
-              </a:solidFill>
-              <a:cs typeface="Arial" panose="020B0604020202020204" pitchFamily="34" charset="0"/>
-            </a:endParaRPr>
-          </a:p>
-        </p:txBody>
-      </p:sp>
-    </p:spTree>
-    <p:extLst>
-      <p:ext uri="{BB962C8B-B14F-4D97-AF65-F5344CB8AC3E}">
-        <p14:creationId xmlns:p14="http://schemas.microsoft.com/office/powerpoint/2010/main" val="2164039857"/>
-      </p:ext>
-    </p:extLst>
-  </p:cSld>
-  <p:clrMapOvr>
-    <a:masterClrMapping/>
-  </p:clrMapOvr>
-</p:sld>
-</file>
-
-<file path=ppt/slides/slide78.xml><?xml version="1.0" encoding="utf-8"?>
-<p:sld xmlns:a="http://schemas.openxmlformats.org/drawingml/2006/main" xmlns:r="http://schemas.openxmlformats.org/officeDocument/2006/relationships" xmlns:p="http://schemas.openxmlformats.org/presentationml/2006/main">
-  <p:cSld>
-    <p:spTree>
-      <p:nvGrpSpPr>
-        <p:cNvPr id="1" name="">
-          <a:extLst>
-            <a:ext uri="{FF2B5EF4-FFF2-40B4-BE49-F238E27FC236}">
-              <a16:creationId xmlns:a16="http://schemas.microsoft.com/office/drawing/2014/main" id="{B27F868E-5395-C651-26BC-86AA2D54D906}"/>
-            </a:ext>
-          </a:extLst>
-        </p:cNvPr>
-        <p:cNvGrpSpPr/>
-        <p:nvPr/>
-      </p:nvGrpSpPr>
-      <p:grpSpPr>
-        <a:xfrm>
-          <a:off x="0" y="0"/>
-          <a:ext cx="0" cy="0"/>
-          <a:chOff x="0" y="0"/>
-          <a:chExt cx="0" cy="0"/>
-        </a:xfrm>
-      </p:grpSpPr>
-      <p:sp>
-        <p:nvSpPr>
-          <p:cNvPr id="3" name="Espaço Reservado para Conteúdo 2">
-            <a:extLst>
-              <a:ext uri="{FF2B5EF4-FFF2-40B4-BE49-F238E27FC236}">
-                <a16:creationId xmlns:a16="http://schemas.microsoft.com/office/drawing/2014/main" id="{1CCD7301-FE06-33D8-B74C-D9421B199C02}"/>
-              </a:ext>
-            </a:extLst>
-          </p:cNvPr>
-          <p:cNvSpPr>
-            <a:spLocks noGrp="1"/>
-          </p:cNvSpPr>
-          <p:nvPr>
-            <p:ph idx="1"/>
-          </p:nvPr>
-        </p:nvSpPr>
-        <p:spPr>
-          <a:xfrm>
-            <a:off x="10509" y="-3937"/>
-            <a:ext cx="12181491" cy="6861937"/>
-          </a:xfrm>
-        </p:spPr>
-        <p:txBody>
-          <a:bodyPr>
-            <a:noAutofit/>
-          </a:bodyPr>
-          <a:lstStyle/>
-          <a:p>
-            <a:pPr algn="ctr">
-              <a:lnSpc>
-                <a:spcPct val="100000"/>
-              </a:lnSpc>
-              <a:buNone/>
-            </a:pPr>
-            <a:r>
-              <a:rPr lang="en-US" sz="8800" dirty="0">
-                <a:solidFill>
-                  <a:srgbClr val="FF0000"/>
-                </a:solidFill>
-                <a:cs typeface="Arial" panose="020B0604020202020204" pitchFamily="34" charset="0"/>
-              </a:rPr>
-              <a:t>VS BLOCO 15</a:t>
-            </a:r>
-          </a:p>
-          <a:p>
-            <a:pPr marL="36000" indent="-252000" algn="ctr">
-              <a:lnSpc>
-                <a:spcPct val="100000"/>
-              </a:lnSpc>
-              <a:spcBef>
-                <a:spcPts val="0"/>
-              </a:spcBef>
-              <a:buNone/>
-            </a:pPr>
-            <a:r>
-              <a:rPr lang="pt-BR" sz="7200" dirty="0"/>
-              <a:t>Mineirinho </a:t>
-            </a:r>
-            <a:r>
-              <a:rPr lang="pt-BR" sz="7200" dirty="0">
-                <a:solidFill>
-                  <a:srgbClr val="FF0000"/>
-                </a:solidFill>
-              </a:rPr>
-              <a:t>Sol</a:t>
-            </a:r>
-            <a:br>
-              <a:rPr lang="pt-BR" sz="7200" dirty="0"/>
-            </a:br>
-            <a:r>
-              <a:rPr lang="pt-BR" sz="7200" dirty="0"/>
-              <a:t>Cheia De Manias </a:t>
-            </a:r>
-            <a:r>
-              <a:rPr lang="pt-BR" sz="7200" dirty="0" err="1">
-                <a:solidFill>
-                  <a:srgbClr val="FF0000"/>
-                </a:solidFill>
-              </a:rPr>
-              <a:t>SOLm</a:t>
-            </a:r>
-            <a:br>
-              <a:rPr lang="pt-BR" sz="7200" dirty="0"/>
-            </a:br>
-            <a:r>
-              <a:rPr lang="pt-BR" sz="7200" dirty="0"/>
-              <a:t>Deus Me Livre </a:t>
-            </a:r>
-            <a:r>
-              <a:rPr lang="pt-BR" sz="7200" dirty="0">
-                <a:solidFill>
-                  <a:srgbClr val="FF0000"/>
-                </a:solidFill>
-              </a:rPr>
-              <a:t>Do</a:t>
-            </a:r>
-            <a:endParaRPr lang="pt-BR" sz="8000" dirty="0">
-              <a:solidFill>
-                <a:srgbClr val="FF0000"/>
-              </a:solidFill>
-              <a:cs typeface="Arial" panose="020B0604020202020204" pitchFamily="34" charset="0"/>
-            </a:endParaRPr>
-          </a:p>
-        </p:txBody>
-      </p:sp>
-    </p:spTree>
-    <p:extLst>
-      <p:ext uri="{BB962C8B-B14F-4D97-AF65-F5344CB8AC3E}">
-        <p14:creationId xmlns:p14="http://schemas.microsoft.com/office/powerpoint/2010/main" val="1397947532"/>
-      </p:ext>
-    </p:extLst>
-  </p:cSld>
-  <p:clrMapOvr>
-    <a:masterClrMapping/>
-  </p:clrMapOvr>
-</p:sld>
-</file>
-
-<file path=ppt/slides/slide79.xml><?xml version="1.0" encoding="utf-8"?>
-<p:sld xmlns:a="http://schemas.openxmlformats.org/drawingml/2006/main" xmlns:r="http://schemas.openxmlformats.org/officeDocument/2006/relationships" xmlns:p="http://schemas.openxmlformats.org/presentationml/2006/main">
-  <p:cSld>
-    <p:spTree>
-      <p:nvGrpSpPr>
-        <p:cNvPr id="1" name="">
-          <a:extLst>
-            <a:ext uri="{FF2B5EF4-FFF2-40B4-BE49-F238E27FC236}">
-              <a16:creationId xmlns:a16="http://schemas.microsoft.com/office/drawing/2014/main" id="{B77F8FE7-F682-F272-86B7-05E04CD81CA5}"/>
-            </a:ext>
-          </a:extLst>
-        </p:cNvPr>
-        <p:cNvGrpSpPr/>
-        <p:nvPr/>
-      </p:nvGrpSpPr>
-      <p:grpSpPr>
-        <a:xfrm>
-          <a:off x="0" y="0"/>
-          <a:ext cx="0" cy="0"/>
-          <a:chOff x="0" y="0"/>
-          <a:chExt cx="0" cy="0"/>
-        </a:xfrm>
-      </p:grpSpPr>
-      <p:sp>
-        <p:nvSpPr>
-          <p:cNvPr id="3" name="Espaço Reservado para Conteúdo 2">
-            <a:extLst>
-              <a:ext uri="{FF2B5EF4-FFF2-40B4-BE49-F238E27FC236}">
-                <a16:creationId xmlns:a16="http://schemas.microsoft.com/office/drawing/2014/main" id="{2AC924BC-F62C-79CC-E31A-7623E1BCB835}"/>
-              </a:ext>
-            </a:extLst>
-          </p:cNvPr>
-          <p:cNvSpPr>
-            <a:spLocks noGrp="1"/>
-          </p:cNvSpPr>
-          <p:nvPr>
-            <p:ph idx="1"/>
-          </p:nvPr>
-        </p:nvSpPr>
-        <p:spPr>
-          <a:xfrm>
-            <a:off x="10509" y="-3937"/>
-            <a:ext cx="12181491" cy="6861937"/>
-          </a:xfrm>
-        </p:spPr>
-        <p:txBody>
-          <a:bodyPr>
-            <a:noAutofit/>
-          </a:bodyPr>
-          <a:lstStyle/>
-          <a:p>
-            <a:pPr algn="ctr">
-              <a:lnSpc>
-                <a:spcPct val="100000"/>
-              </a:lnSpc>
-              <a:buNone/>
-            </a:pPr>
-            <a:r>
-              <a:rPr lang="en-US" sz="8800" dirty="0">
-                <a:solidFill>
-                  <a:srgbClr val="FF0000"/>
-                </a:solidFill>
-                <a:cs typeface="Arial" panose="020B0604020202020204" pitchFamily="34" charset="0"/>
-              </a:rPr>
-              <a:t>VS BLOCO 16</a:t>
-            </a:r>
-          </a:p>
-          <a:p>
-            <a:pPr marL="36000" indent="-252000" algn="ctr">
-              <a:lnSpc>
-                <a:spcPct val="100000"/>
-              </a:lnSpc>
-              <a:spcBef>
-                <a:spcPts val="0"/>
-              </a:spcBef>
-              <a:buNone/>
-            </a:pPr>
-            <a:r>
-              <a:rPr lang="pt-BR" sz="7200" dirty="0"/>
-              <a:t>Nosso Amor Terminou </a:t>
-            </a:r>
-            <a:r>
-              <a:rPr lang="pt-BR" sz="7200" dirty="0">
-                <a:solidFill>
-                  <a:srgbClr val="FF0000"/>
-                </a:solidFill>
-              </a:rPr>
-              <a:t>Sol</a:t>
-            </a:r>
-            <a:br>
-              <a:rPr lang="pt-BR" sz="7200" dirty="0"/>
-            </a:br>
-            <a:r>
-              <a:rPr lang="pt-BR" sz="7200" dirty="0"/>
-              <a:t>Assino Com X </a:t>
-            </a:r>
-            <a:r>
-              <a:rPr lang="pt-BR" sz="7200" dirty="0">
-                <a:solidFill>
-                  <a:srgbClr val="FF0000"/>
-                </a:solidFill>
-              </a:rPr>
-              <a:t>La</a:t>
-            </a:r>
-            <a:endParaRPr lang="pt-BR" sz="8000" dirty="0">
-              <a:solidFill>
-                <a:srgbClr val="FF0000"/>
-              </a:solidFill>
-              <a:cs typeface="Arial" panose="020B0604020202020204" pitchFamily="34" charset="0"/>
-            </a:endParaRPr>
-          </a:p>
-        </p:txBody>
-      </p:sp>
-    </p:spTree>
-    <p:extLst>
-      <p:ext uri="{BB962C8B-B14F-4D97-AF65-F5344CB8AC3E}">
-        <p14:creationId xmlns:p14="http://schemas.microsoft.com/office/powerpoint/2010/main" val="3110158297"/>
       </p:ext>
     </p:extLst>
   </p:cSld>
@@ -17699,1467 +14926,6 @@
 </p:sld>
 </file>
 
-<file path=ppt/slides/slide80.xml><?xml version="1.0" encoding="utf-8"?>
-<p:sld xmlns:a="http://schemas.openxmlformats.org/drawingml/2006/main" xmlns:r="http://schemas.openxmlformats.org/officeDocument/2006/relationships" xmlns:p="http://schemas.openxmlformats.org/presentationml/2006/main">
-  <p:cSld>
-    <p:spTree>
-      <p:nvGrpSpPr>
-        <p:cNvPr id="1" name="">
-          <a:extLst>
-            <a:ext uri="{FF2B5EF4-FFF2-40B4-BE49-F238E27FC236}">
-              <a16:creationId xmlns:a16="http://schemas.microsoft.com/office/drawing/2014/main" id="{70C65271-E891-BC86-E338-D59A2C58161B}"/>
-            </a:ext>
-          </a:extLst>
-        </p:cNvPr>
-        <p:cNvGrpSpPr/>
-        <p:nvPr/>
-      </p:nvGrpSpPr>
-      <p:grpSpPr>
-        <a:xfrm>
-          <a:off x="0" y="0"/>
-          <a:ext cx="0" cy="0"/>
-          <a:chOff x="0" y="0"/>
-          <a:chExt cx="0" cy="0"/>
-        </a:xfrm>
-      </p:grpSpPr>
-      <p:sp>
-        <p:nvSpPr>
-          <p:cNvPr id="3" name="Espaço Reservado para Conteúdo 2">
-            <a:extLst>
-              <a:ext uri="{FF2B5EF4-FFF2-40B4-BE49-F238E27FC236}">
-                <a16:creationId xmlns:a16="http://schemas.microsoft.com/office/drawing/2014/main" id="{DE402F7C-E595-D55C-27A2-60AE59A49604}"/>
-              </a:ext>
-            </a:extLst>
-          </p:cNvPr>
-          <p:cNvSpPr>
-            <a:spLocks noGrp="1"/>
-          </p:cNvSpPr>
-          <p:nvPr>
-            <p:ph idx="1"/>
-          </p:nvPr>
-        </p:nvSpPr>
-        <p:spPr>
-          <a:xfrm>
-            <a:off x="10509" y="-3937"/>
-            <a:ext cx="12181491" cy="6861937"/>
-          </a:xfrm>
-        </p:spPr>
-        <p:txBody>
-          <a:bodyPr>
-            <a:noAutofit/>
-          </a:bodyPr>
-          <a:lstStyle/>
-          <a:p>
-            <a:pPr algn="ctr">
-              <a:lnSpc>
-                <a:spcPct val="100000"/>
-              </a:lnSpc>
-              <a:buNone/>
-            </a:pPr>
-            <a:r>
-              <a:rPr lang="en-US" sz="8800" dirty="0">
-                <a:solidFill>
-                  <a:srgbClr val="FF0000"/>
-                </a:solidFill>
-                <a:cs typeface="Arial" panose="020B0604020202020204" pitchFamily="34" charset="0"/>
-              </a:rPr>
-              <a:t>VS BLOCO 17</a:t>
-            </a:r>
-          </a:p>
-          <a:p>
-            <a:pPr marL="36000" indent="-252000" algn="ctr">
-              <a:lnSpc>
-                <a:spcPct val="100000"/>
-              </a:lnSpc>
-              <a:spcBef>
-                <a:spcPts val="0"/>
-              </a:spcBef>
-              <a:buNone/>
-            </a:pPr>
-            <a:r>
-              <a:rPr lang="en-US" sz="7200" dirty="0">
-                <a:cs typeface="Arial" panose="020B0604020202020204" pitchFamily="34" charset="0"/>
-              </a:rPr>
-              <a:t>Novela das 8 </a:t>
-            </a:r>
-            <a:r>
-              <a:rPr lang="en-US" sz="7200" dirty="0">
-                <a:solidFill>
-                  <a:srgbClr val="FF0000"/>
-                </a:solidFill>
-                <a:cs typeface="Arial" panose="020B0604020202020204" pitchFamily="34" charset="0"/>
-              </a:rPr>
-              <a:t>Mi</a:t>
-            </a:r>
-          </a:p>
-          <a:p>
-            <a:pPr marL="36000" indent="-252000" algn="ctr">
-              <a:lnSpc>
-                <a:spcPct val="100000"/>
-              </a:lnSpc>
-              <a:spcBef>
-                <a:spcPts val="0"/>
-              </a:spcBef>
-              <a:buNone/>
-            </a:pPr>
-            <a:r>
-              <a:rPr lang="en-US" sz="7200" dirty="0" err="1">
-                <a:cs typeface="Arial" panose="020B0604020202020204" pitchFamily="34" charset="0"/>
-              </a:rPr>
-              <a:t>Melô</a:t>
-            </a:r>
-            <a:r>
-              <a:rPr lang="en-US" sz="7200" dirty="0">
-                <a:cs typeface="Arial" panose="020B0604020202020204" pitchFamily="34" charset="0"/>
-              </a:rPr>
-              <a:t> do Rolo </a:t>
-            </a:r>
-            <a:r>
-              <a:rPr lang="en-US" sz="7200" dirty="0">
-                <a:solidFill>
-                  <a:srgbClr val="FF0000"/>
-                </a:solidFill>
-                <a:cs typeface="Arial" panose="020B0604020202020204" pitchFamily="34" charset="0"/>
-              </a:rPr>
-              <a:t>Do</a:t>
-            </a:r>
-          </a:p>
-          <a:p>
-            <a:pPr marL="36000" indent="-252000" algn="ctr">
-              <a:lnSpc>
-                <a:spcPct val="100000"/>
-              </a:lnSpc>
-              <a:spcBef>
-                <a:spcPts val="0"/>
-              </a:spcBef>
-              <a:buNone/>
-            </a:pPr>
-            <a:r>
-              <a:rPr lang="en-US" sz="7200" dirty="0" err="1">
-                <a:cs typeface="Arial" panose="020B0604020202020204" pitchFamily="34" charset="0"/>
-              </a:rPr>
-              <a:t>Heyo</a:t>
-            </a:r>
-            <a:r>
-              <a:rPr lang="en-US" sz="7200" dirty="0">
-                <a:cs typeface="Arial" panose="020B0604020202020204" pitchFamily="34" charset="0"/>
-              </a:rPr>
-              <a:t> </a:t>
-            </a:r>
-            <a:r>
-              <a:rPr lang="en-US" sz="7200" dirty="0" err="1">
-                <a:cs typeface="Arial" panose="020B0604020202020204" pitchFamily="34" charset="0"/>
-              </a:rPr>
-              <a:t>Heyo</a:t>
-            </a:r>
-            <a:r>
-              <a:rPr lang="en-US" sz="7200" dirty="0">
-                <a:cs typeface="Arial" panose="020B0604020202020204" pitchFamily="34" charset="0"/>
-              </a:rPr>
-              <a:t> </a:t>
-            </a:r>
-            <a:r>
-              <a:rPr lang="en-US" sz="7200" dirty="0">
-                <a:solidFill>
-                  <a:srgbClr val="FF0000"/>
-                </a:solidFill>
-                <a:cs typeface="Arial" panose="020B0604020202020204" pitchFamily="34" charset="0"/>
-              </a:rPr>
-              <a:t>Mib</a:t>
-            </a:r>
-            <a:endParaRPr lang="pt-BR" sz="7200" dirty="0">
-              <a:solidFill>
-                <a:srgbClr val="FF0000"/>
-              </a:solidFill>
-              <a:cs typeface="Arial" panose="020B0604020202020204" pitchFamily="34" charset="0"/>
-            </a:endParaRPr>
-          </a:p>
-          <a:p>
-            <a:pPr algn="ctr">
-              <a:lnSpc>
-                <a:spcPct val="100000"/>
-              </a:lnSpc>
-              <a:buNone/>
-            </a:pPr>
-            <a:endParaRPr lang="pt-BR" sz="8000" dirty="0">
-              <a:solidFill>
-                <a:srgbClr val="FF0000"/>
-              </a:solidFill>
-              <a:cs typeface="Arial" panose="020B0604020202020204" pitchFamily="34" charset="0"/>
-            </a:endParaRPr>
-          </a:p>
-        </p:txBody>
-      </p:sp>
-    </p:spTree>
-    <p:extLst>
-      <p:ext uri="{BB962C8B-B14F-4D97-AF65-F5344CB8AC3E}">
-        <p14:creationId xmlns:p14="http://schemas.microsoft.com/office/powerpoint/2010/main" val="1721671897"/>
-      </p:ext>
-    </p:extLst>
-  </p:cSld>
-  <p:clrMapOvr>
-    <a:masterClrMapping/>
-  </p:clrMapOvr>
-</p:sld>
-</file>
-
-<file path=ppt/slides/slide81.xml><?xml version="1.0" encoding="utf-8"?>
-<p:sld xmlns:a="http://schemas.openxmlformats.org/drawingml/2006/main" xmlns:r="http://schemas.openxmlformats.org/officeDocument/2006/relationships" xmlns:p="http://schemas.openxmlformats.org/presentationml/2006/main">
-  <p:cSld>
-    <p:spTree>
-      <p:nvGrpSpPr>
-        <p:cNvPr id="1" name="">
-          <a:extLst>
-            <a:ext uri="{FF2B5EF4-FFF2-40B4-BE49-F238E27FC236}">
-              <a16:creationId xmlns:a16="http://schemas.microsoft.com/office/drawing/2014/main" id="{359C69B3-7FFE-985B-C272-381403E7C39D}"/>
-            </a:ext>
-          </a:extLst>
-        </p:cNvPr>
-        <p:cNvGrpSpPr/>
-        <p:nvPr/>
-      </p:nvGrpSpPr>
-      <p:grpSpPr>
-        <a:xfrm>
-          <a:off x="0" y="0"/>
-          <a:ext cx="0" cy="0"/>
-          <a:chOff x="0" y="0"/>
-          <a:chExt cx="0" cy="0"/>
-        </a:xfrm>
-      </p:grpSpPr>
-      <p:sp>
-        <p:nvSpPr>
-          <p:cNvPr id="3" name="Espaço Reservado para Conteúdo 2">
-            <a:extLst>
-              <a:ext uri="{FF2B5EF4-FFF2-40B4-BE49-F238E27FC236}">
-                <a16:creationId xmlns:a16="http://schemas.microsoft.com/office/drawing/2014/main" id="{3B3A97F9-544A-86ED-A8D4-3908F9C6C0D3}"/>
-              </a:ext>
-            </a:extLst>
-          </p:cNvPr>
-          <p:cNvSpPr>
-            <a:spLocks noGrp="1"/>
-          </p:cNvSpPr>
-          <p:nvPr>
-            <p:ph idx="1"/>
-          </p:nvPr>
-        </p:nvSpPr>
-        <p:spPr>
-          <a:xfrm>
-            <a:off x="10509" y="-3937"/>
-            <a:ext cx="12181491" cy="6861937"/>
-          </a:xfrm>
-        </p:spPr>
-        <p:txBody>
-          <a:bodyPr>
-            <a:noAutofit/>
-          </a:bodyPr>
-          <a:lstStyle/>
-          <a:p>
-            <a:pPr algn="ctr">
-              <a:lnSpc>
-                <a:spcPct val="100000"/>
-              </a:lnSpc>
-              <a:buNone/>
-            </a:pPr>
-            <a:r>
-              <a:rPr lang="en-US" sz="8800" dirty="0">
-                <a:solidFill>
-                  <a:srgbClr val="FF0000"/>
-                </a:solidFill>
-                <a:cs typeface="Arial" panose="020B0604020202020204" pitchFamily="34" charset="0"/>
-              </a:rPr>
-              <a:t>VS BLOCO 18</a:t>
-            </a:r>
-          </a:p>
-          <a:p>
-            <a:pPr marL="36000" indent="-252000" algn="ctr">
-              <a:lnSpc>
-                <a:spcPct val="100000"/>
-              </a:lnSpc>
-              <a:spcBef>
-                <a:spcPts val="0"/>
-              </a:spcBef>
-              <a:buNone/>
-            </a:pPr>
-            <a:r>
-              <a:rPr lang="en-US" sz="7200" dirty="0" err="1">
-                <a:cs typeface="Arial" panose="020B0604020202020204" pitchFamily="34" charset="0"/>
-              </a:rPr>
-              <a:t>Olhos</a:t>
-            </a:r>
-            <a:r>
-              <a:rPr lang="en-US" sz="7200" dirty="0">
-                <a:cs typeface="Arial" panose="020B0604020202020204" pitchFamily="34" charset="0"/>
-              </a:rPr>
-              <a:t> Negros </a:t>
-            </a:r>
-            <a:r>
-              <a:rPr lang="en-US" sz="7200" dirty="0">
-                <a:solidFill>
-                  <a:srgbClr val="FF0000"/>
-                </a:solidFill>
-                <a:cs typeface="Arial" panose="020B0604020202020204" pitchFamily="34" charset="0"/>
-              </a:rPr>
-              <a:t>Sol</a:t>
-            </a:r>
-          </a:p>
-          <a:p>
-            <a:pPr marL="36000" indent="-252000" algn="ctr">
-              <a:lnSpc>
-                <a:spcPct val="100000"/>
-              </a:lnSpc>
-              <a:spcBef>
-                <a:spcPts val="0"/>
-              </a:spcBef>
-              <a:buNone/>
-            </a:pPr>
-            <a:r>
-              <a:rPr lang="en-US" sz="7200" dirty="0" err="1">
-                <a:cs typeface="Arial" panose="020B0604020202020204" pitchFamily="34" charset="0"/>
-              </a:rPr>
-              <a:t>Alô</a:t>
-            </a:r>
-            <a:r>
-              <a:rPr lang="en-US" sz="7200" dirty="0">
-                <a:cs typeface="Arial" panose="020B0604020202020204" pitchFamily="34" charset="0"/>
-              </a:rPr>
-              <a:t> meu Amor </a:t>
-            </a:r>
-            <a:r>
-              <a:rPr lang="en-US" sz="7200" dirty="0">
-                <a:solidFill>
-                  <a:srgbClr val="FF0000"/>
-                </a:solidFill>
-                <a:cs typeface="Arial" panose="020B0604020202020204" pitchFamily="34" charset="0"/>
-              </a:rPr>
-              <a:t>Sol</a:t>
-            </a:r>
-            <a:endParaRPr lang="pt-BR" sz="7200" dirty="0">
-              <a:solidFill>
-                <a:srgbClr val="FF0000"/>
-              </a:solidFill>
-              <a:cs typeface="Arial" panose="020B0604020202020204" pitchFamily="34" charset="0"/>
-            </a:endParaRPr>
-          </a:p>
-          <a:p>
-            <a:pPr algn="ctr">
-              <a:lnSpc>
-                <a:spcPct val="100000"/>
-              </a:lnSpc>
-              <a:buNone/>
-            </a:pPr>
-            <a:endParaRPr lang="pt-BR" sz="8000" dirty="0">
-              <a:solidFill>
-                <a:srgbClr val="FF0000"/>
-              </a:solidFill>
-              <a:cs typeface="Arial" panose="020B0604020202020204" pitchFamily="34" charset="0"/>
-            </a:endParaRPr>
-          </a:p>
-        </p:txBody>
-      </p:sp>
-    </p:spTree>
-    <p:extLst>
-      <p:ext uri="{BB962C8B-B14F-4D97-AF65-F5344CB8AC3E}">
-        <p14:creationId xmlns:p14="http://schemas.microsoft.com/office/powerpoint/2010/main" val="893400633"/>
-      </p:ext>
-    </p:extLst>
-  </p:cSld>
-  <p:clrMapOvr>
-    <a:masterClrMapping/>
-  </p:clrMapOvr>
-</p:sld>
-</file>
-
-<file path=ppt/slides/slide82.xml><?xml version="1.0" encoding="utf-8"?>
-<p:sld xmlns:a="http://schemas.openxmlformats.org/drawingml/2006/main" xmlns:r="http://schemas.openxmlformats.org/officeDocument/2006/relationships" xmlns:p="http://schemas.openxmlformats.org/presentationml/2006/main">
-  <p:cSld>
-    <p:spTree>
-      <p:nvGrpSpPr>
-        <p:cNvPr id="1" name="">
-          <a:extLst>
-            <a:ext uri="{FF2B5EF4-FFF2-40B4-BE49-F238E27FC236}">
-              <a16:creationId xmlns:a16="http://schemas.microsoft.com/office/drawing/2014/main" id="{F47867AB-43F6-377A-AAC1-744F69C2DA53}"/>
-            </a:ext>
-          </a:extLst>
-        </p:cNvPr>
-        <p:cNvGrpSpPr/>
-        <p:nvPr/>
-      </p:nvGrpSpPr>
-      <p:grpSpPr>
-        <a:xfrm>
-          <a:off x="0" y="0"/>
-          <a:ext cx="0" cy="0"/>
-          <a:chOff x="0" y="0"/>
-          <a:chExt cx="0" cy="0"/>
-        </a:xfrm>
-      </p:grpSpPr>
-      <p:sp>
-        <p:nvSpPr>
-          <p:cNvPr id="3" name="Espaço Reservado para Conteúdo 2">
-            <a:extLst>
-              <a:ext uri="{FF2B5EF4-FFF2-40B4-BE49-F238E27FC236}">
-                <a16:creationId xmlns:a16="http://schemas.microsoft.com/office/drawing/2014/main" id="{6772618C-C58E-C917-D49B-9C5A94891A9A}"/>
-              </a:ext>
-            </a:extLst>
-          </p:cNvPr>
-          <p:cNvSpPr>
-            <a:spLocks noGrp="1"/>
-          </p:cNvSpPr>
-          <p:nvPr>
-            <p:ph idx="1"/>
-          </p:nvPr>
-        </p:nvSpPr>
-        <p:spPr>
-          <a:xfrm>
-            <a:off x="10509" y="-3937"/>
-            <a:ext cx="12181491" cy="6861937"/>
-          </a:xfrm>
-        </p:spPr>
-        <p:txBody>
-          <a:bodyPr>
-            <a:noAutofit/>
-          </a:bodyPr>
-          <a:lstStyle/>
-          <a:p>
-            <a:pPr algn="ctr">
-              <a:lnSpc>
-                <a:spcPct val="100000"/>
-              </a:lnSpc>
-              <a:buNone/>
-            </a:pPr>
-            <a:r>
-              <a:rPr lang="en-US" sz="8800" dirty="0">
-                <a:solidFill>
-                  <a:srgbClr val="FF0000"/>
-                </a:solidFill>
-                <a:cs typeface="Arial" panose="020B0604020202020204" pitchFamily="34" charset="0"/>
-              </a:rPr>
-              <a:t>VS BLOCO 19</a:t>
-            </a:r>
-          </a:p>
-          <a:p>
-            <a:pPr marL="36000" indent="-252000" algn="ctr">
-              <a:lnSpc>
-                <a:spcPct val="100000"/>
-              </a:lnSpc>
-              <a:spcBef>
-                <a:spcPts val="0"/>
-              </a:spcBef>
-              <a:buNone/>
-            </a:pPr>
-            <a:r>
-              <a:rPr lang="pt-BR" sz="6600" dirty="0"/>
-              <a:t>Pegando Ônibus </a:t>
-            </a:r>
-            <a:r>
-              <a:rPr lang="pt-BR" sz="6600" dirty="0">
-                <a:solidFill>
-                  <a:srgbClr val="FF0000"/>
-                </a:solidFill>
-              </a:rPr>
-              <a:t>Sol</a:t>
-            </a:r>
-            <a:br>
-              <a:rPr lang="pt-BR" sz="6600" dirty="0"/>
-            </a:br>
-            <a:r>
-              <a:rPr lang="pt-BR" sz="6600" dirty="0"/>
-              <a:t>Bandido Do Amor </a:t>
-            </a:r>
-            <a:r>
-              <a:rPr lang="pt-BR" sz="6600" dirty="0" err="1">
-                <a:solidFill>
-                  <a:srgbClr val="FF0000"/>
-                </a:solidFill>
-              </a:rPr>
-              <a:t>Sib</a:t>
-            </a:r>
-            <a:br>
-              <a:rPr lang="pt-BR" sz="6600" dirty="0"/>
-            </a:br>
-            <a:r>
-              <a:rPr lang="pt-BR" sz="6600" dirty="0"/>
-              <a:t>O Que Tiver Que Vir Virá </a:t>
-            </a:r>
-            <a:r>
-              <a:rPr lang="pt-BR" sz="6600" dirty="0">
-                <a:solidFill>
-                  <a:srgbClr val="FF0000"/>
-                </a:solidFill>
-              </a:rPr>
-              <a:t>Do#</a:t>
-            </a:r>
-            <a:endParaRPr lang="pt-BR" sz="6600" dirty="0">
-              <a:solidFill>
-                <a:srgbClr val="FF0000"/>
-              </a:solidFill>
-              <a:cs typeface="Arial" panose="020B0604020202020204" pitchFamily="34" charset="0"/>
-            </a:endParaRPr>
-          </a:p>
-        </p:txBody>
-      </p:sp>
-    </p:spTree>
-    <p:extLst>
-      <p:ext uri="{BB962C8B-B14F-4D97-AF65-F5344CB8AC3E}">
-        <p14:creationId xmlns:p14="http://schemas.microsoft.com/office/powerpoint/2010/main" val="3606821582"/>
-      </p:ext>
-    </p:extLst>
-  </p:cSld>
-  <p:clrMapOvr>
-    <a:masterClrMapping/>
-  </p:clrMapOvr>
-</p:sld>
-</file>
-
-<file path=ppt/slides/slide83.xml><?xml version="1.0" encoding="utf-8"?>
-<p:sld xmlns:a="http://schemas.openxmlformats.org/drawingml/2006/main" xmlns:r="http://schemas.openxmlformats.org/officeDocument/2006/relationships" xmlns:p="http://schemas.openxmlformats.org/presentationml/2006/main">
-  <p:cSld>
-    <p:spTree>
-      <p:nvGrpSpPr>
-        <p:cNvPr id="1" name="">
-          <a:extLst>
-            <a:ext uri="{FF2B5EF4-FFF2-40B4-BE49-F238E27FC236}">
-              <a16:creationId xmlns:a16="http://schemas.microsoft.com/office/drawing/2014/main" id="{EE1F0B36-102A-E5F3-D123-BEC997532835}"/>
-            </a:ext>
-          </a:extLst>
-        </p:cNvPr>
-        <p:cNvGrpSpPr/>
-        <p:nvPr/>
-      </p:nvGrpSpPr>
-      <p:grpSpPr>
-        <a:xfrm>
-          <a:off x="0" y="0"/>
-          <a:ext cx="0" cy="0"/>
-          <a:chOff x="0" y="0"/>
-          <a:chExt cx="0" cy="0"/>
-        </a:xfrm>
-      </p:grpSpPr>
-      <p:sp>
-        <p:nvSpPr>
-          <p:cNvPr id="3" name="Espaço Reservado para Conteúdo 2">
-            <a:extLst>
-              <a:ext uri="{FF2B5EF4-FFF2-40B4-BE49-F238E27FC236}">
-                <a16:creationId xmlns:a16="http://schemas.microsoft.com/office/drawing/2014/main" id="{4F49180E-CF19-DCBB-8BE5-CEBA7D2879E2}"/>
-              </a:ext>
-            </a:extLst>
-          </p:cNvPr>
-          <p:cNvSpPr>
-            <a:spLocks noGrp="1"/>
-          </p:cNvSpPr>
-          <p:nvPr>
-            <p:ph idx="1"/>
-          </p:nvPr>
-        </p:nvSpPr>
-        <p:spPr>
-          <a:xfrm>
-            <a:off x="10509" y="-3937"/>
-            <a:ext cx="12181491" cy="6861937"/>
-          </a:xfrm>
-        </p:spPr>
-        <p:txBody>
-          <a:bodyPr>
-            <a:noAutofit/>
-          </a:bodyPr>
-          <a:lstStyle/>
-          <a:p>
-            <a:pPr algn="ctr">
-              <a:lnSpc>
-                <a:spcPct val="100000"/>
-              </a:lnSpc>
-              <a:buNone/>
-            </a:pPr>
-            <a:r>
-              <a:rPr lang="en-US" sz="8800" dirty="0">
-                <a:solidFill>
-                  <a:srgbClr val="FF0000"/>
-                </a:solidFill>
-                <a:cs typeface="Arial" panose="020B0604020202020204" pitchFamily="34" charset="0"/>
-              </a:rPr>
-              <a:t>VS BLOCO 20</a:t>
-            </a:r>
-          </a:p>
-          <a:p>
-            <a:pPr marL="36000" indent="-252000" algn="ctr">
-              <a:lnSpc>
-                <a:spcPct val="100000"/>
-              </a:lnSpc>
-              <a:spcBef>
-                <a:spcPts val="0"/>
-              </a:spcBef>
-              <a:buNone/>
-            </a:pPr>
-            <a:r>
-              <a:rPr lang="pt-BR" sz="7200" dirty="0"/>
-              <a:t>Perigosa e Linda </a:t>
-            </a:r>
-            <a:r>
-              <a:rPr lang="pt-BR" sz="7200" dirty="0">
-                <a:solidFill>
-                  <a:srgbClr val="FF0000"/>
-                </a:solidFill>
-              </a:rPr>
-              <a:t>Mi</a:t>
-            </a:r>
-            <a:br>
-              <a:rPr lang="pt-BR" sz="7200" dirty="0"/>
-            </a:br>
-            <a:r>
-              <a:rPr lang="pt-BR" sz="7200" dirty="0" err="1"/>
-              <a:t>Cumpadi</a:t>
-            </a:r>
-            <a:r>
-              <a:rPr lang="pt-BR" sz="7200" dirty="0"/>
-              <a:t> e </a:t>
-            </a:r>
-            <a:r>
-              <a:rPr lang="pt-BR" sz="7200" dirty="0" err="1"/>
-              <a:t>Cumadi</a:t>
-            </a:r>
-            <a:r>
-              <a:rPr lang="pt-BR" sz="7200" dirty="0"/>
-              <a:t> </a:t>
-            </a:r>
-            <a:r>
-              <a:rPr lang="pt-BR" sz="7200" dirty="0">
-                <a:solidFill>
-                  <a:srgbClr val="FF0000"/>
-                </a:solidFill>
-              </a:rPr>
-              <a:t>Re</a:t>
-            </a:r>
-            <a:endParaRPr lang="pt-BR" sz="8000" dirty="0">
-              <a:solidFill>
-                <a:srgbClr val="FF0000"/>
-              </a:solidFill>
-              <a:cs typeface="Arial" panose="020B0604020202020204" pitchFamily="34" charset="0"/>
-            </a:endParaRPr>
-          </a:p>
-        </p:txBody>
-      </p:sp>
-    </p:spTree>
-    <p:extLst>
-      <p:ext uri="{BB962C8B-B14F-4D97-AF65-F5344CB8AC3E}">
-        <p14:creationId xmlns:p14="http://schemas.microsoft.com/office/powerpoint/2010/main" val="3534636844"/>
-      </p:ext>
-    </p:extLst>
-  </p:cSld>
-  <p:clrMapOvr>
-    <a:masterClrMapping/>
-  </p:clrMapOvr>
-</p:sld>
-</file>
-
-<file path=ppt/slides/slide84.xml><?xml version="1.0" encoding="utf-8"?>
-<p:sld xmlns:a="http://schemas.openxmlformats.org/drawingml/2006/main" xmlns:r="http://schemas.openxmlformats.org/officeDocument/2006/relationships" xmlns:p="http://schemas.openxmlformats.org/presentationml/2006/main">
-  <p:cSld>
-    <p:spTree>
-      <p:nvGrpSpPr>
-        <p:cNvPr id="1" name="">
-          <a:extLst>
-            <a:ext uri="{FF2B5EF4-FFF2-40B4-BE49-F238E27FC236}">
-              <a16:creationId xmlns:a16="http://schemas.microsoft.com/office/drawing/2014/main" id="{E45C8960-8652-DE75-AFB1-77317FD58BC1}"/>
-            </a:ext>
-          </a:extLst>
-        </p:cNvPr>
-        <p:cNvGrpSpPr/>
-        <p:nvPr/>
-      </p:nvGrpSpPr>
-      <p:grpSpPr>
-        <a:xfrm>
-          <a:off x="0" y="0"/>
-          <a:ext cx="0" cy="0"/>
-          <a:chOff x="0" y="0"/>
-          <a:chExt cx="0" cy="0"/>
-        </a:xfrm>
-      </p:grpSpPr>
-      <p:sp>
-        <p:nvSpPr>
-          <p:cNvPr id="3" name="Espaço Reservado para Conteúdo 2">
-            <a:extLst>
-              <a:ext uri="{FF2B5EF4-FFF2-40B4-BE49-F238E27FC236}">
-                <a16:creationId xmlns:a16="http://schemas.microsoft.com/office/drawing/2014/main" id="{9A828EEE-9FC6-D3EE-F215-9117F8B04108}"/>
-              </a:ext>
-            </a:extLst>
-          </p:cNvPr>
-          <p:cNvSpPr>
-            <a:spLocks noGrp="1"/>
-          </p:cNvSpPr>
-          <p:nvPr>
-            <p:ph idx="1"/>
-          </p:nvPr>
-        </p:nvSpPr>
-        <p:spPr>
-          <a:xfrm>
-            <a:off x="10509" y="-3937"/>
-            <a:ext cx="12181491" cy="6861937"/>
-          </a:xfrm>
-        </p:spPr>
-        <p:txBody>
-          <a:bodyPr>
-            <a:noAutofit/>
-          </a:bodyPr>
-          <a:lstStyle/>
-          <a:p>
-            <a:pPr algn="ctr">
-              <a:lnSpc>
-                <a:spcPct val="100000"/>
-              </a:lnSpc>
-              <a:buNone/>
-            </a:pPr>
-            <a:r>
-              <a:rPr lang="en-US" sz="8800" dirty="0">
-                <a:solidFill>
-                  <a:srgbClr val="FF0000"/>
-                </a:solidFill>
-                <a:cs typeface="Arial" panose="020B0604020202020204" pitchFamily="34" charset="0"/>
-              </a:rPr>
-              <a:t>VS BLOCO 21</a:t>
-            </a:r>
-          </a:p>
-          <a:p>
-            <a:pPr marL="36000" indent="-252000" algn="ctr">
-              <a:lnSpc>
-                <a:spcPct val="100000"/>
-              </a:lnSpc>
-              <a:spcBef>
-                <a:spcPts val="0"/>
-              </a:spcBef>
-              <a:buNone/>
-            </a:pPr>
-            <a:r>
-              <a:rPr lang="pt-BR" sz="7200" dirty="0"/>
-              <a:t>Reprises De Amor </a:t>
-            </a:r>
-            <a:r>
-              <a:rPr lang="pt-BR" sz="7200" dirty="0">
-                <a:solidFill>
-                  <a:srgbClr val="FF0000"/>
-                </a:solidFill>
-              </a:rPr>
-              <a:t>Si</a:t>
-            </a:r>
-            <a:br>
-              <a:rPr lang="pt-BR" sz="7200" dirty="0"/>
-            </a:br>
-            <a:r>
-              <a:rPr lang="pt-BR" sz="7200" dirty="0"/>
-              <a:t>Eu O Copo e a Solidão </a:t>
-            </a:r>
-            <a:r>
-              <a:rPr lang="pt-BR" sz="7200" dirty="0">
-                <a:solidFill>
-                  <a:srgbClr val="FF0000"/>
-                </a:solidFill>
-              </a:rPr>
-              <a:t>Sol</a:t>
-            </a:r>
-            <a:br>
-              <a:rPr lang="pt-BR" sz="7200" dirty="0"/>
-            </a:br>
-            <a:r>
-              <a:rPr lang="pt-BR" sz="7200" dirty="0"/>
-              <a:t>Você Me Tira Do Ar </a:t>
-            </a:r>
-            <a:r>
-              <a:rPr lang="pt-BR" sz="7200" dirty="0">
-                <a:solidFill>
-                  <a:srgbClr val="FF0000"/>
-                </a:solidFill>
-              </a:rPr>
-              <a:t>Do</a:t>
-            </a:r>
-            <a:endParaRPr lang="pt-BR" sz="8000" dirty="0">
-              <a:solidFill>
-                <a:srgbClr val="FF0000"/>
-              </a:solidFill>
-              <a:cs typeface="Arial" panose="020B0604020202020204" pitchFamily="34" charset="0"/>
-            </a:endParaRPr>
-          </a:p>
-        </p:txBody>
-      </p:sp>
-    </p:spTree>
-    <p:extLst>
-      <p:ext uri="{BB962C8B-B14F-4D97-AF65-F5344CB8AC3E}">
-        <p14:creationId xmlns:p14="http://schemas.microsoft.com/office/powerpoint/2010/main" val="2701725271"/>
-      </p:ext>
-    </p:extLst>
-  </p:cSld>
-  <p:clrMapOvr>
-    <a:masterClrMapping/>
-  </p:clrMapOvr>
-</p:sld>
-</file>
-
-<file path=ppt/slides/slide85.xml><?xml version="1.0" encoding="utf-8"?>
-<p:sld xmlns:a="http://schemas.openxmlformats.org/drawingml/2006/main" xmlns:r="http://schemas.openxmlformats.org/officeDocument/2006/relationships" xmlns:p="http://schemas.openxmlformats.org/presentationml/2006/main">
-  <p:cSld>
-    <p:spTree>
-      <p:nvGrpSpPr>
-        <p:cNvPr id="1" name="">
-          <a:extLst>
-            <a:ext uri="{FF2B5EF4-FFF2-40B4-BE49-F238E27FC236}">
-              <a16:creationId xmlns:a16="http://schemas.microsoft.com/office/drawing/2014/main" id="{220C0560-F42D-B3E9-EB8D-F86DFA3CEB4B}"/>
-            </a:ext>
-          </a:extLst>
-        </p:cNvPr>
-        <p:cNvGrpSpPr/>
-        <p:nvPr/>
-      </p:nvGrpSpPr>
-      <p:grpSpPr>
-        <a:xfrm>
-          <a:off x="0" y="0"/>
-          <a:ext cx="0" cy="0"/>
-          <a:chOff x="0" y="0"/>
-          <a:chExt cx="0" cy="0"/>
-        </a:xfrm>
-      </p:grpSpPr>
-      <p:sp>
-        <p:nvSpPr>
-          <p:cNvPr id="3" name="Espaço Reservado para Conteúdo 2">
-            <a:extLst>
-              <a:ext uri="{FF2B5EF4-FFF2-40B4-BE49-F238E27FC236}">
-                <a16:creationId xmlns:a16="http://schemas.microsoft.com/office/drawing/2014/main" id="{B512BE16-7D88-7FAD-8E12-6744BEE2C4E8}"/>
-              </a:ext>
-            </a:extLst>
-          </p:cNvPr>
-          <p:cNvSpPr>
-            <a:spLocks noGrp="1"/>
-          </p:cNvSpPr>
-          <p:nvPr>
-            <p:ph idx="1"/>
-          </p:nvPr>
-        </p:nvSpPr>
-        <p:spPr>
-          <a:xfrm>
-            <a:off x="10509" y="-3937"/>
-            <a:ext cx="12181491" cy="6861937"/>
-          </a:xfrm>
-        </p:spPr>
-        <p:txBody>
-          <a:bodyPr>
-            <a:noAutofit/>
-          </a:bodyPr>
-          <a:lstStyle/>
-          <a:p>
-            <a:pPr algn="ctr">
-              <a:lnSpc>
-                <a:spcPct val="100000"/>
-              </a:lnSpc>
-              <a:buNone/>
-            </a:pPr>
-            <a:r>
-              <a:rPr lang="en-US" sz="8800" dirty="0">
-                <a:solidFill>
-                  <a:srgbClr val="FF0000"/>
-                </a:solidFill>
-                <a:cs typeface="Arial" panose="020B0604020202020204" pitchFamily="34" charset="0"/>
-              </a:rPr>
-              <a:t>VS BLOCO 22</a:t>
-            </a:r>
-          </a:p>
-          <a:p>
-            <a:pPr marL="36000" indent="-252000" algn="ctr">
-              <a:lnSpc>
-                <a:spcPct val="100000"/>
-              </a:lnSpc>
-              <a:spcBef>
-                <a:spcPts val="0"/>
-              </a:spcBef>
-              <a:buNone/>
-            </a:pPr>
-            <a:r>
-              <a:rPr lang="pt-BR" sz="7200" dirty="0"/>
-              <a:t>Santa Catarina </a:t>
-            </a:r>
-            <a:r>
-              <a:rPr lang="pt-BR" sz="7200" dirty="0">
-                <a:solidFill>
-                  <a:srgbClr val="FF0000"/>
-                </a:solidFill>
-              </a:rPr>
-              <a:t>Sol</a:t>
-            </a:r>
-            <a:br>
-              <a:rPr lang="pt-BR" sz="7200" dirty="0"/>
-            </a:br>
-            <a:r>
-              <a:rPr lang="pt-BR" sz="7200" dirty="0"/>
-              <a:t>Baile Bom </a:t>
-            </a:r>
-            <a:r>
-              <a:rPr lang="pt-BR" sz="7200" dirty="0" err="1">
-                <a:solidFill>
-                  <a:srgbClr val="FF0000"/>
-                </a:solidFill>
-              </a:rPr>
-              <a:t>Fa</a:t>
-            </a:r>
-            <a:br>
-              <a:rPr lang="pt-BR" sz="7200" dirty="0"/>
-            </a:br>
-            <a:r>
-              <a:rPr lang="pt-BR" sz="7200" dirty="0"/>
-              <a:t>Diga Locutor </a:t>
-            </a:r>
-            <a:r>
-              <a:rPr lang="pt-BR" sz="7200" dirty="0" err="1">
-                <a:solidFill>
-                  <a:srgbClr val="FF0000"/>
-                </a:solidFill>
-              </a:rPr>
-              <a:t>Mib</a:t>
-            </a:r>
-            <a:endParaRPr lang="pt-BR" sz="8000" dirty="0">
-              <a:solidFill>
-                <a:srgbClr val="FF0000"/>
-              </a:solidFill>
-              <a:cs typeface="Arial" panose="020B0604020202020204" pitchFamily="34" charset="0"/>
-            </a:endParaRPr>
-          </a:p>
-        </p:txBody>
-      </p:sp>
-    </p:spTree>
-    <p:extLst>
-      <p:ext uri="{BB962C8B-B14F-4D97-AF65-F5344CB8AC3E}">
-        <p14:creationId xmlns:p14="http://schemas.microsoft.com/office/powerpoint/2010/main" val="2144242260"/>
-      </p:ext>
-    </p:extLst>
-  </p:cSld>
-  <p:clrMapOvr>
-    <a:masterClrMapping/>
-  </p:clrMapOvr>
-</p:sld>
-</file>
-
-<file path=ppt/slides/slide86.xml><?xml version="1.0" encoding="utf-8"?>
-<p:sld xmlns:a="http://schemas.openxmlformats.org/drawingml/2006/main" xmlns:r="http://schemas.openxmlformats.org/officeDocument/2006/relationships" xmlns:p="http://schemas.openxmlformats.org/presentationml/2006/main">
-  <p:cSld>
-    <p:spTree>
-      <p:nvGrpSpPr>
-        <p:cNvPr id="1" name="">
-          <a:extLst>
-            <a:ext uri="{FF2B5EF4-FFF2-40B4-BE49-F238E27FC236}">
-              <a16:creationId xmlns:a16="http://schemas.microsoft.com/office/drawing/2014/main" id="{D3C9A1D3-2113-71EE-4462-E79F923B6E6E}"/>
-            </a:ext>
-          </a:extLst>
-        </p:cNvPr>
-        <p:cNvGrpSpPr/>
-        <p:nvPr/>
-      </p:nvGrpSpPr>
-      <p:grpSpPr>
-        <a:xfrm>
-          <a:off x="0" y="0"/>
-          <a:ext cx="0" cy="0"/>
-          <a:chOff x="0" y="0"/>
-          <a:chExt cx="0" cy="0"/>
-        </a:xfrm>
-      </p:grpSpPr>
-      <p:sp>
-        <p:nvSpPr>
-          <p:cNvPr id="3" name="Espaço Reservado para Conteúdo 2">
-            <a:extLst>
-              <a:ext uri="{FF2B5EF4-FFF2-40B4-BE49-F238E27FC236}">
-                <a16:creationId xmlns:a16="http://schemas.microsoft.com/office/drawing/2014/main" id="{7C70BAA2-54A1-BAA9-5EF9-9F93F22AE700}"/>
-              </a:ext>
-            </a:extLst>
-          </p:cNvPr>
-          <p:cNvSpPr>
-            <a:spLocks noGrp="1"/>
-          </p:cNvSpPr>
-          <p:nvPr>
-            <p:ph idx="1"/>
-          </p:nvPr>
-        </p:nvSpPr>
-        <p:spPr>
-          <a:xfrm>
-            <a:off x="10509" y="-3937"/>
-            <a:ext cx="12181491" cy="6861937"/>
-          </a:xfrm>
-        </p:spPr>
-        <p:txBody>
-          <a:bodyPr>
-            <a:noAutofit/>
-          </a:bodyPr>
-          <a:lstStyle/>
-          <a:p>
-            <a:pPr algn="ctr">
-              <a:lnSpc>
-                <a:spcPct val="100000"/>
-              </a:lnSpc>
-              <a:buNone/>
-            </a:pPr>
-            <a:r>
-              <a:rPr lang="en-US" sz="8800" dirty="0">
-                <a:solidFill>
-                  <a:srgbClr val="FF0000"/>
-                </a:solidFill>
-                <a:cs typeface="Arial" panose="020B0604020202020204" pitchFamily="34" charset="0"/>
-              </a:rPr>
-              <a:t>VS BLOCO 23</a:t>
-            </a:r>
-          </a:p>
-          <a:p>
-            <a:pPr marL="36000" indent="-252000" algn="ctr">
-              <a:lnSpc>
-                <a:spcPct val="100000"/>
-              </a:lnSpc>
-              <a:spcBef>
-                <a:spcPts val="0"/>
-              </a:spcBef>
-              <a:buNone/>
-            </a:pPr>
-            <a:r>
-              <a:rPr lang="pt-BR" sz="7200" dirty="0"/>
-              <a:t>Vagabundo </a:t>
-            </a:r>
-            <a:r>
-              <a:rPr lang="pt-BR" sz="7200" dirty="0" err="1">
-                <a:solidFill>
-                  <a:srgbClr val="FF0000"/>
-                </a:solidFill>
-              </a:rPr>
-              <a:t>SIBm</a:t>
-            </a:r>
-            <a:br>
-              <a:rPr lang="pt-BR" sz="7200" dirty="0"/>
-            </a:br>
-            <a:r>
-              <a:rPr lang="pt-BR" sz="7200" dirty="0"/>
-              <a:t>Agarra </a:t>
-            </a:r>
-            <a:r>
-              <a:rPr lang="pt-BR" sz="7200" dirty="0" err="1"/>
-              <a:t>Agara</a:t>
-            </a:r>
-            <a:r>
-              <a:rPr lang="pt-BR" sz="7200" dirty="0"/>
-              <a:t> </a:t>
-            </a:r>
-            <a:r>
-              <a:rPr lang="pt-BR" sz="7200" dirty="0">
-                <a:solidFill>
-                  <a:srgbClr val="FF0000"/>
-                </a:solidFill>
-              </a:rPr>
-              <a:t>Re</a:t>
-            </a:r>
-            <a:br>
-              <a:rPr lang="pt-BR" sz="7200" dirty="0"/>
-            </a:br>
-            <a:r>
-              <a:rPr lang="pt-BR" sz="7200" dirty="0"/>
-              <a:t>Vira e Mexe </a:t>
-            </a:r>
-            <a:r>
-              <a:rPr lang="pt-BR" sz="7200" dirty="0">
-                <a:solidFill>
-                  <a:srgbClr val="FF0000"/>
-                </a:solidFill>
-              </a:rPr>
-              <a:t>Mi</a:t>
-            </a:r>
-            <a:endParaRPr lang="pt-BR" sz="8000" dirty="0">
-              <a:solidFill>
-                <a:srgbClr val="FF0000"/>
-              </a:solidFill>
-              <a:cs typeface="Arial" panose="020B0604020202020204" pitchFamily="34" charset="0"/>
-            </a:endParaRPr>
-          </a:p>
-        </p:txBody>
-      </p:sp>
-    </p:spTree>
-    <p:extLst>
-      <p:ext uri="{BB962C8B-B14F-4D97-AF65-F5344CB8AC3E}">
-        <p14:creationId xmlns:p14="http://schemas.microsoft.com/office/powerpoint/2010/main" val="744409674"/>
-      </p:ext>
-    </p:extLst>
-  </p:cSld>
-  <p:clrMapOvr>
-    <a:masterClrMapping/>
-  </p:clrMapOvr>
-</p:sld>
-</file>
-
-<file path=ppt/slides/slide87.xml><?xml version="1.0" encoding="utf-8"?>
-<p:sld xmlns:a="http://schemas.openxmlformats.org/drawingml/2006/main" xmlns:p="http://schemas.openxmlformats.org/presentationml/2006/main" xmlns:r="http://schemas.openxmlformats.org/officeDocument/2006/relationships">
-  <p:cSld>
-    <p:spTree>
-      <p:nvGrpSpPr>
-        <p:cNvPr id="1" name=""/>
-        <p:cNvGrpSpPr/>
-        <p:nvPr/>
-      </p:nvGrpSpPr>
-      <p:grpSpPr/>
-      <p:sp>
-        <p:nvSpPr>
-          <p:cNvPr id="3" name="Espaço Reservado para Conteúdo 2">
-            <a:extLst>
-              <a:ext uri="{FF2B5EF4-FFF2-40B4-BE49-F238E27FC236}">
-                <a16:creationId xmlns:a16="http://schemas.microsoft.com/office/drawing/2014/main" id="{7C70BAA2-54A1-BAA9-5EF9-9F93F22AE700}"/>
-              </a:ext>
-            </a:extLst>
-          </p:cNvPr>
-          <p:cNvSpPr>
-            <a:spLocks noGrp="1"/>
-          </p:cNvSpPr>
-          <p:nvPr>
-            <p:ph idx="1"/>
-          </p:nvPr>
-        </p:nvSpPr>
-        <p:spPr>
-          <a:xfrm>
-            <a:off x="10509" y="-3937"/>
-            <a:ext cx="12181491" cy="6861937"/>
-          </a:xfrm>
-        </p:spPr>
-        <p:txBody>
-          <a:bodyPr>
-            <a:noAutofit/>
-          </a:bodyPr>
-          <a:lstStyle/>
-          <a:p>
-            <a:pPr algn="ctr">
-              <a:lnSpc>
-                <a:spcPct val="100000"/>
-              </a:lnSpc>
-              <a:buNone/>
-            </a:pPr>
-            <a:r>
-              <a:rPr lang="en-US" sz="8800" dirty="0">
-                <a:solidFill>
-                  <a:srgbClr val="FF0000"/>
-                </a:solidFill>
-                <a:cs typeface="Arial" panose="020B0604020202020204" pitchFamily="34" charset="0"/>
-              </a:rPr>
-              <a:t>VS BLOCO 24</a:t>
-            </a:r>
-          </a:p>
-          <a:p>
-            <a:pPr marL="36000" indent="-252000" algn="ctr">
-              <a:lnSpc>
-                <a:spcPct val="100000"/>
-              </a:lnSpc>
-              <a:spcBef>
-                <a:spcPts val="0"/>
-              </a:spcBef>
-              <a:buNone/>
-            </a:pPr>
-            <a:r>
-              <a:rPr lang="pt-BR" sz="7200" dirty="0"/>
-              <a:t>Alô Galera </a:t>
-            </a:r>
-            <a:r>
-              <a:rPr lang="pt-BR" sz="7200" dirty="0">
-                <a:solidFill>
-                  <a:srgbClr val="FF0000"/>
-                </a:solidFill>
-              </a:rPr>
-              <a:t>??</a:t>
-            </a:r>
-            <a:br>
-              <a:rPr lang="pt-BR" sz="7200" dirty="0"/>
-            </a:br>
-            <a:r>
-              <a:rPr lang="pt-BR" sz="7200" dirty="0"/>
-              <a:t>Essa Cama Eu Não Vendo </a:t>
-            </a:r>
-            <a:r>
-              <a:rPr lang="pt-BR" sz="7200" dirty="0">
-                <a:solidFill>
-                  <a:srgbClr val="FF0000"/>
-                </a:solidFill>
-              </a:rPr>
-              <a:t>??</a:t>
-            </a:r>
-            <a:br>
-              <a:rPr lang="pt-BR" sz="7200" dirty="0"/>
-            </a:br>
-            <a:r>
-              <a:rPr lang="pt-BR" sz="7200" dirty="0"/>
-              <a:t>Pintou Uma Paixão </a:t>
-            </a:r>
-            <a:r>
-              <a:rPr lang="pt-BR" sz="7200" dirty="0">
-                <a:solidFill>
-                  <a:srgbClr val="FF0000"/>
-                </a:solidFill>
-              </a:rPr>
-              <a:t>??</a:t>
-            </a:r>
-            <a:br>
-              <a:rPr lang="pt-BR" sz="7200" dirty="0"/>
-            </a:br>
-            <a:r>
-              <a:rPr lang="pt-BR" sz="7200" dirty="0"/>
-              <a:t>Transgênica </a:t>
-            </a:r>
-            <a:r>
-              <a:rPr lang="pt-BR" sz="7200" dirty="0">
-                <a:solidFill>
-                  <a:srgbClr val="FF0000"/>
-                </a:solidFill>
-              </a:rPr>
-              <a:t>??</a:t>
-            </a:r>
-            <a:br>
-              <a:rPr lang="pt-BR" sz="7200" dirty="0"/>
-            </a:br>
-            <a:r>
-              <a:rPr lang="pt-BR" sz="7200" dirty="0"/>
-              <a:t>Algo Me Diz </a:t>
-            </a:r>
-            <a:r>
-              <a:rPr lang="pt-BR" sz="7200" dirty="0">
-                <a:solidFill>
-                  <a:srgbClr val="FF0000"/>
-                </a:solidFill>
-              </a:rPr>
-              <a:t>??</a:t>
-            </a:r>
-          </a:p>
-        </p:txBody>
-      </p:sp>
-    </p:spTree>
-  </p:cSld>
-  <p:clrMapOvr>
-    <a:masterClrMapping/>
-  </p:clrMapOvr>
-</p:sld>
-</file>
-
-<file path=ppt/slides/slide88.xml><?xml version="1.0" encoding="utf-8"?>
-<p:sld xmlns:a="http://schemas.openxmlformats.org/drawingml/2006/main" xmlns:p="http://schemas.openxmlformats.org/presentationml/2006/main" xmlns:r="http://schemas.openxmlformats.org/officeDocument/2006/relationships">
-  <p:cSld>
-    <p:spTree>
-      <p:nvGrpSpPr>
-        <p:cNvPr id="1" name=""/>
-        <p:cNvGrpSpPr/>
-        <p:nvPr/>
-      </p:nvGrpSpPr>
-      <p:grpSpPr/>
-      <p:sp>
-        <p:nvSpPr>
-          <p:cNvPr id="3" name="Espaço Reservado para Conteúdo 2">
-            <a:extLst>
-              <a:ext uri="{FF2B5EF4-FFF2-40B4-BE49-F238E27FC236}">
-                <a16:creationId xmlns:a16="http://schemas.microsoft.com/office/drawing/2014/main" id="{7C70BAA2-54A1-BAA9-5EF9-9F93F22AE700}"/>
-              </a:ext>
-            </a:extLst>
-          </p:cNvPr>
-          <p:cNvSpPr>
-            <a:spLocks noGrp="1"/>
-          </p:cNvSpPr>
-          <p:nvPr>
-            <p:ph idx="1"/>
-          </p:nvPr>
-        </p:nvSpPr>
-        <p:spPr>
-          <a:xfrm>
-            <a:off x="10509" y="-3937"/>
-            <a:ext cx="12181491" cy="6861937"/>
-          </a:xfrm>
-        </p:spPr>
-        <p:txBody>
-          <a:bodyPr>
-            <a:noAutofit/>
-          </a:bodyPr>
-          <a:lstStyle/>
-          <a:p>
-            <a:pPr algn="ctr">
-              <a:lnSpc>
-                <a:spcPct val="100000"/>
-              </a:lnSpc>
-              <a:buNone/>
-            </a:pPr>
-            <a:r>
-              <a:rPr lang="en-US" sz="8800" dirty="0">
-                <a:solidFill>
-                  <a:srgbClr val="FF0000"/>
-                </a:solidFill>
-                <a:cs typeface="Arial" panose="020B0604020202020204" pitchFamily="34" charset="0"/>
-              </a:rPr>
-              <a:t>VS BLOCO 25</a:t>
-            </a:r>
-          </a:p>
-          <a:p>
-            <a:pPr marL="36000" indent="-252000" algn="ctr">
-              <a:lnSpc>
-                <a:spcPct val="100000"/>
-              </a:lnSpc>
-              <a:spcBef>
-                <a:spcPts val="0"/>
-              </a:spcBef>
-              <a:buNone/>
-            </a:pPr>
-            <a:r>
-              <a:rPr lang="pt-BR" sz="7200" dirty="0"/>
-              <a:t>Barril de Chopp </a:t>
-            </a:r>
-            <a:r>
-              <a:rPr lang="pt-BR" sz="7200" dirty="0">
-                <a:solidFill>
-                  <a:srgbClr val="FF0000"/>
-                </a:solidFill>
-              </a:rPr>
-              <a:t>Sib-Mib</a:t>
-            </a:r>
-            <a:br>
-              <a:rPr lang="pt-BR" sz="7200" dirty="0"/>
-            </a:br>
-            <a:r>
-              <a:rPr lang="pt-BR" sz="7200" dirty="0"/>
-              <a:t>Ouro na Estrada </a:t>
-            </a:r>
-            <a:r>
-              <a:rPr lang="pt-BR" sz="7200" dirty="0">
-                <a:solidFill>
-                  <a:srgbClr val="FF0000"/>
-                </a:solidFill>
-              </a:rPr>
-              <a:t>??</a:t>
-            </a:r>
-            <a:br>
-              <a:rPr lang="pt-BR" sz="7200" dirty="0"/>
-            </a:br>
-            <a:r>
-              <a:rPr lang="pt-BR" sz="7200" dirty="0"/>
-              <a:t>Bebidas de Amor </a:t>
-            </a:r>
-            <a:r>
-              <a:rPr lang="pt-BR" sz="7200" dirty="0">
-                <a:solidFill>
-                  <a:srgbClr val="FF0000"/>
-                </a:solidFill>
-              </a:rPr>
-              <a:t>??</a:t>
-            </a:r>
-          </a:p>
-        </p:txBody>
-      </p:sp>
-    </p:spTree>
-  </p:cSld>
-  <p:clrMapOvr>
-    <a:masterClrMapping/>
-  </p:clrMapOvr>
-</p:sld>
-</file>
-
-<file path=ppt/slides/slide89.xml><?xml version="1.0" encoding="utf-8"?>
-<p:sld xmlns:a="http://schemas.openxmlformats.org/drawingml/2006/main" xmlns:p="http://schemas.openxmlformats.org/presentationml/2006/main" xmlns:r="http://schemas.openxmlformats.org/officeDocument/2006/relationships">
-  <p:cSld>
-    <p:spTree>
-      <p:nvGrpSpPr>
-        <p:cNvPr id="1" name=""/>
-        <p:cNvGrpSpPr/>
-        <p:nvPr/>
-      </p:nvGrpSpPr>
-      <p:grpSpPr/>
-      <p:sp>
-        <p:nvSpPr>
-          <p:cNvPr id="3" name="Espaço Reservado para Conteúdo 2">
-            <a:extLst>
-              <a:ext uri="{FF2B5EF4-FFF2-40B4-BE49-F238E27FC236}">
-                <a16:creationId xmlns:a16="http://schemas.microsoft.com/office/drawing/2014/main" id="{7C70BAA2-54A1-BAA9-5EF9-9F93F22AE700}"/>
-              </a:ext>
-            </a:extLst>
-          </p:cNvPr>
-          <p:cNvSpPr>
-            <a:spLocks noGrp="1"/>
-          </p:cNvSpPr>
-          <p:nvPr>
-            <p:ph idx="1"/>
-          </p:nvPr>
-        </p:nvSpPr>
-        <p:spPr>
-          <a:xfrm>
-            <a:off x="10509" y="-3937"/>
-            <a:ext cx="12181491" cy="6861937"/>
-          </a:xfrm>
-        </p:spPr>
-        <p:txBody>
-          <a:bodyPr>
-            <a:noAutofit/>
-          </a:bodyPr>
-          <a:lstStyle/>
-          <a:p>
-            <a:pPr algn="ctr">
-              <a:lnSpc>
-                <a:spcPct val="100000"/>
-              </a:lnSpc>
-              <a:buNone/>
-            </a:pPr>
-            <a:r>
-              <a:rPr lang="en-US" sz="8800" dirty="0">
-                <a:solidFill>
-                  <a:srgbClr val="FF0000"/>
-                </a:solidFill>
-                <a:cs typeface="Arial" panose="020B0604020202020204" pitchFamily="34" charset="0"/>
-              </a:rPr>
-              <a:t>VS BLOCO 26</a:t>
-            </a:r>
-          </a:p>
-          <a:p>
-            <a:pPr marL="36000" indent="-252000" algn="ctr">
-              <a:lnSpc>
-                <a:spcPct val="100000"/>
-              </a:lnSpc>
-              <a:spcBef>
-                <a:spcPts val="0"/>
-              </a:spcBef>
-              <a:buNone/>
-            </a:pPr>
-            <a:r>
-              <a:rPr lang="pt-BR" sz="7200" dirty="0"/>
-              <a:t>Beija Beija </a:t>
-            </a:r>
-            <a:r>
-              <a:rPr lang="pt-BR" sz="7200" dirty="0">
-                <a:solidFill>
-                  <a:srgbClr val="FF0000"/>
-                </a:solidFill>
-              </a:rPr>
-              <a:t>??</a:t>
-            </a:r>
-            <a:br>
-              <a:rPr lang="pt-BR" sz="7200" dirty="0"/>
-            </a:br>
-            <a:r>
-              <a:rPr lang="pt-BR" sz="7200" dirty="0"/>
-              <a:t>Marreca </a:t>
-            </a:r>
-            <a:r>
-              <a:rPr lang="pt-BR" sz="7200" dirty="0">
-                <a:solidFill>
-                  <a:srgbClr val="FF0000"/>
-                </a:solidFill>
-              </a:rPr>
-              <a:t>??</a:t>
-            </a:r>
-            <a:br>
-              <a:rPr lang="pt-BR" sz="7200" dirty="0"/>
-            </a:br>
-            <a:r>
-              <a:rPr lang="pt-BR" sz="7200" dirty="0"/>
-              <a:t>Kerbfert </a:t>
-            </a:r>
-            <a:r>
-              <a:rPr lang="pt-BR" sz="7200" dirty="0">
-                <a:solidFill>
-                  <a:srgbClr val="FF0000"/>
-                </a:solidFill>
-              </a:rPr>
-              <a:t>??</a:t>
-            </a:r>
-          </a:p>
-        </p:txBody>
-      </p:sp>
-    </p:spTree>
-  </p:cSld>
-  <p:clrMapOvr>
-    <a:masterClrMapping/>
-  </p:clrMapOvr>
-</p:sld>
-</file>
-
 <file path=ppt/slides/slide9.xml><?xml version="1.0" encoding="utf-8"?>
 <p:sld xmlns:a="http://schemas.openxmlformats.org/drawingml/2006/main" xmlns:r="http://schemas.openxmlformats.org/officeDocument/2006/relationships" xmlns:p="http://schemas.openxmlformats.org/presentationml/2006/main">
   <p:cSld>
@@ -19332,795 +15098,6 @@
         <p14:creationId xmlns:p14="http://schemas.microsoft.com/office/powerpoint/2010/main" val="1373900961"/>
       </p:ext>
     </p:extLst>
-  </p:cSld>
-  <p:clrMapOvr>
-    <a:masterClrMapping/>
-  </p:clrMapOvr>
-</p:sld>
-</file>
-
-<file path=ppt/slides/slide90.xml><?xml version="1.0" encoding="utf-8"?>
-<p:sld xmlns:a="http://schemas.openxmlformats.org/drawingml/2006/main" xmlns:p="http://schemas.openxmlformats.org/presentationml/2006/main" xmlns:r="http://schemas.openxmlformats.org/officeDocument/2006/relationships">
-  <p:cSld>
-    <p:spTree>
-      <p:nvGrpSpPr>
-        <p:cNvPr id="1" name=""/>
-        <p:cNvGrpSpPr/>
-        <p:nvPr/>
-      </p:nvGrpSpPr>
-      <p:grpSpPr/>
-      <p:sp>
-        <p:nvSpPr>
-          <p:cNvPr id="3" name="Espaço Reservado para Conteúdo 2">
-            <a:extLst>
-              <a:ext uri="{FF2B5EF4-FFF2-40B4-BE49-F238E27FC236}">
-                <a16:creationId xmlns:a16="http://schemas.microsoft.com/office/drawing/2014/main" id="{7C70BAA2-54A1-BAA9-5EF9-9F93F22AE700}"/>
-              </a:ext>
-            </a:extLst>
-          </p:cNvPr>
-          <p:cNvSpPr>
-            <a:spLocks noGrp="1"/>
-          </p:cNvSpPr>
-          <p:nvPr>
-            <p:ph idx="1"/>
-          </p:nvPr>
-        </p:nvSpPr>
-        <p:spPr>
-          <a:xfrm>
-            <a:off x="10509" y="-3937"/>
-            <a:ext cx="12181491" cy="6861937"/>
-          </a:xfrm>
-        </p:spPr>
-        <p:txBody>
-          <a:bodyPr>
-            <a:noAutofit/>
-          </a:bodyPr>
-          <a:lstStyle/>
-          <a:p>
-            <a:pPr algn="ctr">
-              <a:lnSpc>
-                <a:spcPct val="100000"/>
-              </a:lnSpc>
-              <a:buNone/>
-            </a:pPr>
-            <a:r>
-              <a:rPr lang="en-US" sz="8800" dirty="0">
-                <a:solidFill>
-                  <a:srgbClr val="FF0000"/>
-                </a:solidFill>
-                <a:cs typeface="Arial" panose="020B0604020202020204" pitchFamily="34" charset="0"/>
-              </a:rPr>
-              <a:t>VS BLOCO 27</a:t>
-            </a:r>
-          </a:p>
-          <a:p>
-            <a:pPr marL="36000" indent="-252000" algn="ctr">
-              <a:lnSpc>
-                <a:spcPct val="100000"/>
-              </a:lnSpc>
-              <a:spcBef>
-                <a:spcPts val="0"/>
-              </a:spcBef>
-              <a:buNone/>
-            </a:pPr>
-            <a:r>
-              <a:rPr lang="pt-BR" sz="7200" dirty="0"/>
-              <a:t>Camisa Manchada </a:t>
-            </a:r>
-            <a:r>
-              <a:rPr lang="pt-BR" sz="7200" dirty="0">
-                <a:solidFill>
-                  <a:srgbClr val="FF0000"/>
-                </a:solidFill>
-              </a:rPr>
-              <a:t>Mi</a:t>
-            </a:r>
-            <a:br>
-              <a:rPr lang="pt-BR" sz="7200" dirty="0"/>
-            </a:br>
-            <a:r>
-              <a:rPr lang="pt-BR" sz="7200" dirty="0"/>
-              <a:t>&lt;falta o nome&gt; </a:t>
-            </a:r>
-            <a:r>
-              <a:rPr lang="pt-BR" sz="7200" dirty="0">
-                <a:solidFill>
-                  <a:srgbClr val="FF0000"/>
-                </a:solidFill>
-              </a:rPr>
-              <a:t>??</a:t>
-            </a:r>
-            <a:br>
-              <a:rPr lang="pt-BR" sz="7200" dirty="0"/>
-            </a:br>
-            <a:r>
-              <a:rPr lang="pt-BR" sz="7200" dirty="0"/>
-              <a:t>Estrada Da Vida </a:t>
-            </a:r>
-            <a:r>
-              <a:rPr lang="pt-BR" sz="7200" dirty="0">
-                <a:solidFill>
-                  <a:srgbClr val="FF0000"/>
-                </a:solidFill>
-              </a:rPr>
-              <a:t>Sib</a:t>
-            </a:r>
-          </a:p>
-        </p:txBody>
-      </p:sp>
-    </p:spTree>
-  </p:cSld>
-  <p:clrMapOvr>
-    <a:masterClrMapping/>
-  </p:clrMapOvr>
-</p:sld>
-</file>
-
-<file path=ppt/slides/slide91.xml><?xml version="1.0" encoding="utf-8"?>
-<p:sld xmlns:a="http://schemas.openxmlformats.org/drawingml/2006/main" xmlns:p="http://schemas.openxmlformats.org/presentationml/2006/main" xmlns:r="http://schemas.openxmlformats.org/officeDocument/2006/relationships">
-  <p:cSld>
-    <p:spTree>
-      <p:nvGrpSpPr>
-        <p:cNvPr id="1" name=""/>
-        <p:cNvGrpSpPr/>
-        <p:nvPr/>
-      </p:nvGrpSpPr>
-      <p:grpSpPr/>
-      <p:sp>
-        <p:nvSpPr>
-          <p:cNvPr id="3" name="Espaço Reservado para Conteúdo 2">
-            <a:extLst>
-              <a:ext uri="{FF2B5EF4-FFF2-40B4-BE49-F238E27FC236}">
-                <a16:creationId xmlns:a16="http://schemas.microsoft.com/office/drawing/2014/main" id="{7C70BAA2-54A1-BAA9-5EF9-9F93F22AE700}"/>
-              </a:ext>
-            </a:extLst>
-          </p:cNvPr>
-          <p:cNvSpPr>
-            <a:spLocks noGrp="1"/>
-          </p:cNvSpPr>
-          <p:nvPr>
-            <p:ph idx="1"/>
-          </p:nvPr>
-        </p:nvSpPr>
-        <p:spPr>
-          <a:xfrm>
-            <a:off x="10509" y="-3937"/>
-            <a:ext cx="12181491" cy="6861937"/>
-          </a:xfrm>
-        </p:spPr>
-        <p:txBody>
-          <a:bodyPr>
-            <a:noAutofit/>
-          </a:bodyPr>
-          <a:lstStyle/>
-          <a:p>
-            <a:pPr algn="ctr">
-              <a:lnSpc>
-                <a:spcPct val="100000"/>
-              </a:lnSpc>
-              <a:buNone/>
-            </a:pPr>
-            <a:r>
-              <a:rPr lang="en-US" sz="8800" dirty="0">
-                <a:solidFill>
-                  <a:srgbClr val="FF0000"/>
-                </a:solidFill>
-                <a:cs typeface="Arial" panose="020B0604020202020204" pitchFamily="34" charset="0"/>
-              </a:rPr>
-              <a:t>VS BLOCO 28</a:t>
-            </a:r>
-          </a:p>
-          <a:p>
-            <a:pPr marL="36000" indent="-252000" algn="ctr">
-              <a:lnSpc>
-                <a:spcPct val="100000"/>
-              </a:lnSpc>
-              <a:spcBef>
-                <a:spcPts val="0"/>
-              </a:spcBef>
-              <a:buNone/>
-            </a:pPr>
-            <a:r>
-              <a:rPr lang="pt-BR" sz="5400" dirty="0"/>
-              <a:t>Coronel Boogey </a:t>
-            </a:r>
-            <a:r>
-              <a:rPr lang="pt-BR" sz="5400" dirty="0">
-                <a:solidFill>
-                  <a:srgbClr val="FF0000"/>
-                </a:solidFill>
-              </a:rPr>
-              <a:t>??</a:t>
-            </a:r>
-            <a:br>
-              <a:rPr lang="pt-BR" sz="5400" dirty="0"/>
-            </a:br>
-            <a:r>
-              <a:rPr lang="pt-BR" sz="5400" dirty="0"/>
-              <a:t>Marcha do Coelho </a:t>
-            </a:r>
-            <a:r>
-              <a:rPr lang="pt-BR" sz="5400" dirty="0">
-                <a:solidFill>
-                  <a:srgbClr val="FF0000"/>
-                </a:solidFill>
-              </a:rPr>
-              <a:t>??</a:t>
-            </a:r>
-          </a:p>
-        </p:txBody>
-      </p:sp>
-    </p:spTree>
-  </p:cSld>
-  <p:clrMapOvr>
-    <a:masterClrMapping/>
-  </p:clrMapOvr>
-</p:sld>
-</file>
-
-<file path=ppt/slides/slide92.xml><?xml version="1.0" encoding="utf-8"?>
-<p:sld xmlns:a="http://schemas.openxmlformats.org/drawingml/2006/main" xmlns:p="http://schemas.openxmlformats.org/presentationml/2006/main" xmlns:r="http://schemas.openxmlformats.org/officeDocument/2006/relationships">
-  <p:cSld>
-    <p:spTree>
-      <p:nvGrpSpPr>
-        <p:cNvPr id="1" name=""/>
-        <p:cNvGrpSpPr/>
-        <p:nvPr/>
-      </p:nvGrpSpPr>
-      <p:grpSpPr/>
-      <p:sp>
-        <p:nvSpPr>
-          <p:cNvPr id="3" name="Espaço Reservado para Conteúdo 2">
-            <a:extLst>
-              <a:ext uri="{FF2B5EF4-FFF2-40B4-BE49-F238E27FC236}">
-                <a16:creationId xmlns:a16="http://schemas.microsoft.com/office/drawing/2014/main" id="{7C70BAA2-54A1-BAA9-5EF9-9F93F22AE700}"/>
-              </a:ext>
-            </a:extLst>
-          </p:cNvPr>
-          <p:cNvSpPr>
-            <a:spLocks noGrp="1"/>
-          </p:cNvSpPr>
-          <p:nvPr>
-            <p:ph idx="1"/>
-          </p:nvPr>
-        </p:nvSpPr>
-        <p:spPr>
-          <a:xfrm>
-            <a:off x="10509" y="-3937"/>
-            <a:ext cx="12181491" cy="6861937"/>
-          </a:xfrm>
-        </p:spPr>
-        <p:txBody>
-          <a:bodyPr>
-            <a:noAutofit/>
-          </a:bodyPr>
-          <a:lstStyle/>
-          <a:p>
-            <a:pPr algn="ctr">
-              <a:lnSpc>
-                <a:spcPct val="100000"/>
-              </a:lnSpc>
-              <a:buNone/>
-            </a:pPr>
-            <a:r>
-              <a:rPr lang="en-US" sz="8800" dirty="0">
-                <a:solidFill>
-                  <a:srgbClr val="FF0000"/>
-                </a:solidFill>
-                <a:cs typeface="Arial" panose="020B0604020202020204" pitchFamily="34" charset="0"/>
-              </a:rPr>
-              <a:t>VS BLOCO 29</a:t>
-            </a:r>
-          </a:p>
-          <a:p>
-            <a:pPr marL="36000" indent="-252000" algn="ctr">
-              <a:lnSpc>
-                <a:spcPct val="100000"/>
-              </a:lnSpc>
-              <a:spcBef>
-                <a:spcPts val="0"/>
-              </a:spcBef>
-              <a:buNone/>
-            </a:pPr>
-            <a:r>
-              <a:rPr lang="pt-BR" sz="7200" dirty="0"/>
-              <a:t>Dai Que Mioro </a:t>
-            </a:r>
-            <a:r>
-              <a:rPr lang="pt-BR" sz="7200" dirty="0">
-                <a:solidFill>
-                  <a:srgbClr val="FF0000"/>
-                </a:solidFill>
-              </a:rPr>
-              <a:t>??</a:t>
-            </a:r>
-            <a:br>
-              <a:rPr lang="pt-BR" sz="7200" dirty="0"/>
-            </a:br>
-            <a:r>
-              <a:rPr lang="pt-BR" sz="7200" dirty="0"/>
-              <a:t>Latinha na Goteira </a:t>
-            </a:r>
-            <a:r>
-              <a:rPr lang="pt-BR" sz="7200" dirty="0">
-                <a:solidFill>
-                  <a:srgbClr val="FF0000"/>
-                </a:solidFill>
-              </a:rPr>
-              <a:t>Sol</a:t>
-            </a:r>
-            <a:br>
-              <a:rPr lang="pt-BR" sz="7200" dirty="0"/>
-            </a:br>
-            <a:r>
-              <a:rPr lang="pt-BR" sz="7200" dirty="0"/>
-              <a:t>Morenaça </a:t>
-            </a:r>
-            <a:r>
-              <a:rPr lang="pt-BR" sz="7200" dirty="0">
-                <a:solidFill>
-                  <a:srgbClr val="FF0000"/>
-                </a:solidFill>
-              </a:rPr>
-              <a:t>Sol</a:t>
-            </a:r>
-            <a:br>
-              <a:rPr lang="pt-BR" sz="7200" dirty="0"/>
-            </a:br>
-            <a:r>
-              <a:rPr lang="pt-BR" sz="7200" dirty="0"/>
-              <a:t>Misturinha </a:t>
-            </a:r>
-            <a:r>
-              <a:rPr lang="pt-BR" sz="7200" dirty="0">
-                <a:solidFill>
-                  <a:srgbClr val="FF0000"/>
-                </a:solidFill>
-              </a:rPr>
-              <a:t>Fa</a:t>
-            </a:r>
-          </a:p>
-        </p:txBody>
-      </p:sp>
-    </p:spTree>
-  </p:cSld>
-  <p:clrMapOvr>
-    <a:masterClrMapping/>
-  </p:clrMapOvr>
-</p:sld>
-</file>
-
-<file path=ppt/slides/slide93.xml><?xml version="1.0" encoding="utf-8"?>
-<p:sld xmlns:a="http://schemas.openxmlformats.org/drawingml/2006/main" xmlns:p="http://schemas.openxmlformats.org/presentationml/2006/main" xmlns:r="http://schemas.openxmlformats.org/officeDocument/2006/relationships">
-  <p:cSld>
-    <p:spTree>
-      <p:nvGrpSpPr>
-        <p:cNvPr id="1" name=""/>
-        <p:cNvGrpSpPr/>
-        <p:nvPr/>
-      </p:nvGrpSpPr>
-      <p:grpSpPr/>
-      <p:sp>
-        <p:nvSpPr>
-          <p:cNvPr id="3" name="Espaço Reservado para Conteúdo 2">
-            <a:extLst>
-              <a:ext uri="{FF2B5EF4-FFF2-40B4-BE49-F238E27FC236}">
-                <a16:creationId xmlns:a16="http://schemas.microsoft.com/office/drawing/2014/main" id="{7C70BAA2-54A1-BAA9-5EF9-9F93F22AE700}"/>
-              </a:ext>
-            </a:extLst>
-          </p:cNvPr>
-          <p:cNvSpPr>
-            <a:spLocks noGrp="1"/>
-          </p:cNvSpPr>
-          <p:nvPr>
-            <p:ph idx="1"/>
-          </p:nvPr>
-        </p:nvSpPr>
-        <p:spPr>
-          <a:xfrm>
-            <a:off x="10509" y="-3937"/>
-            <a:ext cx="12181491" cy="6861937"/>
-          </a:xfrm>
-        </p:spPr>
-        <p:txBody>
-          <a:bodyPr>
-            <a:noAutofit/>
-          </a:bodyPr>
-          <a:lstStyle/>
-          <a:p>
-            <a:pPr algn="ctr">
-              <a:lnSpc>
-                <a:spcPct val="100000"/>
-              </a:lnSpc>
-              <a:buNone/>
-            </a:pPr>
-            <a:r>
-              <a:rPr lang="en-US" sz="8800" dirty="0">
-                <a:solidFill>
-                  <a:srgbClr val="FF0000"/>
-                </a:solidFill>
-                <a:cs typeface="Arial" panose="020B0604020202020204" pitchFamily="34" charset="0"/>
-              </a:rPr>
-              <a:t>VS BLOCO 30</a:t>
-            </a:r>
-          </a:p>
-          <a:p>
-            <a:pPr marL="36000" indent="-252000" algn="ctr">
-              <a:lnSpc>
-                <a:spcPct val="100000"/>
-              </a:lnSpc>
-              <a:spcBef>
-                <a:spcPts val="0"/>
-              </a:spcBef>
-              <a:buNone/>
-            </a:pPr>
-            <a:r>
-              <a:rPr lang="pt-BR" sz="7200" dirty="0"/>
-              <a:t>Heyo Heyo </a:t>
-            </a:r>
-            <a:r>
-              <a:rPr lang="pt-BR" sz="7200" dirty="0">
-                <a:solidFill>
-                  <a:srgbClr val="FF0000"/>
-                </a:solidFill>
-              </a:rPr>
-              <a:t>Mib</a:t>
-            </a:r>
-            <a:br>
-              <a:rPr lang="pt-BR" sz="7200" dirty="0"/>
-            </a:br>
-            <a:r>
-              <a:rPr lang="pt-BR" sz="7200" dirty="0"/>
-              <a:t>Zic Zac </a:t>
-            </a:r>
-            <a:r>
-              <a:rPr lang="pt-BR" sz="7200" dirty="0">
-                <a:solidFill>
-                  <a:srgbClr val="FF0000"/>
-                </a:solidFill>
-              </a:rPr>
-              <a:t>??</a:t>
-            </a:r>
-            <a:br>
-              <a:rPr lang="pt-BR" sz="7200" dirty="0"/>
-            </a:br>
-            <a:r>
-              <a:rPr lang="pt-BR" sz="7200" dirty="0"/>
-              <a:t>Salada de Frutas </a:t>
-            </a:r>
-            <a:r>
-              <a:rPr lang="pt-BR" sz="7200" dirty="0">
-                <a:solidFill>
-                  <a:srgbClr val="FF0000"/>
-                </a:solidFill>
-              </a:rPr>
-              <a:t>Do</a:t>
-            </a:r>
-          </a:p>
-        </p:txBody>
-      </p:sp>
-    </p:spTree>
-  </p:cSld>
-  <p:clrMapOvr>
-    <a:masterClrMapping/>
-  </p:clrMapOvr>
-</p:sld>
-</file>
-
-<file path=ppt/slides/slide94.xml><?xml version="1.0" encoding="utf-8"?>
-<p:sld xmlns:a="http://schemas.openxmlformats.org/drawingml/2006/main" xmlns:p="http://schemas.openxmlformats.org/presentationml/2006/main" xmlns:r="http://schemas.openxmlformats.org/officeDocument/2006/relationships">
-  <p:cSld>
-    <p:spTree>
-      <p:nvGrpSpPr>
-        <p:cNvPr id="1" name=""/>
-        <p:cNvGrpSpPr/>
-        <p:nvPr/>
-      </p:nvGrpSpPr>
-      <p:grpSpPr/>
-      <p:sp>
-        <p:nvSpPr>
-          <p:cNvPr id="3" name="Espaço Reservado para Conteúdo 2">
-            <a:extLst>
-              <a:ext uri="{FF2B5EF4-FFF2-40B4-BE49-F238E27FC236}">
-                <a16:creationId xmlns:a16="http://schemas.microsoft.com/office/drawing/2014/main" id="{7C70BAA2-54A1-BAA9-5EF9-9F93F22AE700}"/>
-              </a:ext>
-            </a:extLst>
-          </p:cNvPr>
-          <p:cNvSpPr>
-            <a:spLocks noGrp="1"/>
-          </p:cNvSpPr>
-          <p:nvPr>
-            <p:ph idx="1"/>
-          </p:nvPr>
-        </p:nvSpPr>
-        <p:spPr>
-          <a:xfrm>
-            <a:off x="10509" y="-3937"/>
-            <a:ext cx="12181491" cy="6861937"/>
-          </a:xfrm>
-        </p:spPr>
-        <p:txBody>
-          <a:bodyPr>
-            <a:noAutofit/>
-          </a:bodyPr>
-          <a:lstStyle/>
-          <a:p>
-            <a:pPr algn="ctr">
-              <a:lnSpc>
-                <a:spcPct val="100000"/>
-              </a:lnSpc>
-              <a:buNone/>
-            </a:pPr>
-            <a:r>
-              <a:rPr lang="en-US" sz="8800" dirty="0">
-                <a:solidFill>
-                  <a:srgbClr val="FF0000"/>
-                </a:solidFill>
-                <a:cs typeface="Arial" panose="020B0604020202020204" pitchFamily="34" charset="0"/>
-              </a:rPr>
-              <a:t>VS BLOCO 31</a:t>
-            </a:r>
-          </a:p>
-          <a:p>
-            <a:pPr marL="36000" indent="-252000" algn="ctr">
-              <a:lnSpc>
-                <a:spcPct val="100000"/>
-              </a:lnSpc>
-              <a:spcBef>
-                <a:spcPts val="0"/>
-              </a:spcBef>
-              <a:buNone/>
-            </a:pPr>
-            <a:r>
-              <a:rPr lang="pt-BR" sz="7200" dirty="0"/>
-              <a:t>Nova Iorque </a:t>
-            </a:r>
-            <a:r>
-              <a:rPr lang="pt-BR" sz="7200" dirty="0">
-                <a:solidFill>
-                  <a:srgbClr val="FF0000"/>
-                </a:solidFill>
-              </a:rPr>
-              <a:t>??</a:t>
-            </a:r>
-            <a:br>
-              <a:rPr lang="pt-BR" sz="7200" dirty="0"/>
-            </a:br>
-            <a:r>
-              <a:rPr lang="pt-BR" sz="7200" dirty="0"/>
-              <a:t>Meu Ex Amor </a:t>
-            </a:r>
-            <a:r>
-              <a:rPr lang="pt-BR" sz="7200" dirty="0">
-                <a:solidFill>
-                  <a:srgbClr val="FF0000"/>
-                </a:solidFill>
-              </a:rPr>
-              <a:t>??</a:t>
-            </a:r>
-            <a:br>
-              <a:rPr lang="pt-BR" sz="7200" dirty="0"/>
-            </a:br>
-            <a:r>
-              <a:rPr lang="pt-BR" sz="7200" dirty="0"/>
-              <a:t>O Que Tiver Que Vir Virá </a:t>
-            </a:r>
-            <a:r>
-              <a:rPr lang="pt-BR" sz="7200" dirty="0">
-                <a:solidFill>
-                  <a:srgbClr val="FF0000"/>
-                </a:solidFill>
-              </a:rPr>
-              <a:t>Ré</a:t>
-            </a:r>
-          </a:p>
-        </p:txBody>
-      </p:sp>
-    </p:spTree>
-  </p:cSld>
-  <p:clrMapOvr>
-    <a:masterClrMapping/>
-  </p:clrMapOvr>
-</p:sld>
-</file>
-
-<file path=ppt/slides/slide95.xml><?xml version="1.0" encoding="utf-8"?>
-<p:sld xmlns:a="http://schemas.openxmlformats.org/drawingml/2006/main" xmlns:p="http://schemas.openxmlformats.org/presentationml/2006/main" xmlns:r="http://schemas.openxmlformats.org/officeDocument/2006/relationships">
-  <p:cSld>
-    <p:spTree>
-      <p:nvGrpSpPr>
-        <p:cNvPr id="1" name=""/>
-        <p:cNvGrpSpPr/>
-        <p:nvPr/>
-      </p:nvGrpSpPr>
-      <p:grpSpPr/>
-      <p:sp>
-        <p:nvSpPr>
-          <p:cNvPr id="3" name="Espaço Reservado para Conteúdo 2">
-            <a:extLst>
-              <a:ext uri="{FF2B5EF4-FFF2-40B4-BE49-F238E27FC236}">
-                <a16:creationId xmlns:a16="http://schemas.microsoft.com/office/drawing/2014/main" id="{7C70BAA2-54A1-BAA9-5EF9-9F93F22AE700}"/>
-              </a:ext>
-            </a:extLst>
-          </p:cNvPr>
-          <p:cNvSpPr>
-            <a:spLocks noGrp="1"/>
-          </p:cNvSpPr>
-          <p:nvPr>
-            <p:ph idx="1"/>
-          </p:nvPr>
-        </p:nvSpPr>
-        <p:spPr>
-          <a:xfrm>
-            <a:off x="10509" y="-3937"/>
-            <a:ext cx="12181491" cy="6861937"/>
-          </a:xfrm>
-        </p:spPr>
-        <p:txBody>
-          <a:bodyPr>
-            <a:noAutofit/>
-          </a:bodyPr>
-          <a:lstStyle/>
-          <a:p>
-            <a:pPr algn="ctr">
-              <a:lnSpc>
-                <a:spcPct val="100000"/>
-              </a:lnSpc>
-              <a:buNone/>
-            </a:pPr>
-            <a:r>
-              <a:rPr lang="en-US" sz="8800" dirty="0">
-                <a:solidFill>
-                  <a:srgbClr val="FF0000"/>
-                </a:solidFill>
-                <a:cs typeface="Arial" panose="020B0604020202020204" pitchFamily="34" charset="0"/>
-              </a:rPr>
-              <a:t>VS BLOCO 32</a:t>
-            </a:r>
-          </a:p>
-          <a:p>
-            <a:pPr marL="36000" indent="-252000" algn="ctr">
-              <a:lnSpc>
-                <a:spcPct val="100000"/>
-              </a:lnSpc>
-              <a:spcBef>
-                <a:spcPts val="0"/>
-              </a:spcBef>
-              <a:buNone/>
-            </a:pPr>
-            <a:r>
-              <a:rPr lang="pt-BR" sz="7200" dirty="0"/>
-              <a:t>Ponto Chick </a:t>
-            </a:r>
-            <a:r>
-              <a:rPr lang="pt-BR" sz="7200" dirty="0">
-                <a:solidFill>
-                  <a:srgbClr val="FF0000"/>
-                </a:solidFill>
-              </a:rPr>
-              <a:t>Sib-Mib</a:t>
-            </a:r>
-            <a:br>
-              <a:rPr lang="pt-BR" sz="7200" dirty="0"/>
-            </a:br>
-            <a:r>
-              <a:rPr lang="pt-BR" sz="7200" dirty="0"/>
-              <a:t>Rancho Grande </a:t>
-            </a:r>
-            <a:r>
-              <a:rPr lang="pt-BR" sz="7200" dirty="0">
-                <a:solidFill>
-                  <a:srgbClr val="FF0000"/>
-                </a:solidFill>
-              </a:rPr>
-              <a:t>??</a:t>
-            </a:r>
-            <a:br>
-              <a:rPr lang="pt-BR" sz="7200" dirty="0"/>
-            </a:br>
-            <a:r>
-              <a:rPr lang="pt-BR" sz="7200" dirty="0"/>
-              <a:t>Feliz em Festa </a:t>
-            </a:r>
-            <a:r>
-              <a:rPr lang="pt-BR" sz="7200" dirty="0">
-                <a:solidFill>
-                  <a:srgbClr val="FF0000"/>
-                </a:solidFill>
-              </a:rPr>
-              <a:t>??</a:t>
-            </a:r>
-          </a:p>
-        </p:txBody>
-      </p:sp>
-    </p:spTree>
-  </p:cSld>
-  <p:clrMapOvr>
-    <a:masterClrMapping/>
-  </p:clrMapOvr>
-</p:sld>
-</file>
-
-<file path=ppt/slides/slide96.xml><?xml version="1.0" encoding="utf-8"?>
-<p:sld xmlns:a="http://schemas.openxmlformats.org/drawingml/2006/main" xmlns:p="http://schemas.openxmlformats.org/presentationml/2006/main" xmlns:r="http://schemas.openxmlformats.org/officeDocument/2006/relationships">
-  <p:cSld>
-    <p:spTree>
-      <p:nvGrpSpPr>
-        <p:cNvPr id="1" name=""/>
-        <p:cNvGrpSpPr/>
-        <p:nvPr/>
-      </p:nvGrpSpPr>
-      <p:grpSpPr/>
-      <p:sp>
-        <p:nvSpPr>
-          <p:cNvPr id="3" name="Espaço Reservado para Conteúdo 2">
-            <a:extLst>
-              <a:ext uri="{FF2B5EF4-FFF2-40B4-BE49-F238E27FC236}">
-                <a16:creationId xmlns:a16="http://schemas.microsoft.com/office/drawing/2014/main" id="{7C70BAA2-54A1-BAA9-5EF9-9F93F22AE700}"/>
-              </a:ext>
-            </a:extLst>
-          </p:cNvPr>
-          <p:cNvSpPr>
-            <a:spLocks noGrp="1"/>
-          </p:cNvSpPr>
-          <p:nvPr>
-            <p:ph idx="1"/>
-          </p:nvPr>
-        </p:nvSpPr>
-        <p:spPr>
-          <a:xfrm>
-            <a:off x="10509" y="-3937"/>
-            <a:ext cx="12181491" cy="6861937"/>
-          </a:xfrm>
-        </p:spPr>
-        <p:txBody>
-          <a:bodyPr>
-            <a:noAutofit/>
-          </a:bodyPr>
-          <a:lstStyle/>
-          <a:p>
-            <a:pPr algn="ctr">
-              <a:lnSpc>
-                <a:spcPct val="100000"/>
-              </a:lnSpc>
-              <a:buNone/>
-            </a:pPr>
-            <a:r>
-              <a:rPr lang="en-US" sz="8800" dirty="0">
-                <a:solidFill>
-                  <a:srgbClr val="FF0000"/>
-                </a:solidFill>
-                <a:cs typeface="Arial" panose="020B0604020202020204" pitchFamily="34" charset="0"/>
-              </a:rPr>
-              <a:t>VS BLOCO 33</a:t>
-            </a:r>
-          </a:p>
-          <a:p>
-            <a:pPr marL="36000" indent="-252000" algn="ctr">
-              <a:lnSpc>
-                <a:spcPct val="100000"/>
-              </a:lnSpc>
-              <a:spcBef>
-                <a:spcPts val="0"/>
-              </a:spcBef>
-              <a:buNone/>
-            </a:pPr>
-            <a:r>
-              <a:rPr lang="pt-BR" sz="7200" dirty="0"/>
-              <a:t>Loop de Vaneira </a:t>
-            </a:r>
-            <a:r>
-              <a:rPr lang="pt-BR" sz="7200" dirty="0">
-                <a:solidFill>
-                  <a:srgbClr val="FF0000"/>
-                </a:solidFill>
-              </a:rPr>
-              <a:t>82 BPM</a:t>
-            </a:r>
-          </a:p>
-        </p:txBody>
-      </p:sp>
-    </p:spTree>
   </p:cSld>
   <p:clrMapOvr>
     <a:masterClrMapping/>
